--- a/HostelHub-Presentation.pptx
+++ b/HostelHub-Presentation.pptx
@@ -11,6 +11,7 @@
     <p:sldId id="258" r:id="rId5"/>
     <p:sldId id="259" r:id="rId6"/>
     <p:sldId id="260" r:id="rId7"/>
+    <p:sldId id="274" r:id="rId24"/>
     <p:sldId id="261" r:id="rId8"/>
     <p:sldId id="262" r:id="rId9"/>
     <p:sldId id="263" r:id="rId10"/>
@@ -3657,7 +3658,7 @@
                 </a:solidFill>
                 <a:latin typeface="Aptos"/>
               </a:rPr>
-              <a:t>09</a:t>
+              <a:t>10</a:t>
             </a:r>
           </a:p>
         </p:txBody>
@@ -4015,7 +4016,7 @@
                 </a:solidFill>
                 <a:latin typeface="Aptos"/>
               </a:rPr>
-              <a:t>10</a:t>
+              <a:t>11</a:t>
             </a:r>
           </a:p>
         </p:txBody>
@@ -5325,7 +5326,7 @@
                 </a:solidFill>
                 <a:latin typeface="Aptos"/>
               </a:rPr>
-              <a:t>11</a:t>
+              <a:t>12</a:t>
             </a:r>
           </a:p>
         </p:txBody>
@@ -5763,7 +5764,7 @@
                 </a:solidFill>
                 <a:latin typeface="Aptos"/>
               </a:rPr>
-              <a:t>12</a:t>
+              <a:t>13</a:t>
             </a:r>
           </a:p>
         </p:txBody>
@@ -6265,7 +6266,7 @@
                 </a:solidFill>
                 <a:latin typeface="Aptos"/>
               </a:rPr>
-              <a:t>13</a:t>
+              <a:t>14</a:t>
             </a:r>
           </a:p>
         </p:txBody>
@@ -6813,7 +6814,7 @@
                 </a:solidFill>
                 <a:latin typeface="Aptos"/>
               </a:rPr>
-              <a:t>14</a:t>
+              <a:t>15</a:t>
             </a:r>
           </a:p>
         </p:txBody>
@@ -7493,7 +7494,7 @@
                 </a:solidFill>
                 <a:latin typeface="Aptos"/>
               </a:rPr>
-              <a:t>15</a:t>
+              <a:t>16</a:t>
             </a:r>
           </a:p>
         </p:txBody>
@@ -8041,7 +8042,7 @@
                 </a:solidFill>
                 <a:latin typeface="Aptos"/>
               </a:rPr>
-              <a:t>16</a:t>
+              <a:t>17</a:t>
             </a:r>
           </a:p>
         </p:txBody>
@@ -8649,6 +8650,977 @@
 </p:sld>
 </file>
 
+<file path=ppt/slides/slide19.xml><?xml version="1.0" encoding="utf-8"?>
+<p:sld xmlns:a="http://schemas.openxmlformats.org/drawingml/2006/main" xmlns:p="http://schemas.openxmlformats.org/presentationml/2006/main" xmlns:r="http://schemas.openxmlformats.org/officeDocument/2006/relationships">
+  <p:cSld>
+    <p:bg>
+      <p:bgPr>
+        <a:solidFill>
+          <a:srgbClr val="0D1424"/>
+        </a:solidFill>
+        <a:effectLst/>
+      </p:bgPr>
+    </p:bg>
+    <p:spTree>
+      <p:nvGrpSpPr>
+        <p:cNvPr id="1" name=""/>
+        <p:cNvGrpSpPr/>
+        <p:nvPr/>
+      </p:nvGrpSpPr>
+      <p:grpSpPr/>
+      <p:sp>
+        <p:nvSpPr>
+          <p:cNvPr id="2" name="TextBox 1"/>
+          <p:cNvSpPr txBox="1"/>
+          <p:nvPr/>
+        </p:nvSpPr>
+        <p:spPr>
+          <a:xfrm>
+            <a:off x="566928" y="292608"/>
+            <a:ext cx="10881360" cy="274320"/>
+          </a:xfrm>
+          <a:prstGeom prst="rect">
+            <a:avLst/>
+          </a:prstGeom>
+          <a:noFill/>
+        </p:spPr>
+        <p:txBody>
+          <a:bodyPr wrap="square" lIns="36576" tIns="36576" rIns="36576" bIns="36576" anchor="t">
+            <a:spAutoFit/>
+          </a:bodyPr>
+          <a:lstStyle/>
+          <a:p>
+            <a:r>
+              <a:rPr sz="1000" b="1">
+                <a:solidFill>
+                  <a:srgbClr val="45D3E6"/>
+                </a:solidFill>
+                <a:latin typeface="Aptos"/>
+              </a:rPr>
+              <a:t>04 / STACK RATIONALE</a:t>
+            </a:r>
+          </a:p>
+        </p:txBody>
+      </p:sp>
+      <p:sp>
+        <p:nvSpPr>
+          <p:cNvPr id="3" name="TextBox 2"/>
+          <p:cNvSpPr txBox="1"/>
+          <p:nvPr/>
+        </p:nvSpPr>
+        <p:spPr>
+          <a:xfrm>
+            <a:off x="566928" y="621792"/>
+            <a:ext cx="10972800" cy="502920"/>
+          </a:xfrm>
+          <a:prstGeom prst="rect">
+            <a:avLst/>
+          </a:prstGeom>
+          <a:noFill/>
+        </p:spPr>
+        <p:txBody>
+          <a:bodyPr wrap="square" lIns="36576" tIns="36576" rIns="36576" bIns="36576" anchor="t">
+            <a:spAutoFit/>
+          </a:bodyPr>
+          <a:lstStyle/>
+          <a:p>
+            <a:r>
+              <a:rPr sz="2700" b="1">
+                <a:solidFill>
+                  <a:srgbClr val="F3F7FC"/>
+                </a:solidFill>
+                <a:latin typeface="Aptos"/>
+              </a:rPr>
+              <a:t>Alternatives considered</a:t>
+            </a:r>
+          </a:p>
+        </p:txBody>
+      </p:sp>
+      <p:sp>
+        <p:nvSpPr>
+          <p:cNvPr id="4" name="Rectangle 3"/>
+          <p:cNvSpPr/>
+          <p:nvPr/>
+        </p:nvSpPr>
+        <p:spPr>
+          <a:xfrm>
+            <a:off x="566928" y="1207008"/>
+            <a:ext cx="914400" cy="41148"/>
+          </a:xfrm>
+          <a:prstGeom prst="rect">
+            <a:avLst/>
+          </a:prstGeom>
+          <a:solidFill>
+            <a:srgbClr val="45D3E6"/>
+          </a:solidFill>
+          <a:ln>
+            <a:noFill/>
+          </a:ln>
+        </p:spPr>
+        <p:style>
+          <a:lnRef idx="1">
+            <a:schemeClr val="accent1"/>
+          </a:lnRef>
+          <a:fillRef idx="3">
+            <a:schemeClr val="accent1"/>
+          </a:fillRef>
+          <a:effectRef idx="2">
+            <a:schemeClr val="accent1"/>
+          </a:effectRef>
+          <a:fontRef idx="minor">
+            <a:schemeClr val="lt1"/>
+          </a:fontRef>
+        </p:style>
+        <p:txBody>
+          <a:bodyPr rtlCol="0" anchor="ctr"/>
+          <a:lstStyle/>
+          <a:p>
+            <a:pPr algn="ctr"/>
+            <a:endParaRPr/>
+          </a:p>
+        </p:txBody>
+      </p:sp>
+      <p:sp>
+        <p:nvSpPr>
+          <p:cNvPr id="5" name="TextBox 4"/>
+          <p:cNvSpPr txBox="1"/>
+          <p:nvPr/>
+        </p:nvSpPr>
+        <p:spPr>
+          <a:xfrm>
+            <a:off x="11109960" y="6510528"/>
+            <a:ext cx="502920" cy="182880"/>
+          </a:xfrm>
+          <a:prstGeom prst="rect">
+            <a:avLst/>
+          </a:prstGeom>
+          <a:noFill/>
+        </p:spPr>
+        <p:txBody>
+          <a:bodyPr wrap="square" lIns="36576" tIns="36576" rIns="36576" bIns="36576" anchor="t">
+            <a:spAutoFit/>
+          </a:bodyPr>
+          <a:lstStyle/>
+          <a:p>
+            <a:pPr algn="r"/>
+            <a:r>
+              <a:rPr sz="900" b="1">
+                <a:solidFill>
+                  <a:srgbClr val="ADBBCF"/>
+                </a:solidFill>
+                <a:latin typeface="Aptos"/>
+              </a:rPr>
+              <a:t>06</a:t>
+            </a:r>
+          </a:p>
+        </p:txBody>
+      </p:sp>
+      <p:sp>
+        <p:nvSpPr>
+          <p:cNvPr id="6" name="Rounded Rectangle 5"/>
+          <p:cNvSpPr/>
+          <p:nvPr/>
+        </p:nvSpPr>
+        <p:spPr>
+          <a:xfrm>
+            <a:off x="658368" y="1444752"/>
+            <a:ext cx="2514600" cy="475488"/>
+          </a:xfrm>
+          <a:prstGeom prst="roundRect">
+            <a:avLst>
+              <a:gd name="adj" fmla="val 12000"/>
+            </a:avLst>
+          </a:prstGeom>
+          <a:solidFill>
+            <a:srgbClr val="1D2B44"/>
+          </a:solidFill>
+          <a:ln>
+            <a:noFill/>
+          </a:ln>
+        </p:spPr>
+        <p:style>
+          <a:lnRef idx="1">
+            <a:schemeClr val="accent1"/>
+          </a:lnRef>
+          <a:fillRef idx="3">
+            <a:schemeClr val="accent1"/>
+          </a:fillRef>
+          <a:effectRef idx="2">
+            <a:schemeClr val="accent1"/>
+          </a:effectRef>
+          <a:fontRef idx="minor">
+            <a:schemeClr val="lt1"/>
+          </a:fontRef>
+        </p:style>
+        <p:txBody>
+          <a:bodyPr rtlCol="0" anchor="ctr"/>
+          <a:lstStyle/>
+          <a:p>
+            <a:pPr algn="ctr"/>
+            <a:endParaRPr/>
+          </a:p>
+        </p:txBody>
+      </p:sp>
+      <p:sp>
+        <p:nvSpPr>
+          <p:cNvPr id="7" name="TextBox 6"/>
+          <p:cNvSpPr txBox="1"/>
+          <p:nvPr/>
+        </p:nvSpPr>
+        <p:spPr>
+          <a:xfrm>
+            <a:off x="804672" y="1527048"/>
+            <a:ext cx="2240280" cy="256032"/>
+          </a:xfrm>
+          <a:prstGeom prst="rect">
+            <a:avLst/>
+          </a:prstGeom>
+          <a:noFill/>
+        </p:spPr>
+        <p:txBody>
+          <a:bodyPr wrap="square" lIns="36576" tIns="36576" rIns="36576" bIns="36576" anchor="t">
+            <a:spAutoFit/>
+          </a:bodyPr>
+          <a:lstStyle/>
+          <a:p>
+            <a:r>
+              <a:rPr sz="1200" b="1">
+                <a:solidFill>
+                  <a:srgbClr val="45D3E6"/>
+                </a:solidFill>
+                <a:latin typeface="Aptos"/>
+              </a:rPr>
+              <a:t>FastAPI</a:t>
+            </a:r>
+          </a:p>
+        </p:txBody>
+      </p:sp>
+      <p:sp>
+        <p:nvSpPr>
+          <p:cNvPr id="8" name="TextBox 7"/>
+          <p:cNvSpPr txBox="1"/>
+          <p:nvPr/>
+        </p:nvSpPr>
+        <p:spPr>
+          <a:xfrm>
+            <a:off x="3429000" y="1508760"/>
+            <a:ext cx="7909560" cy="310896"/>
+          </a:xfrm>
+          <a:prstGeom prst="rect">
+            <a:avLst/>
+          </a:prstGeom>
+          <a:noFill/>
+        </p:spPr>
+        <p:txBody>
+          <a:bodyPr wrap="square" lIns="36576" tIns="36576" rIns="36576" bIns="36576" anchor="t">
+            <a:spAutoFit/>
+          </a:bodyPr>
+          <a:lstStyle/>
+          <a:p>
+            <a:r>
+              <a:rPr sz="1300" b="0">
+                <a:solidFill>
+                  <a:srgbClr val="F3F7FC"/>
+                </a:solidFill>
+                <a:latin typeface="Aptos"/>
+              </a:rPr>
+              <a:t>over Flask / Django: typed validation and Swagger docs built in</a:t>
+            </a:r>
+          </a:p>
+        </p:txBody>
+      </p:sp>
+      <p:sp>
+        <p:nvSpPr>
+          <p:cNvPr id="9" name="Rounded Rectangle 8"/>
+          <p:cNvSpPr/>
+          <p:nvPr/>
+        </p:nvSpPr>
+        <p:spPr>
+          <a:xfrm>
+            <a:off x="658368" y="2075688"/>
+            <a:ext cx="2514600" cy="475488"/>
+          </a:xfrm>
+          <a:prstGeom prst="roundRect">
+            <a:avLst>
+              <a:gd name="adj" fmla="val 12000"/>
+            </a:avLst>
+          </a:prstGeom>
+          <a:solidFill>
+            <a:srgbClr val="1D2B44"/>
+          </a:solidFill>
+          <a:ln>
+            <a:noFill/>
+          </a:ln>
+        </p:spPr>
+        <p:style>
+          <a:lnRef idx="1">
+            <a:schemeClr val="accent1"/>
+          </a:lnRef>
+          <a:fillRef idx="3">
+            <a:schemeClr val="accent1"/>
+          </a:fillRef>
+          <a:effectRef idx="2">
+            <a:schemeClr val="accent1"/>
+          </a:effectRef>
+          <a:fontRef idx="minor">
+            <a:schemeClr val="lt1"/>
+          </a:fontRef>
+        </p:style>
+        <p:txBody>
+          <a:bodyPr rtlCol="0" anchor="ctr"/>
+          <a:lstStyle/>
+          <a:p>
+            <a:pPr algn="ctr"/>
+            <a:endParaRPr/>
+          </a:p>
+        </p:txBody>
+      </p:sp>
+      <p:sp>
+        <p:nvSpPr>
+          <p:cNvPr id="10" name="TextBox 9"/>
+          <p:cNvSpPr txBox="1"/>
+          <p:nvPr/>
+        </p:nvSpPr>
+        <p:spPr>
+          <a:xfrm>
+            <a:off x="804672" y="2157984"/>
+            <a:ext cx="2240280" cy="256032"/>
+          </a:xfrm>
+          <a:prstGeom prst="rect">
+            <a:avLst/>
+          </a:prstGeom>
+          <a:noFill/>
+        </p:spPr>
+        <p:txBody>
+          <a:bodyPr wrap="square" lIns="36576" tIns="36576" rIns="36576" bIns="36576" anchor="t">
+            <a:spAutoFit/>
+          </a:bodyPr>
+          <a:lstStyle/>
+          <a:p>
+            <a:r>
+              <a:rPr sz="1200" b="1">
+                <a:solidFill>
+                  <a:srgbClr val="45D3E6"/>
+                </a:solidFill>
+                <a:latin typeface="Aptos"/>
+              </a:rPr>
+              <a:t>React + Vite</a:t>
+            </a:r>
+          </a:p>
+        </p:txBody>
+      </p:sp>
+      <p:sp>
+        <p:nvSpPr>
+          <p:cNvPr id="11" name="TextBox 10"/>
+          <p:cNvSpPr txBox="1"/>
+          <p:nvPr/>
+        </p:nvSpPr>
+        <p:spPr>
+          <a:xfrm>
+            <a:off x="3429000" y="2139696"/>
+            <a:ext cx="7909560" cy="310896"/>
+          </a:xfrm>
+          <a:prstGeom prst="rect">
+            <a:avLst/>
+          </a:prstGeom>
+          <a:noFill/>
+        </p:spPr>
+        <p:txBody>
+          <a:bodyPr wrap="square" lIns="36576" tIns="36576" rIns="36576" bIns="36576" anchor="t">
+            <a:spAutoFit/>
+          </a:bodyPr>
+          <a:lstStyle/>
+          <a:p>
+            <a:r>
+              <a:rPr sz="1300" b="0">
+                <a:solidFill>
+                  <a:srgbClr val="F3F7FC"/>
+                </a:solidFill>
+                <a:latin typeface="Aptos"/>
+              </a:rPr>
+              <a:t>over Angular / plain HTML: lighter, fast dev server</a:t>
+            </a:r>
+          </a:p>
+        </p:txBody>
+      </p:sp>
+      <p:sp>
+        <p:nvSpPr>
+          <p:cNvPr id="12" name="Rounded Rectangle 11"/>
+          <p:cNvSpPr/>
+          <p:nvPr/>
+        </p:nvSpPr>
+        <p:spPr>
+          <a:xfrm>
+            <a:off x="658368" y="2706624"/>
+            <a:ext cx="2514600" cy="475488"/>
+          </a:xfrm>
+          <a:prstGeom prst="roundRect">
+            <a:avLst>
+              <a:gd name="adj" fmla="val 12000"/>
+            </a:avLst>
+          </a:prstGeom>
+          <a:solidFill>
+            <a:srgbClr val="1D2B44"/>
+          </a:solidFill>
+          <a:ln>
+            <a:noFill/>
+          </a:ln>
+        </p:spPr>
+        <p:style>
+          <a:lnRef idx="1">
+            <a:schemeClr val="accent1"/>
+          </a:lnRef>
+          <a:fillRef idx="3">
+            <a:schemeClr val="accent1"/>
+          </a:fillRef>
+          <a:effectRef idx="2">
+            <a:schemeClr val="accent1"/>
+          </a:effectRef>
+          <a:fontRef idx="minor">
+            <a:schemeClr val="lt1"/>
+          </a:fontRef>
+        </p:style>
+        <p:txBody>
+          <a:bodyPr rtlCol="0" anchor="ctr"/>
+          <a:lstStyle/>
+          <a:p>
+            <a:pPr algn="ctr"/>
+            <a:endParaRPr/>
+          </a:p>
+        </p:txBody>
+      </p:sp>
+      <p:sp>
+        <p:nvSpPr>
+          <p:cNvPr id="13" name="TextBox 12"/>
+          <p:cNvSpPr txBox="1"/>
+          <p:nvPr/>
+        </p:nvSpPr>
+        <p:spPr>
+          <a:xfrm>
+            <a:off x="804672" y="2788920"/>
+            <a:ext cx="2240280" cy="256032"/>
+          </a:xfrm>
+          <a:prstGeom prst="rect">
+            <a:avLst/>
+          </a:prstGeom>
+          <a:noFill/>
+        </p:spPr>
+        <p:txBody>
+          <a:bodyPr wrap="square" lIns="36576" tIns="36576" rIns="36576" bIns="36576" anchor="t">
+            <a:spAutoFit/>
+          </a:bodyPr>
+          <a:lstStyle/>
+          <a:p>
+            <a:r>
+              <a:rPr sz="1200" b="1">
+                <a:solidFill>
+                  <a:srgbClr val="45D3E6"/>
+                </a:solidFill>
+                <a:latin typeface="Aptos"/>
+              </a:rPr>
+              <a:t>PostgreSQL</a:t>
+            </a:r>
+          </a:p>
+        </p:txBody>
+      </p:sp>
+      <p:sp>
+        <p:nvSpPr>
+          <p:cNvPr id="14" name="TextBox 13"/>
+          <p:cNvSpPr txBox="1"/>
+          <p:nvPr/>
+        </p:nvSpPr>
+        <p:spPr>
+          <a:xfrm>
+            <a:off x="3429000" y="2770632"/>
+            <a:ext cx="7909560" cy="310896"/>
+          </a:xfrm>
+          <a:prstGeom prst="rect">
+            <a:avLst/>
+          </a:prstGeom>
+          <a:noFill/>
+        </p:spPr>
+        <p:txBody>
+          <a:bodyPr wrap="square" lIns="36576" tIns="36576" rIns="36576" bIns="36576" anchor="t">
+            <a:spAutoFit/>
+          </a:bodyPr>
+          <a:lstStyle/>
+          <a:p>
+            <a:r>
+              <a:rPr sz="1300" b="0">
+                <a:solidFill>
+                  <a:srgbClr val="F3F7FC"/>
+                </a:solidFill>
+                <a:latin typeface="Aptos"/>
+              </a:rPr>
+              <a:t>over MySQL / MongoDB: relational data with strict constraints</a:t>
+            </a:r>
+          </a:p>
+        </p:txBody>
+      </p:sp>
+      <p:sp>
+        <p:nvSpPr>
+          <p:cNvPr id="15" name="Rounded Rectangle 14"/>
+          <p:cNvSpPr/>
+          <p:nvPr/>
+        </p:nvSpPr>
+        <p:spPr>
+          <a:xfrm>
+            <a:off x="658368" y="3337560"/>
+            <a:ext cx="2514600" cy="475488"/>
+          </a:xfrm>
+          <a:prstGeom prst="roundRect">
+            <a:avLst>
+              <a:gd name="adj" fmla="val 12000"/>
+            </a:avLst>
+          </a:prstGeom>
+          <a:solidFill>
+            <a:srgbClr val="1D2B44"/>
+          </a:solidFill>
+          <a:ln>
+            <a:noFill/>
+          </a:ln>
+        </p:spPr>
+        <p:style>
+          <a:lnRef idx="1">
+            <a:schemeClr val="accent1"/>
+          </a:lnRef>
+          <a:fillRef idx="3">
+            <a:schemeClr val="accent1"/>
+          </a:fillRef>
+          <a:effectRef idx="2">
+            <a:schemeClr val="accent1"/>
+          </a:effectRef>
+          <a:fontRef idx="minor">
+            <a:schemeClr val="lt1"/>
+          </a:fontRef>
+        </p:style>
+        <p:txBody>
+          <a:bodyPr rtlCol="0" anchor="ctr"/>
+          <a:lstStyle/>
+          <a:p>
+            <a:pPr algn="ctr"/>
+            <a:endParaRPr/>
+          </a:p>
+        </p:txBody>
+      </p:sp>
+      <p:sp>
+        <p:nvSpPr>
+          <p:cNvPr id="16" name="TextBox 15"/>
+          <p:cNvSpPr txBox="1"/>
+          <p:nvPr/>
+        </p:nvSpPr>
+        <p:spPr>
+          <a:xfrm>
+            <a:off x="804672" y="3419856"/>
+            <a:ext cx="2240280" cy="256032"/>
+          </a:xfrm>
+          <a:prstGeom prst="rect">
+            <a:avLst/>
+          </a:prstGeom>
+          <a:noFill/>
+        </p:spPr>
+        <p:txBody>
+          <a:bodyPr wrap="square" lIns="36576" tIns="36576" rIns="36576" bIns="36576" anchor="t">
+            <a:spAutoFit/>
+          </a:bodyPr>
+          <a:lstStyle/>
+          <a:p>
+            <a:r>
+              <a:rPr sz="1200" b="1">
+                <a:solidFill>
+                  <a:srgbClr val="45D3E6"/>
+                </a:solidFill>
+                <a:latin typeface="Aptos"/>
+              </a:rPr>
+              <a:t>GitHub Actions</a:t>
+            </a:r>
+          </a:p>
+        </p:txBody>
+      </p:sp>
+      <p:sp>
+        <p:nvSpPr>
+          <p:cNvPr id="17" name="TextBox 16"/>
+          <p:cNvSpPr txBox="1"/>
+          <p:nvPr/>
+        </p:nvSpPr>
+        <p:spPr>
+          <a:xfrm>
+            <a:off x="3429000" y="3401568"/>
+            <a:ext cx="7909560" cy="310896"/>
+          </a:xfrm>
+          <a:prstGeom prst="rect">
+            <a:avLst/>
+          </a:prstGeom>
+          <a:noFill/>
+        </p:spPr>
+        <p:txBody>
+          <a:bodyPr wrap="square" lIns="36576" tIns="36576" rIns="36576" bIns="36576" anchor="t">
+            <a:spAutoFit/>
+          </a:bodyPr>
+          <a:lstStyle/>
+          <a:p>
+            <a:r>
+              <a:rPr sz="1300" b="0">
+                <a:solidFill>
+                  <a:srgbClr val="F3F7FC"/>
+                </a:solidFill>
+                <a:latin typeface="Aptos"/>
+              </a:rPr>
+              <a:t>over Jenkins: lives next to the code, no CI server to run</a:t>
+            </a:r>
+          </a:p>
+        </p:txBody>
+      </p:sp>
+      <p:sp>
+        <p:nvSpPr>
+          <p:cNvPr id="18" name="Rounded Rectangle 17"/>
+          <p:cNvSpPr/>
+          <p:nvPr/>
+        </p:nvSpPr>
+        <p:spPr>
+          <a:xfrm>
+            <a:off x="658368" y="3968496"/>
+            <a:ext cx="2514600" cy="475488"/>
+          </a:xfrm>
+          <a:prstGeom prst="roundRect">
+            <a:avLst>
+              <a:gd name="adj" fmla="val 12000"/>
+            </a:avLst>
+          </a:prstGeom>
+          <a:solidFill>
+            <a:srgbClr val="1D2B44"/>
+          </a:solidFill>
+          <a:ln>
+            <a:noFill/>
+          </a:ln>
+        </p:spPr>
+        <p:style>
+          <a:lnRef idx="1">
+            <a:schemeClr val="accent1"/>
+          </a:lnRef>
+          <a:fillRef idx="3">
+            <a:schemeClr val="accent1"/>
+          </a:fillRef>
+          <a:effectRef idx="2">
+            <a:schemeClr val="accent1"/>
+          </a:effectRef>
+          <a:fontRef idx="minor">
+            <a:schemeClr val="lt1"/>
+          </a:fontRef>
+        </p:style>
+        <p:txBody>
+          <a:bodyPr rtlCol="0" anchor="ctr"/>
+          <a:lstStyle/>
+          <a:p>
+            <a:pPr algn="ctr"/>
+            <a:endParaRPr/>
+          </a:p>
+        </p:txBody>
+      </p:sp>
+      <p:sp>
+        <p:nvSpPr>
+          <p:cNvPr id="19" name="TextBox 18"/>
+          <p:cNvSpPr txBox="1"/>
+          <p:nvPr/>
+        </p:nvSpPr>
+        <p:spPr>
+          <a:xfrm>
+            <a:off x="804672" y="4050791"/>
+            <a:ext cx="2240280" cy="256032"/>
+          </a:xfrm>
+          <a:prstGeom prst="rect">
+            <a:avLst/>
+          </a:prstGeom>
+          <a:noFill/>
+        </p:spPr>
+        <p:txBody>
+          <a:bodyPr wrap="square" lIns="36576" tIns="36576" rIns="36576" bIns="36576" anchor="t">
+            <a:spAutoFit/>
+          </a:bodyPr>
+          <a:lstStyle/>
+          <a:p>
+            <a:r>
+              <a:rPr sz="1200" b="1">
+                <a:solidFill>
+                  <a:srgbClr val="45D3E6"/>
+                </a:solidFill>
+                <a:latin typeface="Aptos"/>
+              </a:rPr>
+              <a:t>Kubernetes + Helm</a:t>
+            </a:r>
+          </a:p>
+        </p:txBody>
+      </p:sp>
+      <p:sp>
+        <p:nvSpPr>
+          <p:cNvPr id="20" name="TextBox 19"/>
+          <p:cNvSpPr txBox="1"/>
+          <p:nvPr/>
+        </p:nvSpPr>
+        <p:spPr>
+          <a:xfrm>
+            <a:off x="3429000" y="4032504"/>
+            <a:ext cx="7909560" cy="310896"/>
+          </a:xfrm>
+          <a:prstGeom prst="rect">
+            <a:avLst/>
+          </a:prstGeom>
+          <a:noFill/>
+        </p:spPr>
+        <p:txBody>
+          <a:bodyPr wrap="square" lIns="36576" tIns="36576" rIns="36576" bIns="36576" anchor="t">
+            <a:spAutoFit/>
+          </a:bodyPr>
+          <a:lstStyle/>
+          <a:p>
+            <a:r>
+              <a:rPr sz="1300" b="0">
+                <a:solidFill>
+                  <a:srgbClr val="F3F7FC"/>
+                </a:solidFill>
+                <a:latin typeface="Aptos"/>
+              </a:rPr>
+              <a:t>over Docker Swarm: industry standard, one chart for every env</a:t>
+            </a:r>
+          </a:p>
+        </p:txBody>
+      </p:sp>
+      <p:sp>
+        <p:nvSpPr>
+          <p:cNvPr id="21" name="Rounded Rectangle 20"/>
+          <p:cNvSpPr/>
+          <p:nvPr/>
+        </p:nvSpPr>
+        <p:spPr>
+          <a:xfrm>
+            <a:off x="658368" y="4599431"/>
+            <a:ext cx="2514600" cy="475488"/>
+          </a:xfrm>
+          <a:prstGeom prst="roundRect">
+            <a:avLst>
+              <a:gd name="adj" fmla="val 12000"/>
+            </a:avLst>
+          </a:prstGeom>
+          <a:solidFill>
+            <a:srgbClr val="1D2B44"/>
+          </a:solidFill>
+          <a:ln>
+            <a:noFill/>
+          </a:ln>
+        </p:spPr>
+        <p:style>
+          <a:lnRef idx="1">
+            <a:schemeClr val="accent1"/>
+          </a:lnRef>
+          <a:fillRef idx="3">
+            <a:schemeClr val="accent1"/>
+          </a:fillRef>
+          <a:effectRef idx="2">
+            <a:schemeClr val="accent1"/>
+          </a:effectRef>
+          <a:fontRef idx="minor">
+            <a:schemeClr val="lt1"/>
+          </a:fontRef>
+        </p:style>
+        <p:txBody>
+          <a:bodyPr rtlCol="0" anchor="ctr"/>
+          <a:lstStyle/>
+          <a:p>
+            <a:pPr algn="ctr"/>
+            <a:endParaRPr/>
+          </a:p>
+        </p:txBody>
+      </p:sp>
+      <p:sp>
+        <p:nvSpPr>
+          <p:cNvPr id="22" name="TextBox 21"/>
+          <p:cNvSpPr txBox="1"/>
+          <p:nvPr/>
+        </p:nvSpPr>
+        <p:spPr>
+          <a:xfrm>
+            <a:off x="804672" y="4681727"/>
+            <a:ext cx="2240280" cy="256032"/>
+          </a:xfrm>
+          <a:prstGeom prst="rect">
+            <a:avLst/>
+          </a:prstGeom>
+          <a:noFill/>
+        </p:spPr>
+        <p:txBody>
+          <a:bodyPr wrap="square" lIns="36576" tIns="36576" rIns="36576" bIns="36576" anchor="t">
+            <a:spAutoFit/>
+          </a:bodyPr>
+          <a:lstStyle/>
+          <a:p>
+            <a:r>
+              <a:rPr sz="1200" b="1">
+                <a:solidFill>
+                  <a:srgbClr val="45D3E6"/>
+                </a:solidFill>
+                <a:latin typeface="Aptos"/>
+              </a:rPr>
+              <a:t>Argo CD</a:t>
+            </a:r>
+          </a:p>
+        </p:txBody>
+      </p:sp>
+      <p:sp>
+        <p:nvSpPr>
+          <p:cNvPr id="23" name="TextBox 22"/>
+          <p:cNvSpPr txBox="1"/>
+          <p:nvPr/>
+        </p:nvSpPr>
+        <p:spPr>
+          <a:xfrm>
+            <a:off x="3429000" y="4663440"/>
+            <a:ext cx="7909560" cy="310896"/>
+          </a:xfrm>
+          <a:prstGeom prst="rect">
+            <a:avLst/>
+          </a:prstGeom>
+          <a:noFill/>
+        </p:spPr>
+        <p:txBody>
+          <a:bodyPr wrap="square" lIns="36576" tIns="36576" rIns="36576" bIns="36576" anchor="t">
+            <a:spAutoFit/>
+          </a:bodyPr>
+          <a:lstStyle/>
+          <a:p>
+            <a:r>
+              <a:rPr sz="1300" b="0">
+                <a:solidFill>
+                  <a:srgbClr val="F3F7FC"/>
+                </a:solidFill>
+                <a:latin typeface="Aptos"/>
+              </a:rPr>
+              <a:t>over Flux / push deploys: UI shows sync state and drift</a:t>
+            </a:r>
+          </a:p>
+        </p:txBody>
+      </p:sp>
+      <p:sp>
+        <p:nvSpPr>
+          <p:cNvPr id="24" name="Rounded Rectangle 23"/>
+          <p:cNvSpPr/>
+          <p:nvPr/>
+        </p:nvSpPr>
+        <p:spPr>
+          <a:xfrm>
+            <a:off x="658368" y="5230368"/>
+            <a:ext cx="2514600" cy="475488"/>
+          </a:xfrm>
+          <a:prstGeom prst="roundRect">
+            <a:avLst>
+              <a:gd name="adj" fmla="val 12000"/>
+            </a:avLst>
+          </a:prstGeom>
+          <a:solidFill>
+            <a:srgbClr val="1D2B44"/>
+          </a:solidFill>
+          <a:ln>
+            <a:noFill/>
+          </a:ln>
+        </p:spPr>
+        <p:style>
+          <a:lnRef idx="1">
+            <a:schemeClr val="accent1"/>
+          </a:lnRef>
+          <a:fillRef idx="3">
+            <a:schemeClr val="accent1"/>
+          </a:fillRef>
+          <a:effectRef idx="2">
+            <a:schemeClr val="accent1"/>
+          </a:effectRef>
+          <a:fontRef idx="minor">
+            <a:schemeClr val="lt1"/>
+          </a:fontRef>
+        </p:style>
+        <p:txBody>
+          <a:bodyPr rtlCol="0" anchor="ctr"/>
+          <a:lstStyle/>
+          <a:p>
+            <a:pPr algn="ctr"/>
+            <a:endParaRPr/>
+          </a:p>
+        </p:txBody>
+      </p:sp>
+      <p:sp>
+        <p:nvSpPr>
+          <p:cNvPr id="25" name="TextBox 24"/>
+          <p:cNvSpPr txBox="1"/>
+          <p:nvPr/>
+        </p:nvSpPr>
+        <p:spPr>
+          <a:xfrm>
+            <a:off x="804672" y="5312664"/>
+            <a:ext cx="2240280" cy="256032"/>
+          </a:xfrm>
+          <a:prstGeom prst="rect">
+            <a:avLst/>
+          </a:prstGeom>
+          <a:noFill/>
+        </p:spPr>
+        <p:txBody>
+          <a:bodyPr wrap="square" lIns="36576" tIns="36576" rIns="36576" bIns="36576" anchor="t">
+            <a:spAutoFit/>
+          </a:bodyPr>
+          <a:lstStyle/>
+          <a:p>
+            <a:r>
+              <a:rPr sz="1200" b="1">
+                <a:solidFill>
+                  <a:srgbClr val="45D3E6"/>
+                </a:solidFill>
+                <a:latin typeface="Aptos"/>
+              </a:rPr>
+              <a:t>Terraform</a:t>
+            </a:r>
+          </a:p>
+        </p:txBody>
+      </p:sp>
+      <p:sp>
+        <p:nvSpPr>
+          <p:cNvPr id="26" name="TextBox 25"/>
+          <p:cNvSpPr txBox="1"/>
+          <p:nvPr/>
+        </p:nvSpPr>
+        <p:spPr>
+          <a:xfrm>
+            <a:off x="3429000" y="5294376"/>
+            <a:ext cx="7909560" cy="310896"/>
+          </a:xfrm>
+          <a:prstGeom prst="rect">
+            <a:avLst/>
+          </a:prstGeom>
+          <a:noFill/>
+        </p:spPr>
+        <p:txBody>
+          <a:bodyPr wrap="square" lIns="36576" tIns="36576" rIns="36576" bIns="36576" anchor="t">
+            <a:spAutoFit/>
+          </a:bodyPr>
+          <a:lstStyle/>
+          <a:p>
+            <a:r>
+              <a:rPr sz="1300" b="0">
+                <a:solidFill>
+                  <a:srgbClr val="F3F7FC"/>
+                </a:solidFill>
+                <a:latin typeface="Aptos"/>
+              </a:rPr>
+              <a:t>over CloudFormation: cloud-agnostic, reusable VPC/EKS modules</a:t>
+            </a:r>
+          </a:p>
+        </p:txBody>
+      </p:sp>
+    </p:spTree>
+  </p:cSld>
+  <p:clrMapOvr>
+    <a:masterClrMapping/>
+  </p:clrMapOvr>
+</p:sld>
+</file>
+
 <file path=ppt/slides/slide2.xml><?xml version="1.0" encoding="utf-8"?>
 <p:sld xmlns:a="http://schemas.openxmlformats.org/drawingml/2006/main" xmlns:r="http://schemas.openxmlformats.org/officeDocument/2006/relationships" xmlns:p="http://schemas.openxmlformats.org/presentationml/2006/main">
   <p:cSld>
@@ -12354,7 +13326,7 @@
                 </a:solidFill>
                 <a:latin typeface="Aptos"/>
               </a:rPr>
-              <a:t>06</a:t>
+              <a:t>07</a:t>
             </a:r>
           </a:p>
         </p:txBody>
@@ -12784,7 +13756,7 @@
                 </a:solidFill>
                 <a:latin typeface="Aptos"/>
               </a:rPr>
-              <a:t>07</a:t>
+              <a:t>08</a:t>
             </a:r>
           </a:p>
         </p:txBody>
@@ -13286,7 +14258,7 @@
                 </a:solidFill>
                 <a:latin typeface="Aptos"/>
               </a:rPr>
-              <a:t>08</a:t>
+              <a:t>09</a:t>
             </a:r>
           </a:p>
         </p:txBody>

--- a/HostelHub-Presentation.pptx
+++ b/HostelHub-Presentation.pptx
@@ -3545,7 +3545,7 @@
                 </a:solidFill>
                 <a:latin typeface="Aptos"/>
               </a:rPr>
-              <a:t>08 / REPEATABLE DEVELOPMENT</a:t>
+              <a:t>07 / CORRECTNESS</a:t>
             </a:r>
           </a:p>
         </p:txBody>
@@ -3579,7 +3579,7 @@
                 </a:solidFill>
                 <a:latin typeface="Aptos"/>
               </a:rPr>
-              <a:t>Local environment with Docker Compose</a:t>
+              <a:t>Backend API and automated tests</a:t>
             </a:r>
           </a:p>
         </p:txBody>
@@ -3658,7 +3658,7 @@
                 </a:solidFill>
                 <a:latin typeface="Aptos"/>
               </a:rPr>
-              <a:t>10</a:t>
+              <a:t>09</a:t>
             </a:r>
           </a:p>
         </p:txBody>
@@ -3671,8 +3671,8 @@
         </p:nvSpPr>
         <p:spPr>
           <a:xfrm>
-            <a:off x="996986" y="1412748"/>
-            <a:ext cx="4900603" cy="4178808"/>
+            <a:off x="1484237" y="1449324"/>
+            <a:ext cx="3834661" cy="2944368"/>
           </a:xfrm>
           <a:prstGeom prst="roundRect">
             <a:avLst>
@@ -3713,7 +3713,7 @@
       </p:sp>
       <p:pic>
         <p:nvPicPr>
-          <p:cNvPr id="7" name="Picture 6" descr="02-compose-up.png"/>
+          <p:cNvPr id="7" name="Picture 6" descr="08-swagger-docs.png"/>
           <p:cNvPicPr>
             <a:picLocks noChangeAspect="1"/>
           </p:cNvPicPr>
@@ -3727,8 +3727,8 @@
         </p:blipFill>
         <p:spPr>
           <a:xfrm>
-            <a:off x="1028990" y="1444752"/>
-            <a:ext cx="4836595" cy="4114800"/>
+            <a:off x="1516241" y="1481328"/>
+            <a:ext cx="3770653" cy="2880360"/>
           </a:xfrm>
           <a:prstGeom prst="rect">
             <a:avLst/>
@@ -3743,8 +3743,8 @@
         </p:nvSpPr>
         <p:spPr>
           <a:xfrm>
-            <a:off x="6414516" y="3179715"/>
-            <a:ext cx="5138928" cy="644872"/>
+            <a:off x="6875639" y="1449324"/>
+            <a:ext cx="4170961" cy="2944368"/>
           </a:xfrm>
           <a:prstGeom prst="roundRect">
             <a:avLst>
@@ -3785,7 +3785,7 @@
       </p:sp>
       <p:pic>
         <p:nvPicPr>
-          <p:cNvPr id="9" name="Picture 8" descr="03-compose-ps.png"/>
+          <p:cNvPr id="9" name="Picture 8" descr="01-pytest.png"/>
           <p:cNvPicPr>
             <a:picLocks noChangeAspect="1"/>
           </p:cNvPicPr>
@@ -3799,8 +3799,8 @@
         </p:blipFill>
         <p:spPr>
           <a:xfrm>
-            <a:off x="6446520" y="3211719"/>
-            <a:ext cx="5074920" cy="580864"/>
+            <a:off x="6907643" y="1481328"/>
+            <a:ext cx="4106953" cy="2880360"/>
           </a:xfrm>
           <a:prstGeom prst="rect">
             <a:avLst/>
@@ -3809,34 +3809,182 @@
       </p:pic>
       <p:sp>
         <p:nvSpPr>
-          <p:cNvPr id="10" name="TextBox 9"/>
-          <p:cNvSpPr txBox="1"/>
-          <p:nvPr/>
-        </p:nvSpPr>
-        <p:spPr>
-          <a:xfrm>
-            <a:off x="749808" y="5760720"/>
-            <a:ext cx="10789920" cy="365760"/>
-          </a:xfrm>
-          <a:prstGeom prst="rect">
-            <a:avLst/>
-          </a:prstGeom>
-          <a:noFill/>
-        </p:spPr>
-        <p:txBody>
-          <a:bodyPr wrap="square" lIns="36576" tIns="36576" rIns="36576" bIns="36576" anchor="t">
-            <a:spAutoFit/>
-          </a:bodyPr>
-          <a:lstStyle/>
-          <a:p>
-            <a:r>
-              <a:rPr sz="1300" b="0">
-                <a:solidFill>
-                  <a:srgbClr val="ADBBCF"/>
-                </a:solidFill>
-                <a:latin typeface="Aptos"/>
-              </a:rPr>
-              <a:t>One command builds and starts the frontend, API and PostgreSQL; compose ps confirms container status.</a:t>
+          <p:cNvPr id="10" name="Rounded Rectangle 9"/>
+          <p:cNvSpPr/>
+          <p:nvPr/>
+        </p:nvSpPr>
+        <p:spPr>
+          <a:xfrm>
+            <a:off x="685800" y="4617720"/>
+            <a:ext cx="10789920" cy="1051560"/>
+          </a:xfrm>
+          <a:prstGeom prst="roundRect">
+            <a:avLst>
+              <a:gd name="adj" fmla="val 12000"/>
+            </a:avLst>
+          </a:prstGeom>
+          <a:solidFill>
+            <a:srgbClr val="172237"/>
+          </a:solidFill>
+          <a:ln>
+            <a:noFill/>
+          </a:ln>
+        </p:spPr>
+        <p:style>
+          <a:lnRef idx="1">
+            <a:schemeClr val="accent1"/>
+          </a:lnRef>
+          <a:fillRef idx="3">
+            <a:schemeClr val="accent1"/>
+          </a:fillRef>
+          <a:effectRef idx="2">
+            <a:schemeClr val="accent1"/>
+          </a:effectRef>
+          <a:fontRef idx="minor">
+            <a:schemeClr val="lt1"/>
+          </a:fontRef>
+        </p:style>
+        <p:txBody>
+          <a:bodyPr rtlCol="0" anchor="ctr"/>
+          <a:lstStyle/>
+          <a:p>
+            <a:pPr algn="ctr"/>
+            <a:endParaRPr/>
+          </a:p>
+        </p:txBody>
+      </p:sp>
+      <p:sp>
+        <p:nvSpPr>
+          <p:cNvPr id="11" name="TextBox 10"/>
+          <p:cNvSpPr txBox="1"/>
+          <p:nvPr/>
+        </p:nvSpPr>
+        <p:spPr>
+          <a:xfrm>
+            <a:off x="914400" y="4828032"/>
+            <a:ext cx="1828800" cy="274320"/>
+          </a:xfrm>
+          <a:prstGeom prst="rect">
+            <a:avLst/>
+          </a:prstGeom>
+          <a:noFill/>
+        </p:spPr>
+        <p:txBody>
+          <a:bodyPr wrap="square" lIns="36576" tIns="36576" rIns="36576" bIns="36576" anchor="t">
+            <a:spAutoFit/>
+          </a:bodyPr>
+          <a:lstStyle/>
+          <a:p>
+            <a:r>
+              <a:rPr sz="1400" b="1">
+                <a:solidFill>
+                  <a:srgbClr val="45D3E6"/>
+                </a:solidFill>
+                <a:latin typeface="Aptos"/>
+              </a:rPr>
+              <a:t>API checks</a:t>
+            </a:r>
+          </a:p>
+        </p:txBody>
+      </p:sp>
+      <p:sp>
+        <p:nvSpPr>
+          <p:cNvPr id="12" name="TextBox 11"/>
+          <p:cNvSpPr txBox="1"/>
+          <p:nvPr/>
+        </p:nvSpPr>
+        <p:spPr>
+          <a:xfrm>
+            <a:off x="2743200" y="4773168"/>
+            <a:ext cx="2834640" cy="594360"/>
+          </a:xfrm>
+          <a:prstGeom prst="rect">
+            <a:avLst/>
+          </a:prstGeom>
+          <a:noFill/>
+        </p:spPr>
+        <p:txBody>
+          <a:bodyPr wrap="square" lIns="36576" tIns="36576" rIns="36576" bIns="36576" anchor="t">
+            <a:spAutoFit/>
+          </a:bodyPr>
+          <a:lstStyle/>
+          <a:p>
+            <a:r>
+              <a:rPr sz="1200" b="0">
+                <a:solidFill>
+                  <a:srgbClr val="F3F7FC"/>
+                </a:solidFill>
+                <a:latin typeface="Aptos"/>
+              </a:rPr>
+              <a:t>Health and readiness endpoints; interactive Swagger documentation.</a:t>
+            </a:r>
+          </a:p>
+        </p:txBody>
+      </p:sp>
+      <p:sp>
+        <p:nvSpPr>
+          <p:cNvPr id="13" name="TextBox 12"/>
+          <p:cNvSpPr txBox="1"/>
+          <p:nvPr/>
+        </p:nvSpPr>
+        <p:spPr>
+          <a:xfrm>
+            <a:off x="5989320" y="4828032"/>
+            <a:ext cx="1645920" cy="274320"/>
+          </a:xfrm>
+          <a:prstGeom prst="rect">
+            <a:avLst/>
+          </a:prstGeom>
+          <a:noFill/>
+        </p:spPr>
+        <p:txBody>
+          <a:bodyPr wrap="square" lIns="36576" tIns="36576" rIns="36576" bIns="36576" anchor="t">
+            <a:spAutoFit/>
+          </a:bodyPr>
+          <a:lstStyle/>
+          <a:p>
+            <a:r>
+              <a:rPr sz="1400" b="1">
+                <a:solidFill>
+                  <a:srgbClr val="70E0AA"/>
+                </a:solidFill>
+                <a:latin typeface="Aptos"/>
+              </a:rPr>
+              <a:t>Test suite</a:t>
+            </a:r>
+          </a:p>
+        </p:txBody>
+      </p:sp>
+      <p:sp>
+        <p:nvSpPr>
+          <p:cNvPr id="14" name="TextBox 13"/>
+          <p:cNvSpPr txBox="1"/>
+          <p:nvPr/>
+        </p:nvSpPr>
+        <p:spPr>
+          <a:xfrm>
+            <a:off x="7498079" y="4773168"/>
+            <a:ext cx="3657600" cy="594360"/>
+          </a:xfrm>
+          <a:prstGeom prst="rect">
+            <a:avLst/>
+          </a:prstGeom>
+          <a:noFill/>
+        </p:spPr>
+        <p:txBody>
+          <a:bodyPr wrap="square" lIns="36576" tIns="36576" rIns="36576" bIns="36576" anchor="t">
+            <a:spAutoFit/>
+          </a:bodyPr>
+          <a:lstStyle/>
+          <a:p>
+            <a:r>
+              <a:rPr sz="1200" b="0">
+                <a:solidFill>
+                  <a:srgbClr val="F3F7FC"/>
+                </a:solidFill>
+                <a:latin typeface="Aptos"/>
+              </a:rPr>
+              <a:t>README reports 22 pytest tests using in-memory SQLite, not the real database.</a:t>
             </a:r>
           </a:p>
         </p:txBody>
@@ -3903,7 +4051,7 @@
                 </a:solidFill>
                 <a:latin typeface="Aptos"/>
               </a:rPr>
-              <a:t>09 / FROM COMMIT TO DEPLOYMENT</a:t>
+              <a:t>08 / REPEATABLE DEVELOPMENT</a:t>
             </a:r>
           </a:p>
         </p:txBody>
@@ -3937,7 +4085,7 @@
                 </a:solidFill>
                 <a:latin typeface="Aptos"/>
               </a:rPr>
-              <a:t>CI/CD pipeline</a:t>
+              <a:t>Local environment with Docker Compose</a:t>
             </a:r>
           </a:p>
         </p:txBody>
@@ -4016,7 +4164,7 @@
                 </a:solidFill>
                 <a:latin typeface="Aptos"/>
               </a:rPr>
-              <a:t>11</a:t>
+              <a:t>10</a:t>
             </a:r>
           </a:p>
         </p:txBody>
@@ -4029,888 +4177,8 @@
         </p:nvSpPr>
         <p:spPr>
           <a:xfrm>
-            <a:off x="621792" y="1691640"/>
-            <a:ext cx="2011680" cy="1371600"/>
-          </a:xfrm>
-          <a:prstGeom prst="roundRect">
-            <a:avLst>
-              <a:gd name="adj" fmla="val 12000"/>
-            </a:avLst>
-          </a:prstGeom>
-          <a:solidFill>
-            <a:srgbClr val="172237"/>
-          </a:solidFill>
-          <a:ln>
-            <a:noFill/>
-          </a:ln>
-        </p:spPr>
-        <p:style>
-          <a:lnRef idx="1">
-            <a:schemeClr val="accent1"/>
-          </a:lnRef>
-          <a:fillRef idx="3">
-            <a:schemeClr val="accent1"/>
-          </a:fillRef>
-          <a:effectRef idx="2">
-            <a:schemeClr val="accent1"/>
-          </a:effectRef>
-          <a:fontRef idx="minor">
-            <a:schemeClr val="lt1"/>
-          </a:fontRef>
-        </p:style>
-        <p:txBody>
-          <a:bodyPr rtlCol="0" anchor="ctr"/>
-          <a:lstStyle/>
-          <a:p>
-            <a:pPr algn="ctr"/>
-            <a:endParaRPr/>
-          </a:p>
-        </p:txBody>
-      </p:sp>
-      <p:sp>
-        <p:nvSpPr>
-          <p:cNvPr id="7" name="TextBox 6"/>
-          <p:cNvSpPr txBox="1"/>
-          <p:nvPr/>
-        </p:nvSpPr>
-        <p:spPr>
-          <a:xfrm>
-            <a:off x="786384" y="1856231"/>
-            <a:ext cx="384048" cy="274320"/>
-          </a:xfrm>
-          <a:prstGeom prst="rect">
-            <a:avLst/>
-          </a:prstGeom>
-          <a:noFill/>
-        </p:spPr>
-        <p:txBody>
-          <a:bodyPr wrap="square" lIns="36576" tIns="36576" rIns="36576" bIns="36576" anchor="t">
-            <a:spAutoFit/>
-          </a:bodyPr>
-          <a:lstStyle/>
-          <a:p>
-            <a:r>
-              <a:rPr sz="1200" b="1">
-                <a:solidFill>
-                  <a:srgbClr val="45D3E6"/>
-                </a:solidFill>
-                <a:latin typeface="Aptos"/>
-              </a:rPr>
-              <a:t>1</a:t>
-            </a:r>
-          </a:p>
-        </p:txBody>
-      </p:sp>
-      <p:sp>
-        <p:nvSpPr>
-          <p:cNvPr id="8" name="TextBox 7"/>
-          <p:cNvSpPr txBox="1"/>
-          <p:nvPr/>
-        </p:nvSpPr>
-        <p:spPr>
-          <a:xfrm>
-            <a:off x="786384" y="2176272"/>
-            <a:ext cx="1691640" cy="320040"/>
-          </a:xfrm>
-          <a:prstGeom prst="rect">
-            <a:avLst/>
-          </a:prstGeom>
-          <a:noFill/>
-        </p:spPr>
-        <p:txBody>
-          <a:bodyPr wrap="square" lIns="36576" tIns="36576" rIns="36576" bIns="36576" anchor="t">
-            <a:spAutoFit/>
-          </a:bodyPr>
-          <a:lstStyle/>
-          <a:p>
-            <a:r>
-              <a:rPr sz="1700" b="1">
-                <a:solidFill>
-                  <a:srgbClr val="F3F7FC"/>
-                </a:solidFill>
-                <a:latin typeface="Aptos"/>
-              </a:rPr>
-              <a:t>Test</a:t>
-            </a:r>
-          </a:p>
-        </p:txBody>
-      </p:sp>
-      <p:sp>
-        <p:nvSpPr>
-          <p:cNvPr id="9" name="TextBox 8"/>
-          <p:cNvSpPr txBox="1"/>
-          <p:nvPr/>
-        </p:nvSpPr>
-        <p:spPr>
-          <a:xfrm>
-            <a:off x="786384" y="2578608"/>
-            <a:ext cx="1691640" cy="365760"/>
-          </a:xfrm>
-          <a:prstGeom prst="rect">
-            <a:avLst/>
-          </a:prstGeom>
-          <a:noFill/>
-        </p:spPr>
-        <p:txBody>
-          <a:bodyPr wrap="square" lIns="36576" tIns="36576" rIns="36576" bIns="36576" anchor="t">
-            <a:spAutoFit/>
-          </a:bodyPr>
-          <a:lstStyle/>
-          <a:p>
-            <a:r>
-              <a:rPr sz="1100" b="0">
-                <a:solidFill>
-                  <a:srgbClr val="ADBBCF"/>
-                </a:solidFill>
-                <a:latin typeface="Aptos"/>
-              </a:rPr>
-              <a:t>ruff + pytest</a:t>
-            </a:r>
-          </a:p>
-        </p:txBody>
-      </p:sp>
-      <p:cxnSp>
-        <p:nvCxnSpPr>
-          <p:cNvPr id="10" name="Connector 9"/>
-          <p:cNvCxnSpPr/>
-          <p:nvPr/>
-        </p:nvCxnSpPr>
-        <p:spPr>
-          <a:xfrm>
-            <a:off x="2633472" y="2377440"/>
-            <a:ext cx="292608" cy="0"/>
-          </a:xfrm>
-          <a:prstGeom prst="line">
-            <a:avLst/>
-          </a:prstGeom>
-          <a:ln w="25400">
-            <a:solidFill>
-              <a:srgbClr val="45D3E6"/>
-            </a:solidFill>
-          </a:ln>
-        </p:spPr>
-        <p:style>
-          <a:lnRef idx="2">
-            <a:schemeClr val="accent1"/>
-          </a:lnRef>
-          <a:fillRef idx="0">
-            <a:schemeClr val="accent1"/>
-          </a:fillRef>
-          <a:effectRef idx="1">
-            <a:schemeClr val="accent1"/>
-          </a:effectRef>
-          <a:fontRef idx="minor">
-            <a:schemeClr val="tx1"/>
-          </a:fontRef>
-        </p:style>
-      </p:cxnSp>
-      <p:sp>
-        <p:nvSpPr>
-          <p:cNvPr id="11" name="Rounded Rectangle 10"/>
-          <p:cNvSpPr/>
-          <p:nvPr/>
-        </p:nvSpPr>
-        <p:spPr>
-          <a:xfrm>
-            <a:off x="2926080" y="1691640"/>
-            <a:ext cx="2011680" cy="1371600"/>
-          </a:xfrm>
-          <a:prstGeom prst="roundRect">
-            <a:avLst>
-              <a:gd name="adj" fmla="val 12000"/>
-            </a:avLst>
-          </a:prstGeom>
-          <a:solidFill>
-            <a:srgbClr val="172237"/>
-          </a:solidFill>
-          <a:ln>
-            <a:noFill/>
-          </a:ln>
-        </p:spPr>
-        <p:style>
-          <a:lnRef idx="1">
-            <a:schemeClr val="accent1"/>
-          </a:lnRef>
-          <a:fillRef idx="3">
-            <a:schemeClr val="accent1"/>
-          </a:fillRef>
-          <a:effectRef idx="2">
-            <a:schemeClr val="accent1"/>
-          </a:effectRef>
-          <a:fontRef idx="minor">
-            <a:schemeClr val="lt1"/>
-          </a:fontRef>
-        </p:style>
-        <p:txBody>
-          <a:bodyPr rtlCol="0" anchor="ctr"/>
-          <a:lstStyle/>
-          <a:p>
-            <a:pPr algn="ctr"/>
-            <a:endParaRPr/>
-          </a:p>
-        </p:txBody>
-      </p:sp>
-      <p:sp>
-        <p:nvSpPr>
-          <p:cNvPr id="12" name="TextBox 11"/>
-          <p:cNvSpPr txBox="1"/>
-          <p:nvPr/>
-        </p:nvSpPr>
-        <p:spPr>
-          <a:xfrm>
-            <a:off x="3090672" y="1856231"/>
-            <a:ext cx="384048" cy="274320"/>
-          </a:xfrm>
-          <a:prstGeom prst="rect">
-            <a:avLst/>
-          </a:prstGeom>
-          <a:noFill/>
-        </p:spPr>
-        <p:txBody>
-          <a:bodyPr wrap="square" lIns="36576" tIns="36576" rIns="36576" bIns="36576" anchor="t">
-            <a:spAutoFit/>
-          </a:bodyPr>
-          <a:lstStyle/>
-          <a:p>
-            <a:r>
-              <a:rPr sz="1200" b="1">
-                <a:solidFill>
-                  <a:srgbClr val="45D3E6"/>
-                </a:solidFill>
-                <a:latin typeface="Aptos"/>
-              </a:rPr>
-              <a:t>2</a:t>
-            </a:r>
-          </a:p>
-        </p:txBody>
-      </p:sp>
-      <p:sp>
-        <p:nvSpPr>
-          <p:cNvPr id="13" name="TextBox 12"/>
-          <p:cNvSpPr txBox="1"/>
-          <p:nvPr/>
-        </p:nvSpPr>
-        <p:spPr>
-          <a:xfrm>
-            <a:off x="3090672" y="2176272"/>
-            <a:ext cx="1691640" cy="320040"/>
-          </a:xfrm>
-          <a:prstGeom prst="rect">
-            <a:avLst/>
-          </a:prstGeom>
-          <a:noFill/>
-        </p:spPr>
-        <p:txBody>
-          <a:bodyPr wrap="square" lIns="36576" tIns="36576" rIns="36576" bIns="36576" anchor="t">
-            <a:spAutoFit/>
-          </a:bodyPr>
-          <a:lstStyle/>
-          <a:p>
-            <a:r>
-              <a:rPr sz="1700" b="1">
-                <a:solidFill>
-                  <a:srgbClr val="F3F7FC"/>
-                </a:solidFill>
-                <a:latin typeface="Aptos"/>
-              </a:rPr>
-              <a:t>Build</a:t>
-            </a:r>
-          </a:p>
-        </p:txBody>
-      </p:sp>
-      <p:sp>
-        <p:nvSpPr>
-          <p:cNvPr id="14" name="TextBox 13"/>
-          <p:cNvSpPr txBox="1"/>
-          <p:nvPr/>
-        </p:nvSpPr>
-        <p:spPr>
-          <a:xfrm>
-            <a:off x="3090672" y="2578608"/>
-            <a:ext cx="1691640" cy="365760"/>
-          </a:xfrm>
-          <a:prstGeom prst="rect">
-            <a:avLst/>
-          </a:prstGeom>
-          <a:noFill/>
-        </p:spPr>
-        <p:txBody>
-          <a:bodyPr wrap="square" lIns="36576" tIns="36576" rIns="36576" bIns="36576" anchor="t">
-            <a:spAutoFit/>
-          </a:bodyPr>
-          <a:lstStyle/>
-          <a:p>
-            <a:r>
-              <a:rPr sz="1100" b="0">
-                <a:solidFill>
-                  <a:srgbClr val="ADBBCF"/>
-                </a:solidFill>
-                <a:latin typeface="Aptos"/>
-              </a:rPr>
-              <a:t>Frontend + images</a:t>
-            </a:r>
-          </a:p>
-        </p:txBody>
-      </p:sp>
-      <p:cxnSp>
-        <p:nvCxnSpPr>
-          <p:cNvPr id="15" name="Connector 14"/>
-          <p:cNvCxnSpPr/>
-          <p:nvPr/>
-        </p:nvCxnSpPr>
-        <p:spPr>
-          <a:xfrm>
-            <a:off x="4937760" y="2377440"/>
-            <a:ext cx="292608" cy="0"/>
-          </a:xfrm>
-          <a:prstGeom prst="line">
-            <a:avLst/>
-          </a:prstGeom>
-          <a:ln w="25400">
-            <a:solidFill>
-              <a:srgbClr val="45D3E6"/>
-            </a:solidFill>
-          </a:ln>
-        </p:spPr>
-        <p:style>
-          <a:lnRef idx="2">
-            <a:schemeClr val="accent1"/>
-          </a:lnRef>
-          <a:fillRef idx="0">
-            <a:schemeClr val="accent1"/>
-          </a:fillRef>
-          <a:effectRef idx="1">
-            <a:schemeClr val="accent1"/>
-          </a:effectRef>
-          <a:fontRef idx="minor">
-            <a:schemeClr val="tx1"/>
-          </a:fontRef>
-        </p:style>
-      </p:cxnSp>
-      <p:sp>
-        <p:nvSpPr>
-          <p:cNvPr id="16" name="Rounded Rectangle 15"/>
-          <p:cNvSpPr/>
-          <p:nvPr/>
-        </p:nvSpPr>
-        <p:spPr>
-          <a:xfrm>
-            <a:off x="5230368" y="1691640"/>
-            <a:ext cx="2011680" cy="1371600"/>
-          </a:xfrm>
-          <a:prstGeom prst="roundRect">
-            <a:avLst>
-              <a:gd name="adj" fmla="val 12000"/>
-            </a:avLst>
-          </a:prstGeom>
-          <a:solidFill>
-            <a:srgbClr val="172237"/>
-          </a:solidFill>
-          <a:ln>
-            <a:noFill/>
-          </a:ln>
-        </p:spPr>
-        <p:style>
-          <a:lnRef idx="1">
-            <a:schemeClr val="accent1"/>
-          </a:lnRef>
-          <a:fillRef idx="3">
-            <a:schemeClr val="accent1"/>
-          </a:fillRef>
-          <a:effectRef idx="2">
-            <a:schemeClr val="accent1"/>
-          </a:effectRef>
-          <a:fontRef idx="minor">
-            <a:schemeClr val="lt1"/>
-          </a:fontRef>
-        </p:style>
-        <p:txBody>
-          <a:bodyPr rtlCol="0" anchor="ctr"/>
-          <a:lstStyle/>
-          <a:p>
-            <a:pPr algn="ctr"/>
-            <a:endParaRPr/>
-          </a:p>
-        </p:txBody>
-      </p:sp>
-      <p:sp>
-        <p:nvSpPr>
-          <p:cNvPr id="17" name="TextBox 16"/>
-          <p:cNvSpPr txBox="1"/>
-          <p:nvPr/>
-        </p:nvSpPr>
-        <p:spPr>
-          <a:xfrm>
-            <a:off x="5394959" y="1856231"/>
-            <a:ext cx="384048" cy="274320"/>
-          </a:xfrm>
-          <a:prstGeom prst="rect">
-            <a:avLst/>
-          </a:prstGeom>
-          <a:noFill/>
-        </p:spPr>
-        <p:txBody>
-          <a:bodyPr wrap="square" lIns="36576" tIns="36576" rIns="36576" bIns="36576" anchor="t">
-            <a:spAutoFit/>
-          </a:bodyPr>
-          <a:lstStyle/>
-          <a:p>
-            <a:r>
-              <a:rPr sz="1200" b="1">
-                <a:solidFill>
-                  <a:srgbClr val="45D3E6"/>
-                </a:solidFill>
-                <a:latin typeface="Aptos"/>
-              </a:rPr>
-              <a:t>3</a:t>
-            </a:r>
-          </a:p>
-        </p:txBody>
-      </p:sp>
-      <p:sp>
-        <p:nvSpPr>
-          <p:cNvPr id="18" name="TextBox 17"/>
-          <p:cNvSpPr txBox="1"/>
-          <p:nvPr/>
-        </p:nvSpPr>
-        <p:spPr>
-          <a:xfrm>
-            <a:off x="5394959" y="2176272"/>
-            <a:ext cx="1691640" cy="320040"/>
-          </a:xfrm>
-          <a:prstGeom prst="rect">
-            <a:avLst/>
-          </a:prstGeom>
-          <a:noFill/>
-        </p:spPr>
-        <p:txBody>
-          <a:bodyPr wrap="square" lIns="36576" tIns="36576" rIns="36576" bIns="36576" anchor="t">
-            <a:spAutoFit/>
-          </a:bodyPr>
-          <a:lstStyle/>
-          <a:p>
-            <a:r>
-              <a:rPr sz="1700" b="1">
-                <a:solidFill>
-                  <a:srgbClr val="F3F7FC"/>
-                </a:solidFill>
-                <a:latin typeface="Aptos"/>
-              </a:rPr>
-              <a:t>Scan</a:t>
-            </a:r>
-          </a:p>
-        </p:txBody>
-      </p:sp>
-      <p:sp>
-        <p:nvSpPr>
-          <p:cNvPr id="19" name="TextBox 18"/>
-          <p:cNvSpPr txBox="1"/>
-          <p:nvPr/>
-        </p:nvSpPr>
-        <p:spPr>
-          <a:xfrm>
-            <a:off x="5394959" y="2578608"/>
-            <a:ext cx="1691640" cy="365760"/>
-          </a:xfrm>
-          <a:prstGeom prst="rect">
-            <a:avLst/>
-          </a:prstGeom>
-          <a:noFill/>
-        </p:spPr>
-        <p:txBody>
-          <a:bodyPr wrap="square" lIns="36576" tIns="36576" rIns="36576" bIns="36576" anchor="t">
-            <a:spAutoFit/>
-          </a:bodyPr>
-          <a:lstStyle/>
-          <a:p>
-            <a:r>
-              <a:rPr sz="1100" b="0">
-                <a:solidFill>
-                  <a:srgbClr val="ADBBCF"/>
-                </a:solidFill>
-                <a:latin typeface="Aptos"/>
-              </a:rPr>
-              <a:t>Trivy security gate</a:t>
-            </a:r>
-          </a:p>
-        </p:txBody>
-      </p:sp>
-      <p:cxnSp>
-        <p:nvCxnSpPr>
-          <p:cNvPr id="20" name="Connector 19"/>
-          <p:cNvCxnSpPr/>
-          <p:nvPr/>
-        </p:nvCxnSpPr>
-        <p:spPr>
-          <a:xfrm>
-            <a:off x="7242048" y="2377440"/>
-            <a:ext cx="292608" cy="0"/>
-          </a:xfrm>
-          <a:prstGeom prst="line">
-            <a:avLst/>
-          </a:prstGeom>
-          <a:ln w="25400">
-            <a:solidFill>
-              <a:srgbClr val="45D3E6"/>
-            </a:solidFill>
-          </a:ln>
-        </p:spPr>
-        <p:style>
-          <a:lnRef idx="2">
-            <a:schemeClr val="accent1"/>
-          </a:lnRef>
-          <a:fillRef idx="0">
-            <a:schemeClr val="accent1"/>
-          </a:fillRef>
-          <a:effectRef idx="1">
-            <a:schemeClr val="accent1"/>
-          </a:effectRef>
-          <a:fontRef idx="minor">
-            <a:schemeClr val="tx1"/>
-          </a:fontRef>
-        </p:style>
-      </p:cxnSp>
-      <p:sp>
-        <p:nvSpPr>
-          <p:cNvPr id="21" name="Rounded Rectangle 20"/>
-          <p:cNvSpPr/>
-          <p:nvPr/>
-        </p:nvSpPr>
-        <p:spPr>
-          <a:xfrm>
-            <a:off x="7534656" y="1691640"/>
-            <a:ext cx="2011680" cy="1371600"/>
-          </a:xfrm>
-          <a:prstGeom prst="roundRect">
-            <a:avLst>
-              <a:gd name="adj" fmla="val 12000"/>
-            </a:avLst>
-          </a:prstGeom>
-          <a:solidFill>
-            <a:srgbClr val="172237"/>
-          </a:solidFill>
-          <a:ln>
-            <a:noFill/>
-          </a:ln>
-        </p:spPr>
-        <p:style>
-          <a:lnRef idx="1">
-            <a:schemeClr val="accent1"/>
-          </a:lnRef>
-          <a:fillRef idx="3">
-            <a:schemeClr val="accent1"/>
-          </a:fillRef>
-          <a:effectRef idx="2">
-            <a:schemeClr val="accent1"/>
-          </a:effectRef>
-          <a:fontRef idx="minor">
-            <a:schemeClr val="lt1"/>
-          </a:fontRef>
-        </p:style>
-        <p:txBody>
-          <a:bodyPr rtlCol="0" anchor="ctr"/>
-          <a:lstStyle/>
-          <a:p>
-            <a:pPr algn="ctr"/>
-            <a:endParaRPr/>
-          </a:p>
-        </p:txBody>
-      </p:sp>
-      <p:sp>
-        <p:nvSpPr>
-          <p:cNvPr id="22" name="TextBox 21"/>
-          <p:cNvSpPr txBox="1"/>
-          <p:nvPr/>
-        </p:nvSpPr>
-        <p:spPr>
-          <a:xfrm>
-            <a:off x="7699248" y="1856231"/>
-            <a:ext cx="384048" cy="274320"/>
-          </a:xfrm>
-          <a:prstGeom prst="rect">
-            <a:avLst/>
-          </a:prstGeom>
-          <a:noFill/>
-        </p:spPr>
-        <p:txBody>
-          <a:bodyPr wrap="square" lIns="36576" tIns="36576" rIns="36576" bIns="36576" anchor="t">
-            <a:spAutoFit/>
-          </a:bodyPr>
-          <a:lstStyle/>
-          <a:p>
-            <a:r>
-              <a:rPr sz="1200" b="1">
-                <a:solidFill>
-                  <a:srgbClr val="45D3E6"/>
-                </a:solidFill>
-                <a:latin typeface="Aptos"/>
-              </a:rPr>
-              <a:t>4</a:t>
-            </a:r>
-          </a:p>
-        </p:txBody>
-      </p:sp>
-      <p:sp>
-        <p:nvSpPr>
-          <p:cNvPr id="23" name="TextBox 22"/>
-          <p:cNvSpPr txBox="1"/>
-          <p:nvPr/>
-        </p:nvSpPr>
-        <p:spPr>
-          <a:xfrm>
-            <a:off x="7699248" y="2176272"/>
-            <a:ext cx="1691640" cy="320040"/>
-          </a:xfrm>
-          <a:prstGeom prst="rect">
-            <a:avLst/>
-          </a:prstGeom>
-          <a:noFill/>
-        </p:spPr>
-        <p:txBody>
-          <a:bodyPr wrap="square" lIns="36576" tIns="36576" rIns="36576" bIns="36576" anchor="t">
-            <a:spAutoFit/>
-          </a:bodyPr>
-          <a:lstStyle/>
-          <a:p>
-            <a:r>
-              <a:rPr sz="1700" b="1">
-                <a:solidFill>
-                  <a:srgbClr val="F3F7FC"/>
-                </a:solidFill>
-                <a:latin typeface="Aptos"/>
-              </a:rPr>
-              <a:t>Publish</a:t>
-            </a:r>
-          </a:p>
-        </p:txBody>
-      </p:sp>
-      <p:sp>
-        <p:nvSpPr>
-          <p:cNvPr id="24" name="TextBox 23"/>
-          <p:cNvSpPr txBox="1"/>
-          <p:nvPr/>
-        </p:nvSpPr>
-        <p:spPr>
-          <a:xfrm>
-            <a:off x="7699248" y="2578608"/>
-            <a:ext cx="1691640" cy="365760"/>
-          </a:xfrm>
-          <a:prstGeom prst="rect">
-            <a:avLst/>
-          </a:prstGeom>
-          <a:noFill/>
-        </p:spPr>
-        <p:txBody>
-          <a:bodyPr wrap="square" lIns="36576" tIns="36576" rIns="36576" bIns="36576" anchor="t">
-            <a:spAutoFit/>
-          </a:bodyPr>
-          <a:lstStyle/>
-          <a:p>
-            <a:r>
-              <a:rPr sz="1100" b="0">
-                <a:solidFill>
-                  <a:srgbClr val="ADBBCF"/>
-                </a:solidFill>
-                <a:latin typeface="Aptos"/>
-              </a:rPr>
-              <a:t>GHCR on main</a:t>
-            </a:r>
-          </a:p>
-        </p:txBody>
-      </p:sp>
-      <p:cxnSp>
-        <p:nvCxnSpPr>
-          <p:cNvPr id="25" name="Connector 24"/>
-          <p:cNvCxnSpPr/>
-          <p:nvPr/>
-        </p:nvCxnSpPr>
-        <p:spPr>
-          <a:xfrm>
-            <a:off x="9546336" y="2377440"/>
-            <a:ext cx="292608" cy="0"/>
-          </a:xfrm>
-          <a:prstGeom prst="line">
-            <a:avLst/>
-          </a:prstGeom>
-          <a:ln w="25400">
-            <a:solidFill>
-              <a:srgbClr val="45D3E6"/>
-            </a:solidFill>
-          </a:ln>
-        </p:spPr>
-        <p:style>
-          <a:lnRef idx="2">
-            <a:schemeClr val="accent1"/>
-          </a:lnRef>
-          <a:fillRef idx="0">
-            <a:schemeClr val="accent1"/>
-          </a:fillRef>
-          <a:effectRef idx="1">
-            <a:schemeClr val="accent1"/>
-          </a:effectRef>
-          <a:fontRef idx="minor">
-            <a:schemeClr val="tx1"/>
-          </a:fontRef>
-        </p:style>
-      </p:cxnSp>
-      <p:sp>
-        <p:nvSpPr>
-          <p:cNvPr id="26" name="Rounded Rectangle 25"/>
-          <p:cNvSpPr/>
-          <p:nvPr/>
-        </p:nvSpPr>
-        <p:spPr>
-          <a:xfrm>
-            <a:off x="9838944" y="1691640"/>
-            <a:ext cx="2011680" cy="1371600"/>
-          </a:xfrm>
-          <a:prstGeom prst="roundRect">
-            <a:avLst>
-              <a:gd name="adj" fmla="val 12000"/>
-            </a:avLst>
-          </a:prstGeom>
-          <a:solidFill>
-            <a:srgbClr val="172237"/>
-          </a:solidFill>
-          <a:ln>
-            <a:noFill/>
-          </a:ln>
-        </p:spPr>
-        <p:style>
-          <a:lnRef idx="1">
-            <a:schemeClr val="accent1"/>
-          </a:lnRef>
-          <a:fillRef idx="3">
-            <a:schemeClr val="accent1"/>
-          </a:fillRef>
-          <a:effectRef idx="2">
-            <a:schemeClr val="accent1"/>
-          </a:effectRef>
-          <a:fontRef idx="minor">
-            <a:schemeClr val="lt1"/>
-          </a:fontRef>
-        </p:style>
-        <p:txBody>
-          <a:bodyPr rtlCol="0" anchor="ctr"/>
-          <a:lstStyle/>
-          <a:p>
-            <a:pPr algn="ctr"/>
-            <a:endParaRPr/>
-          </a:p>
-        </p:txBody>
-      </p:sp>
-      <p:sp>
-        <p:nvSpPr>
-          <p:cNvPr id="27" name="TextBox 26"/>
-          <p:cNvSpPr txBox="1"/>
-          <p:nvPr/>
-        </p:nvSpPr>
-        <p:spPr>
-          <a:xfrm>
-            <a:off x="10003536" y="1856231"/>
-            <a:ext cx="384048" cy="274320"/>
-          </a:xfrm>
-          <a:prstGeom prst="rect">
-            <a:avLst/>
-          </a:prstGeom>
-          <a:noFill/>
-        </p:spPr>
-        <p:txBody>
-          <a:bodyPr wrap="square" lIns="36576" tIns="36576" rIns="36576" bIns="36576" anchor="t">
-            <a:spAutoFit/>
-          </a:bodyPr>
-          <a:lstStyle/>
-          <a:p>
-            <a:r>
-              <a:rPr sz="1200" b="1">
-                <a:solidFill>
-                  <a:srgbClr val="45D3E6"/>
-                </a:solidFill>
-                <a:latin typeface="Aptos"/>
-              </a:rPr>
-              <a:t>5</a:t>
-            </a:r>
-          </a:p>
-        </p:txBody>
-      </p:sp>
-      <p:sp>
-        <p:nvSpPr>
-          <p:cNvPr id="28" name="TextBox 27"/>
-          <p:cNvSpPr txBox="1"/>
-          <p:nvPr/>
-        </p:nvSpPr>
-        <p:spPr>
-          <a:xfrm>
-            <a:off x="10003536" y="2176272"/>
-            <a:ext cx="1691640" cy="320040"/>
-          </a:xfrm>
-          <a:prstGeom prst="rect">
-            <a:avLst/>
-          </a:prstGeom>
-          <a:noFill/>
-        </p:spPr>
-        <p:txBody>
-          <a:bodyPr wrap="square" lIns="36576" tIns="36576" rIns="36576" bIns="36576" anchor="t">
-            <a:spAutoFit/>
-          </a:bodyPr>
-          <a:lstStyle/>
-          <a:p>
-            <a:r>
-              <a:rPr sz="1700" b="1">
-                <a:solidFill>
-                  <a:srgbClr val="F3F7FC"/>
-                </a:solidFill>
-                <a:latin typeface="Aptos"/>
-              </a:rPr>
-              <a:t>Deploy</a:t>
-            </a:r>
-          </a:p>
-        </p:txBody>
-      </p:sp>
-      <p:sp>
-        <p:nvSpPr>
-          <p:cNvPr id="29" name="TextBox 28"/>
-          <p:cNvSpPr txBox="1"/>
-          <p:nvPr/>
-        </p:nvSpPr>
-        <p:spPr>
-          <a:xfrm>
-            <a:off x="10003536" y="2578608"/>
-            <a:ext cx="1691640" cy="365760"/>
-          </a:xfrm>
-          <a:prstGeom prst="rect">
-            <a:avLst/>
-          </a:prstGeom>
-          <a:noFill/>
-        </p:spPr>
-        <p:txBody>
-          <a:bodyPr wrap="square" lIns="36576" tIns="36576" rIns="36576" bIns="36576" anchor="t">
-            <a:spAutoFit/>
-          </a:bodyPr>
-          <a:lstStyle/>
-          <a:p>
-            <a:r>
-              <a:rPr sz="1100" b="0">
-                <a:solidFill>
-                  <a:srgbClr val="ADBBCF"/>
-                </a:solidFill>
-                <a:latin typeface="Aptos"/>
-              </a:rPr>
-              <a:t>kind + Helm + smoke tests</a:t>
-            </a:r>
-          </a:p>
-        </p:txBody>
-      </p:sp>
-      <p:sp>
-        <p:nvSpPr>
-          <p:cNvPr id="30" name="Rounded Rectangle 29"/>
-          <p:cNvSpPr/>
-          <p:nvPr/>
-        </p:nvSpPr>
-        <p:spPr>
-          <a:xfrm>
-            <a:off x="2233879" y="3396996"/>
-            <a:ext cx="3487521" cy="2441448"/>
+            <a:off x="996986" y="1412748"/>
+            <a:ext cx="4900603" cy="4178808"/>
           </a:xfrm>
           <a:prstGeom prst="roundRect">
             <a:avLst>
@@ -4951,7 +4219,7 @@
       </p:sp>
       <p:pic>
         <p:nvPicPr>
-          <p:cNvPr id="31" name="Picture 30" descr="50-github-actions-run.png"/>
+          <p:cNvPr id="7" name="Picture 6" descr="02-compose-up.png"/>
           <p:cNvPicPr>
             <a:picLocks noChangeAspect="1"/>
           </p:cNvPicPr>
@@ -4965,8 +4233,8 @@
         </p:blipFill>
         <p:spPr>
           <a:xfrm>
-            <a:off x="2265883" y="3429000"/>
-            <a:ext cx="3423513" cy="2377440"/>
+            <a:off x="1028990" y="1444752"/>
+            <a:ext cx="4836595" cy="4114800"/>
           </a:xfrm>
           <a:prstGeom prst="rect">
             <a:avLst/>
@@ -4975,14 +4243,14 @@
       </p:pic>
       <p:sp>
         <p:nvSpPr>
-          <p:cNvPr id="32" name="Rounded Rectangle 31"/>
+          <p:cNvPr id="8" name="Rounded Rectangle 7"/>
           <p:cNvSpPr/>
           <p:nvPr/>
         </p:nvSpPr>
         <p:spPr>
           <a:xfrm>
-            <a:off x="7511796" y="3950716"/>
-            <a:ext cx="1892807" cy="1334008"/>
+            <a:off x="6414516" y="3179715"/>
+            <a:ext cx="5138928" cy="644872"/>
           </a:xfrm>
           <a:prstGeom prst="roundRect">
             <a:avLst>
@@ -5023,7 +4291,7 @@
       </p:sp>
       <p:pic>
         <p:nvPicPr>
-          <p:cNvPr id="33" name="Picture 32" descr="51-ghcr-backend.png"/>
+          <p:cNvPr id="9" name="Picture 8" descr="03-compose-ps.png"/>
           <p:cNvPicPr>
             <a:picLocks noChangeAspect="1"/>
           </p:cNvPicPr>
@@ -5037,8 +4305,8 @@
         </p:blipFill>
         <p:spPr>
           <a:xfrm>
-            <a:off x="7543800" y="3982720"/>
-            <a:ext cx="1828800" cy="1270000"/>
+            <a:off x="6446520" y="3211719"/>
+            <a:ext cx="5074920" cy="580864"/>
           </a:xfrm>
           <a:prstGeom prst="rect">
             <a:avLst/>
@@ -5047,106 +4315,34 @@
       </p:pic>
       <p:sp>
         <p:nvSpPr>
-          <p:cNvPr id="34" name="Rounded Rectangle 33"/>
-          <p:cNvSpPr/>
-          <p:nvPr/>
-        </p:nvSpPr>
-        <p:spPr>
-          <a:xfrm>
-            <a:off x="9523476" y="3950716"/>
-            <a:ext cx="1892807" cy="1334008"/>
-          </a:xfrm>
-          <a:prstGeom prst="roundRect">
-            <a:avLst>
-              <a:gd name="adj" fmla="val 12000"/>
-            </a:avLst>
-          </a:prstGeom>
-          <a:solidFill>
-            <a:srgbClr val="1D2B44"/>
-          </a:solidFill>
-          <a:ln>
-            <a:solidFill>
-              <a:srgbClr val="405371"/>
-            </a:solidFill>
-          </a:ln>
-        </p:spPr>
-        <p:style>
-          <a:lnRef idx="1">
-            <a:schemeClr val="accent1"/>
-          </a:lnRef>
-          <a:fillRef idx="3">
-            <a:schemeClr val="accent1"/>
-          </a:fillRef>
-          <a:effectRef idx="2">
-            <a:schemeClr val="accent1"/>
-          </a:effectRef>
-          <a:fontRef idx="minor">
-            <a:schemeClr val="lt1"/>
-          </a:fontRef>
-        </p:style>
-        <p:txBody>
-          <a:bodyPr rtlCol="0" anchor="ctr"/>
-          <a:lstStyle/>
-          <a:p>
-            <a:pPr algn="ctr"/>
-            <a:endParaRPr/>
-          </a:p>
-        </p:txBody>
-      </p:sp>
-      <p:pic>
-        <p:nvPicPr>
-          <p:cNvPr id="35" name="Picture 34" descr="52-ghcr-frontend.png"/>
-          <p:cNvPicPr>
-            <a:picLocks noChangeAspect="1"/>
-          </p:cNvPicPr>
-          <p:nvPr/>
-        </p:nvPicPr>
-        <p:blipFill>
-          <a:blip r:embed="rId4"/>
-          <a:stretch>
-            <a:fillRect/>
-          </a:stretch>
-        </p:blipFill>
-        <p:spPr>
-          <a:xfrm>
-            <a:off x="9555480" y="3982720"/>
-            <a:ext cx="1828800" cy="1270000"/>
-          </a:xfrm>
-          <a:prstGeom prst="rect">
-            <a:avLst/>
-          </a:prstGeom>
-        </p:spPr>
-      </p:pic>
-      <p:sp>
-        <p:nvSpPr>
-          <p:cNvPr id="36" name="TextBox 35"/>
-          <p:cNvSpPr txBox="1"/>
-          <p:nvPr/>
-        </p:nvSpPr>
-        <p:spPr>
-          <a:xfrm>
-            <a:off x="731520" y="5989320"/>
-            <a:ext cx="10789920" cy="256032"/>
-          </a:xfrm>
-          <a:prstGeom prst="rect">
-            <a:avLst/>
-          </a:prstGeom>
-          <a:noFill/>
-        </p:spPr>
-        <p:txBody>
-          <a:bodyPr wrap="square" lIns="36576" tIns="36576" rIns="36576" bIns="36576" anchor="t">
-            <a:spAutoFit/>
-          </a:bodyPr>
-          <a:lstStyle/>
-          <a:p>
-            <a:r>
-              <a:rPr sz="1000" b="0">
+          <p:cNvPr id="10" name="TextBox 9"/>
+          <p:cNvSpPr txBox="1"/>
+          <p:nvPr/>
+        </p:nvSpPr>
+        <p:spPr>
+          <a:xfrm>
+            <a:off x="749808" y="5760720"/>
+            <a:ext cx="10789920" cy="365760"/>
+          </a:xfrm>
+          <a:prstGeom prst="rect">
+            <a:avLst/>
+          </a:prstGeom>
+          <a:noFill/>
+        </p:spPr>
+        <p:txBody>
+          <a:bodyPr wrap="square" lIns="36576" tIns="36576" rIns="36576" bIns="36576" anchor="t">
+            <a:spAutoFit/>
+          </a:bodyPr>
+          <a:lstStyle/>
+          <a:p>
+            <a:r>
+              <a:rPr sz="1300" b="0">
                 <a:solidFill>
                   <a:srgbClr val="ADBBCF"/>
                 </a:solidFill>
                 <a:latin typeface="Aptos"/>
               </a:rPr>
-              <a:t>Repository README links the latest green GitHub Actions run; images are published to GitHub Container Registry.</a:t>
+              <a:t>One command builds and starts the frontend, API and PostgreSQL; compose ps confirms container status.</a:t>
             </a:r>
           </a:p>
         </p:txBody>
@@ -5213,7 +4409,7 @@
                 </a:solidFill>
                 <a:latin typeface="Aptos"/>
               </a:rPr>
-              <a:t>10 / IMAGE SCANNING</a:t>
+              <a:t>09 / FROM COMMIT TO DEPLOYMENT</a:t>
             </a:r>
           </a:p>
         </p:txBody>
@@ -5247,7 +4443,7 @@
                 </a:solidFill>
                 <a:latin typeface="Aptos"/>
               </a:rPr>
-              <a:t>Security checks in the pipeline</a:t>
+              <a:t>CI/CD pipeline</a:t>
             </a:r>
           </a:p>
         </p:txBody>
@@ -5326,7 +4522,7 @@
                 </a:solidFill>
                 <a:latin typeface="Aptos"/>
               </a:rPr>
-              <a:t>12</a:t>
+              <a:t>11</a:t>
             </a:r>
           </a:p>
         </p:txBody>
@@ -5339,8 +4535,888 @@
         </p:nvSpPr>
         <p:spPr>
           <a:xfrm>
-            <a:off x="618765" y="1476756"/>
-            <a:ext cx="5483308" cy="3355848"/>
+            <a:off x="621792" y="1691640"/>
+            <a:ext cx="2011680" cy="1371600"/>
+          </a:xfrm>
+          <a:prstGeom prst="roundRect">
+            <a:avLst>
+              <a:gd name="adj" fmla="val 12000"/>
+            </a:avLst>
+          </a:prstGeom>
+          <a:solidFill>
+            <a:srgbClr val="172237"/>
+          </a:solidFill>
+          <a:ln>
+            <a:noFill/>
+          </a:ln>
+        </p:spPr>
+        <p:style>
+          <a:lnRef idx="1">
+            <a:schemeClr val="accent1"/>
+          </a:lnRef>
+          <a:fillRef idx="3">
+            <a:schemeClr val="accent1"/>
+          </a:fillRef>
+          <a:effectRef idx="2">
+            <a:schemeClr val="accent1"/>
+          </a:effectRef>
+          <a:fontRef idx="minor">
+            <a:schemeClr val="lt1"/>
+          </a:fontRef>
+        </p:style>
+        <p:txBody>
+          <a:bodyPr rtlCol="0" anchor="ctr"/>
+          <a:lstStyle/>
+          <a:p>
+            <a:pPr algn="ctr"/>
+            <a:endParaRPr/>
+          </a:p>
+        </p:txBody>
+      </p:sp>
+      <p:sp>
+        <p:nvSpPr>
+          <p:cNvPr id="7" name="TextBox 6"/>
+          <p:cNvSpPr txBox="1"/>
+          <p:nvPr/>
+        </p:nvSpPr>
+        <p:spPr>
+          <a:xfrm>
+            <a:off x="786384" y="1856231"/>
+            <a:ext cx="384048" cy="274320"/>
+          </a:xfrm>
+          <a:prstGeom prst="rect">
+            <a:avLst/>
+          </a:prstGeom>
+          <a:noFill/>
+        </p:spPr>
+        <p:txBody>
+          <a:bodyPr wrap="square" lIns="36576" tIns="36576" rIns="36576" bIns="36576" anchor="t">
+            <a:spAutoFit/>
+          </a:bodyPr>
+          <a:lstStyle/>
+          <a:p>
+            <a:r>
+              <a:rPr sz="1200" b="1">
+                <a:solidFill>
+                  <a:srgbClr val="45D3E6"/>
+                </a:solidFill>
+                <a:latin typeface="Aptos"/>
+              </a:rPr>
+              <a:t>1</a:t>
+            </a:r>
+          </a:p>
+        </p:txBody>
+      </p:sp>
+      <p:sp>
+        <p:nvSpPr>
+          <p:cNvPr id="8" name="TextBox 7"/>
+          <p:cNvSpPr txBox="1"/>
+          <p:nvPr/>
+        </p:nvSpPr>
+        <p:spPr>
+          <a:xfrm>
+            <a:off x="786384" y="2176272"/>
+            <a:ext cx="1691640" cy="320040"/>
+          </a:xfrm>
+          <a:prstGeom prst="rect">
+            <a:avLst/>
+          </a:prstGeom>
+          <a:noFill/>
+        </p:spPr>
+        <p:txBody>
+          <a:bodyPr wrap="square" lIns="36576" tIns="36576" rIns="36576" bIns="36576" anchor="t">
+            <a:spAutoFit/>
+          </a:bodyPr>
+          <a:lstStyle/>
+          <a:p>
+            <a:r>
+              <a:rPr sz="1700" b="1">
+                <a:solidFill>
+                  <a:srgbClr val="F3F7FC"/>
+                </a:solidFill>
+                <a:latin typeface="Aptos"/>
+              </a:rPr>
+              <a:t>Test</a:t>
+            </a:r>
+          </a:p>
+        </p:txBody>
+      </p:sp>
+      <p:sp>
+        <p:nvSpPr>
+          <p:cNvPr id="9" name="TextBox 8"/>
+          <p:cNvSpPr txBox="1"/>
+          <p:nvPr/>
+        </p:nvSpPr>
+        <p:spPr>
+          <a:xfrm>
+            <a:off x="786384" y="2578608"/>
+            <a:ext cx="1691640" cy="365760"/>
+          </a:xfrm>
+          <a:prstGeom prst="rect">
+            <a:avLst/>
+          </a:prstGeom>
+          <a:noFill/>
+        </p:spPr>
+        <p:txBody>
+          <a:bodyPr wrap="square" lIns="36576" tIns="36576" rIns="36576" bIns="36576" anchor="t">
+            <a:spAutoFit/>
+          </a:bodyPr>
+          <a:lstStyle/>
+          <a:p>
+            <a:r>
+              <a:rPr sz="1100" b="0">
+                <a:solidFill>
+                  <a:srgbClr val="ADBBCF"/>
+                </a:solidFill>
+                <a:latin typeface="Aptos"/>
+              </a:rPr>
+              <a:t>ruff + pytest</a:t>
+            </a:r>
+          </a:p>
+        </p:txBody>
+      </p:sp>
+      <p:cxnSp>
+        <p:nvCxnSpPr>
+          <p:cNvPr id="10" name="Connector 9"/>
+          <p:cNvCxnSpPr/>
+          <p:nvPr/>
+        </p:nvCxnSpPr>
+        <p:spPr>
+          <a:xfrm>
+            <a:off x="2633472" y="2377440"/>
+            <a:ext cx="292608" cy="0"/>
+          </a:xfrm>
+          <a:prstGeom prst="line">
+            <a:avLst/>
+          </a:prstGeom>
+          <a:ln w="25400">
+            <a:solidFill>
+              <a:srgbClr val="45D3E6"/>
+            </a:solidFill>
+          </a:ln>
+        </p:spPr>
+        <p:style>
+          <a:lnRef idx="2">
+            <a:schemeClr val="accent1"/>
+          </a:lnRef>
+          <a:fillRef idx="0">
+            <a:schemeClr val="accent1"/>
+          </a:fillRef>
+          <a:effectRef idx="1">
+            <a:schemeClr val="accent1"/>
+          </a:effectRef>
+          <a:fontRef idx="minor">
+            <a:schemeClr val="tx1"/>
+          </a:fontRef>
+        </p:style>
+      </p:cxnSp>
+      <p:sp>
+        <p:nvSpPr>
+          <p:cNvPr id="11" name="Rounded Rectangle 10"/>
+          <p:cNvSpPr/>
+          <p:nvPr/>
+        </p:nvSpPr>
+        <p:spPr>
+          <a:xfrm>
+            <a:off x="2926080" y="1691640"/>
+            <a:ext cx="2011680" cy="1371600"/>
+          </a:xfrm>
+          <a:prstGeom prst="roundRect">
+            <a:avLst>
+              <a:gd name="adj" fmla="val 12000"/>
+            </a:avLst>
+          </a:prstGeom>
+          <a:solidFill>
+            <a:srgbClr val="172237"/>
+          </a:solidFill>
+          <a:ln>
+            <a:noFill/>
+          </a:ln>
+        </p:spPr>
+        <p:style>
+          <a:lnRef idx="1">
+            <a:schemeClr val="accent1"/>
+          </a:lnRef>
+          <a:fillRef idx="3">
+            <a:schemeClr val="accent1"/>
+          </a:fillRef>
+          <a:effectRef idx="2">
+            <a:schemeClr val="accent1"/>
+          </a:effectRef>
+          <a:fontRef idx="minor">
+            <a:schemeClr val="lt1"/>
+          </a:fontRef>
+        </p:style>
+        <p:txBody>
+          <a:bodyPr rtlCol="0" anchor="ctr"/>
+          <a:lstStyle/>
+          <a:p>
+            <a:pPr algn="ctr"/>
+            <a:endParaRPr/>
+          </a:p>
+        </p:txBody>
+      </p:sp>
+      <p:sp>
+        <p:nvSpPr>
+          <p:cNvPr id="12" name="TextBox 11"/>
+          <p:cNvSpPr txBox="1"/>
+          <p:nvPr/>
+        </p:nvSpPr>
+        <p:spPr>
+          <a:xfrm>
+            <a:off x="3090672" y="1856231"/>
+            <a:ext cx="384048" cy="274320"/>
+          </a:xfrm>
+          <a:prstGeom prst="rect">
+            <a:avLst/>
+          </a:prstGeom>
+          <a:noFill/>
+        </p:spPr>
+        <p:txBody>
+          <a:bodyPr wrap="square" lIns="36576" tIns="36576" rIns="36576" bIns="36576" anchor="t">
+            <a:spAutoFit/>
+          </a:bodyPr>
+          <a:lstStyle/>
+          <a:p>
+            <a:r>
+              <a:rPr sz="1200" b="1">
+                <a:solidFill>
+                  <a:srgbClr val="45D3E6"/>
+                </a:solidFill>
+                <a:latin typeface="Aptos"/>
+              </a:rPr>
+              <a:t>2</a:t>
+            </a:r>
+          </a:p>
+        </p:txBody>
+      </p:sp>
+      <p:sp>
+        <p:nvSpPr>
+          <p:cNvPr id="13" name="TextBox 12"/>
+          <p:cNvSpPr txBox="1"/>
+          <p:nvPr/>
+        </p:nvSpPr>
+        <p:spPr>
+          <a:xfrm>
+            <a:off x="3090672" y="2176272"/>
+            <a:ext cx="1691640" cy="320040"/>
+          </a:xfrm>
+          <a:prstGeom prst="rect">
+            <a:avLst/>
+          </a:prstGeom>
+          <a:noFill/>
+        </p:spPr>
+        <p:txBody>
+          <a:bodyPr wrap="square" lIns="36576" tIns="36576" rIns="36576" bIns="36576" anchor="t">
+            <a:spAutoFit/>
+          </a:bodyPr>
+          <a:lstStyle/>
+          <a:p>
+            <a:r>
+              <a:rPr sz="1700" b="1">
+                <a:solidFill>
+                  <a:srgbClr val="F3F7FC"/>
+                </a:solidFill>
+                <a:latin typeface="Aptos"/>
+              </a:rPr>
+              <a:t>Build</a:t>
+            </a:r>
+          </a:p>
+        </p:txBody>
+      </p:sp>
+      <p:sp>
+        <p:nvSpPr>
+          <p:cNvPr id="14" name="TextBox 13"/>
+          <p:cNvSpPr txBox="1"/>
+          <p:nvPr/>
+        </p:nvSpPr>
+        <p:spPr>
+          <a:xfrm>
+            <a:off x="3090672" y="2578608"/>
+            <a:ext cx="1691640" cy="365760"/>
+          </a:xfrm>
+          <a:prstGeom prst="rect">
+            <a:avLst/>
+          </a:prstGeom>
+          <a:noFill/>
+        </p:spPr>
+        <p:txBody>
+          <a:bodyPr wrap="square" lIns="36576" tIns="36576" rIns="36576" bIns="36576" anchor="t">
+            <a:spAutoFit/>
+          </a:bodyPr>
+          <a:lstStyle/>
+          <a:p>
+            <a:r>
+              <a:rPr sz="1100" b="0">
+                <a:solidFill>
+                  <a:srgbClr val="ADBBCF"/>
+                </a:solidFill>
+                <a:latin typeface="Aptos"/>
+              </a:rPr>
+              <a:t>Frontend + images</a:t>
+            </a:r>
+          </a:p>
+        </p:txBody>
+      </p:sp>
+      <p:cxnSp>
+        <p:nvCxnSpPr>
+          <p:cNvPr id="15" name="Connector 14"/>
+          <p:cNvCxnSpPr/>
+          <p:nvPr/>
+        </p:nvCxnSpPr>
+        <p:spPr>
+          <a:xfrm>
+            <a:off x="4937760" y="2377440"/>
+            <a:ext cx="292608" cy="0"/>
+          </a:xfrm>
+          <a:prstGeom prst="line">
+            <a:avLst/>
+          </a:prstGeom>
+          <a:ln w="25400">
+            <a:solidFill>
+              <a:srgbClr val="45D3E6"/>
+            </a:solidFill>
+          </a:ln>
+        </p:spPr>
+        <p:style>
+          <a:lnRef idx="2">
+            <a:schemeClr val="accent1"/>
+          </a:lnRef>
+          <a:fillRef idx="0">
+            <a:schemeClr val="accent1"/>
+          </a:fillRef>
+          <a:effectRef idx="1">
+            <a:schemeClr val="accent1"/>
+          </a:effectRef>
+          <a:fontRef idx="minor">
+            <a:schemeClr val="tx1"/>
+          </a:fontRef>
+        </p:style>
+      </p:cxnSp>
+      <p:sp>
+        <p:nvSpPr>
+          <p:cNvPr id="16" name="Rounded Rectangle 15"/>
+          <p:cNvSpPr/>
+          <p:nvPr/>
+        </p:nvSpPr>
+        <p:spPr>
+          <a:xfrm>
+            <a:off x="5230368" y="1691640"/>
+            <a:ext cx="2011680" cy="1371600"/>
+          </a:xfrm>
+          <a:prstGeom prst="roundRect">
+            <a:avLst>
+              <a:gd name="adj" fmla="val 12000"/>
+            </a:avLst>
+          </a:prstGeom>
+          <a:solidFill>
+            <a:srgbClr val="172237"/>
+          </a:solidFill>
+          <a:ln>
+            <a:noFill/>
+          </a:ln>
+        </p:spPr>
+        <p:style>
+          <a:lnRef idx="1">
+            <a:schemeClr val="accent1"/>
+          </a:lnRef>
+          <a:fillRef idx="3">
+            <a:schemeClr val="accent1"/>
+          </a:fillRef>
+          <a:effectRef idx="2">
+            <a:schemeClr val="accent1"/>
+          </a:effectRef>
+          <a:fontRef idx="minor">
+            <a:schemeClr val="lt1"/>
+          </a:fontRef>
+        </p:style>
+        <p:txBody>
+          <a:bodyPr rtlCol="0" anchor="ctr"/>
+          <a:lstStyle/>
+          <a:p>
+            <a:pPr algn="ctr"/>
+            <a:endParaRPr/>
+          </a:p>
+        </p:txBody>
+      </p:sp>
+      <p:sp>
+        <p:nvSpPr>
+          <p:cNvPr id="17" name="TextBox 16"/>
+          <p:cNvSpPr txBox="1"/>
+          <p:nvPr/>
+        </p:nvSpPr>
+        <p:spPr>
+          <a:xfrm>
+            <a:off x="5394959" y="1856231"/>
+            <a:ext cx="384048" cy="274320"/>
+          </a:xfrm>
+          <a:prstGeom prst="rect">
+            <a:avLst/>
+          </a:prstGeom>
+          <a:noFill/>
+        </p:spPr>
+        <p:txBody>
+          <a:bodyPr wrap="square" lIns="36576" tIns="36576" rIns="36576" bIns="36576" anchor="t">
+            <a:spAutoFit/>
+          </a:bodyPr>
+          <a:lstStyle/>
+          <a:p>
+            <a:r>
+              <a:rPr sz="1200" b="1">
+                <a:solidFill>
+                  <a:srgbClr val="45D3E6"/>
+                </a:solidFill>
+                <a:latin typeface="Aptos"/>
+              </a:rPr>
+              <a:t>3</a:t>
+            </a:r>
+          </a:p>
+        </p:txBody>
+      </p:sp>
+      <p:sp>
+        <p:nvSpPr>
+          <p:cNvPr id="18" name="TextBox 17"/>
+          <p:cNvSpPr txBox="1"/>
+          <p:nvPr/>
+        </p:nvSpPr>
+        <p:spPr>
+          <a:xfrm>
+            <a:off x="5394959" y="2176272"/>
+            <a:ext cx="1691640" cy="320040"/>
+          </a:xfrm>
+          <a:prstGeom prst="rect">
+            <a:avLst/>
+          </a:prstGeom>
+          <a:noFill/>
+        </p:spPr>
+        <p:txBody>
+          <a:bodyPr wrap="square" lIns="36576" tIns="36576" rIns="36576" bIns="36576" anchor="t">
+            <a:spAutoFit/>
+          </a:bodyPr>
+          <a:lstStyle/>
+          <a:p>
+            <a:r>
+              <a:rPr sz="1700" b="1">
+                <a:solidFill>
+                  <a:srgbClr val="F3F7FC"/>
+                </a:solidFill>
+                <a:latin typeface="Aptos"/>
+              </a:rPr>
+              <a:t>Scan</a:t>
+            </a:r>
+          </a:p>
+        </p:txBody>
+      </p:sp>
+      <p:sp>
+        <p:nvSpPr>
+          <p:cNvPr id="19" name="TextBox 18"/>
+          <p:cNvSpPr txBox="1"/>
+          <p:nvPr/>
+        </p:nvSpPr>
+        <p:spPr>
+          <a:xfrm>
+            <a:off x="5394959" y="2578608"/>
+            <a:ext cx="1691640" cy="365760"/>
+          </a:xfrm>
+          <a:prstGeom prst="rect">
+            <a:avLst/>
+          </a:prstGeom>
+          <a:noFill/>
+        </p:spPr>
+        <p:txBody>
+          <a:bodyPr wrap="square" lIns="36576" tIns="36576" rIns="36576" bIns="36576" anchor="t">
+            <a:spAutoFit/>
+          </a:bodyPr>
+          <a:lstStyle/>
+          <a:p>
+            <a:r>
+              <a:rPr sz="1100" b="0">
+                <a:solidFill>
+                  <a:srgbClr val="ADBBCF"/>
+                </a:solidFill>
+                <a:latin typeface="Aptos"/>
+              </a:rPr>
+              <a:t>Trivy security gate</a:t>
+            </a:r>
+          </a:p>
+        </p:txBody>
+      </p:sp>
+      <p:cxnSp>
+        <p:nvCxnSpPr>
+          <p:cNvPr id="20" name="Connector 19"/>
+          <p:cNvCxnSpPr/>
+          <p:nvPr/>
+        </p:nvCxnSpPr>
+        <p:spPr>
+          <a:xfrm>
+            <a:off x="7242048" y="2377440"/>
+            <a:ext cx="292608" cy="0"/>
+          </a:xfrm>
+          <a:prstGeom prst="line">
+            <a:avLst/>
+          </a:prstGeom>
+          <a:ln w="25400">
+            <a:solidFill>
+              <a:srgbClr val="45D3E6"/>
+            </a:solidFill>
+          </a:ln>
+        </p:spPr>
+        <p:style>
+          <a:lnRef idx="2">
+            <a:schemeClr val="accent1"/>
+          </a:lnRef>
+          <a:fillRef idx="0">
+            <a:schemeClr val="accent1"/>
+          </a:fillRef>
+          <a:effectRef idx="1">
+            <a:schemeClr val="accent1"/>
+          </a:effectRef>
+          <a:fontRef idx="minor">
+            <a:schemeClr val="tx1"/>
+          </a:fontRef>
+        </p:style>
+      </p:cxnSp>
+      <p:sp>
+        <p:nvSpPr>
+          <p:cNvPr id="21" name="Rounded Rectangle 20"/>
+          <p:cNvSpPr/>
+          <p:nvPr/>
+        </p:nvSpPr>
+        <p:spPr>
+          <a:xfrm>
+            <a:off x="7534656" y="1691640"/>
+            <a:ext cx="2011680" cy="1371600"/>
+          </a:xfrm>
+          <a:prstGeom prst="roundRect">
+            <a:avLst>
+              <a:gd name="adj" fmla="val 12000"/>
+            </a:avLst>
+          </a:prstGeom>
+          <a:solidFill>
+            <a:srgbClr val="172237"/>
+          </a:solidFill>
+          <a:ln>
+            <a:noFill/>
+          </a:ln>
+        </p:spPr>
+        <p:style>
+          <a:lnRef idx="1">
+            <a:schemeClr val="accent1"/>
+          </a:lnRef>
+          <a:fillRef idx="3">
+            <a:schemeClr val="accent1"/>
+          </a:fillRef>
+          <a:effectRef idx="2">
+            <a:schemeClr val="accent1"/>
+          </a:effectRef>
+          <a:fontRef idx="minor">
+            <a:schemeClr val="lt1"/>
+          </a:fontRef>
+        </p:style>
+        <p:txBody>
+          <a:bodyPr rtlCol="0" anchor="ctr"/>
+          <a:lstStyle/>
+          <a:p>
+            <a:pPr algn="ctr"/>
+            <a:endParaRPr/>
+          </a:p>
+        </p:txBody>
+      </p:sp>
+      <p:sp>
+        <p:nvSpPr>
+          <p:cNvPr id="22" name="TextBox 21"/>
+          <p:cNvSpPr txBox="1"/>
+          <p:nvPr/>
+        </p:nvSpPr>
+        <p:spPr>
+          <a:xfrm>
+            <a:off x="7699248" y="1856231"/>
+            <a:ext cx="384048" cy="274320"/>
+          </a:xfrm>
+          <a:prstGeom prst="rect">
+            <a:avLst/>
+          </a:prstGeom>
+          <a:noFill/>
+        </p:spPr>
+        <p:txBody>
+          <a:bodyPr wrap="square" lIns="36576" tIns="36576" rIns="36576" bIns="36576" anchor="t">
+            <a:spAutoFit/>
+          </a:bodyPr>
+          <a:lstStyle/>
+          <a:p>
+            <a:r>
+              <a:rPr sz="1200" b="1">
+                <a:solidFill>
+                  <a:srgbClr val="45D3E6"/>
+                </a:solidFill>
+                <a:latin typeface="Aptos"/>
+              </a:rPr>
+              <a:t>4</a:t>
+            </a:r>
+          </a:p>
+        </p:txBody>
+      </p:sp>
+      <p:sp>
+        <p:nvSpPr>
+          <p:cNvPr id="23" name="TextBox 22"/>
+          <p:cNvSpPr txBox="1"/>
+          <p:nvPr/>
+        </p:nvSpPr>
+        <p:spPr>
+          <a:xfrm>
+            <a:off x="7699248" y="2176272"/>
+            <a:ext cx="1691640" cy="320040"/>
+          </a:xfrm>
+          <a:prstGeom prst="rect">
+            <a:avLst/>
+          </a:prstGeom>
+          <a:noFill/>
+        </p:spPr>
+        <p:txBody>
+          <a:bodyPr wrap="square" lIns="36576" tIns="36576" rIns="36576" bIns="36576" anchor="t">
+            <a:spAutoFit/>
+          </a:bodyPr>
+          <a:lstStyle/>
+          <a:p>
+            <a:r>
+              <a:rPr sz="1700" b="1">
+                <a:solidFill>
+                  <a:srgbClr val="F3F7FC"/>
+                </a:solidFill>
+                <a:latin typeface="Aptos"/>
+              </a:rPr>
+              <a:t>Publish</a:t>
+            </a:r>
+          </a:p>
+        </p:txBody>
+      </p:sp>
+      <p:sp>
+        <p:nvSpPr>
+          <p:cNvPr id="24" name="TextBox 23"/>
+          <p:cNvSpPr txBox="1"/>
+          <p:nvPr/>
+        </p:nvSpPr>
+        <p:spPr>
+          <a:xfrm>
+            <a:off x="7699248" y="2578608"/>
+            <a:ext cx="1691640" cy="365760"/>
+          </a:xfrm>
+          <a:prstGeom prst="rect">
+            <a:avLst/>
+          </a:prstGeom>
+          <a:noFill/>
+        </p:spPr>
+        <p:txBody>
+          <a:bodyPr wrap="square" lIns="36576" tIns="36576" rIns="36576" bIns="36576" anchor="t">
+            <a:spAutoFit/>
+          </a:bodyPr>
+          <a:lstStyle/>
+          <a:p>
+            <a:r>
+              <a:rPr sz="1100" b="0">
+                <a:solidFill>
+                  <a:srgbClr val="ADBBCF"/>
+                </a:solidFill>
+                <a:latin typeface="Aptos"/>
+              </a:rPr>
+              <a:t>GHCR on main</a:t>
+            </a:r>
+          </a:p>
+        </p:txBody>
+      </p:sp>
+      <p:cxnSp>
+        <p:nvCxnSpPr>
+          <p:cNvPr id="25" name="Connector 24"/>
+          <p:cNvCxnSpPr/>
+          <p:nvPr/>
+        </p:nvCxnSpPr>
+        <p:spPr>
+          <a:xfrm>
+            <a:off x="9546336" y="2377440"/>
+            <a:ext cx="292608" cy="0"/>
+          </a:xfrm>
+          <a:prstGeom prst="line">
+            <a:avLst/>
+          </a:prstGeom>
+          <a:ln w="25400">
+            <a:solidFill>
+              <a:srgbClr val="45D3E6"/>
+            </a:solidFill>
+          </a:ln>
+        </p:spPr>
+        <p:style>
+          <a:lnRef idx="2">
+            <a:schemeClr val="accent1"/>
+          </a:lnRef>
+          <a:fillRef idx="0">
+            <a:schemeClr val="accent1"/>
+          </a:fillRef>
+          <a:effectRef idx="1">
+            <a:schemeClr val="accent1"/>
+          </a:effectRef>
+          <a:fontRef idx="minor">
+            <a:schemeClr val="tx1"/>
+          </a:fontRef>
+        </p:style>
+      </p:cxnSp>
+      <p:sp>
+        <p:nvSpPr>
+          <p:cNvPr id="26" name="Rounded Rectangle 25"/>
+          <p:cNvSpPr/>
+          <p:nvPr/>
+        </p:nvSpPr>
+        <p:spPr>
+          <a:xfrm>
+            <a:off x="9838944" y="1691640"/>
+            <a:ext cx="2011680" cy="1371600"/>
+          </a:xfrm>
+          <a:prstGeom prst="roundRect">
+            <a:avLst>
+              <a:gd name="adj" fmla="val 12000"/>
+            </a:avLst>
+          </a:prstGeom>
+          <a:solidFill>
+            <a:srgbClr val="172237"/>
+          </a:solidFill>
+          <a:ln>
+            <a:noFill/>
+          </a:ln>
+        </p:spPr>
+        <p:style>
+          <a:lnRef idx="1">
+            <a:schemeClr val="accent1"/>
+          </a:lnRef>
+          <a:fillRef idx="3">
+            <a:schemeClr val="accent1"/>
+          </a:fillRef>
+          <a:effectRef idx="2">
+            <a:schemeClr val="accent1"/>
+          </a:effectRef>
+          <a:fontRef idx="minor">
+            <a:schemeClr val="lt1"/>
+          </a:fontRef>
+        </p:style>
+        <p:txBody>
+          <a:bodyPr rtlCol="0" anchor="ctr"/>
+          <a:lstStyle/>
+          <a:p>
+            <a:pPr algn="ctr"/>
+            <a:endParaRPr/>
+          </a:p>
+        </p:txBody>
+      </p:sp>
+      <p:sp>
+        <p:nvSpPr>
+          <p:cNvPr id="27" name="TextBox 26"/>
+          <p:cNvSpPr txBox="1"/>
+          <p:nvPr/>
+        </p:nvSpPr>
+        <p:spPr>
+          <a:xfrm>
+            <a:off x="10003536" y="1856231"/>
+            <a:ext cx="384048" cy="274320"/>
+          </a:xfrm>
+          <a:prstGeom prst="rect">
+            <a:avLst/>
+          </a:prstGeom>
+          <a:noFill/>
+        </p:spPr>
+        <p:txBody>
+          <a:bodyPr wrap="square" lIns="36576" tIns="36576" rIns="36576" bIns="36576" anchor="t">
+            <a:spAutoFit/>
+          </a:bodyPr>
+          <a:lstStyle/>
+          <a:p>
+            <a:r>
+              <a:rPr sz="1200" b="1">
+                <a:solidFill>
+                  <a:srgbClr val="45D3E6"/>
+                </a:solidFill>
+                <a:latin typeface="Aptos"/>
+              </a:rPr>
+              <a:t>5</a:t>
+            </a:r>
+          </a:p>
+        </p:txBody>
+      </p:sp>
+      <p:sp>
+        <p:nvSpPr>
+          <p:cNvPr id="28" name="TextBox 27"/>
+          <p:cNvSpPr txBox="1"/>
+          <p:nvPr/>
+        </p:nvSpPr>
+        <p:spPr>
+          <a:xfrm>
+            <a:off x="10003536" y="2176272"/>
+            <a:ext cx="1691640" cy="320040"/>
+          </a:xfrm>
+          <a:prstGeom prst="rect">
+            <a:avLst/>
+          </a:prstGeom>
+          <a:noFill/>
+        </p:spPr>
+        <p:txBody>
+          <a:bodyPr wrap="square" lIns="36576" tIns="36576" rIns="36576" bIns="36576" anchor="t">
+            <a:spAutoFit/>
+          </a:bodyPr>
+          <a:lstStyle/>
+          <a:p>
+            <a:r>
+              <a:rPr sz="1700" b="1">
+                <a:solidFill>
+                  <a:srgbClr val="F3F7FC"/>
+                </a:solidFill>
+                <a:latin typeface="Aptos"/>
+              </a:rPr>
+              <a:t>Deploy</a:t>
+            </a:r>
+          </a:p>
+        </p:txBody>
+      </p:sp>
+      <p:sp>
+        <p:nvSpPr>
+          <p:cNvPr id="29" name="TextBox 28"/>
+          <p:cNvSpPr txBox="1"/>
+          <p:nvPr/>
+        </p:nvSpPr>
+        <p:spPr>
+          <a:xfrm>
+            <a:off x="10003536" y="2578608"/>
+            <a:ext cx="1691640" cy="365760"/>
+          </a:xfrm>
+          <a:prstGeom prst="rect">
+            <a:avLst/>
+          </a:prstGeom>
+          <a:noFill/>
+        </p:spPr>
+        <p:txBody>
+          <a:bodyPr wrap="square" lIns="36576" tIns="36576" rIns="36576" bIns="36576" anchor="t">
+            <a:spAutoFit/>
+          </a:bodyPr>
+          <a:lstStyle/>
+          <a:p>
+            <a:r>
+              <a:rPr sz="1100" b="0">
+                <a:solidFill>
+                  <a:srgbClr val="ADBBCF"/>
+                </a:solidFill>
+                <a:latin typeface="Aptos"/>
+              </a:rPr>
+              <a:t>kind + Helm + smoke tests</a:t>
+            </a:r>
+          </a:p>
+        </p:txBody>
+      </p:sp>
+      <p:sp>
+        <p:nvSpPr>
+          <p:cNvPr id="30" name="Rounded Rectangle 29"/>
+          <p:cNvSpPr/>
+          <p:nvPr/>
+        </p:nvSpPr>
+        <p:spPr>
+          <a:xfrm>
+            <a:off x="2233879" y="3396996"/>
+            <a:ext cx="3487521" cy="2441448"/>
           </a:xfrm>
           <a:prstGeom prst="roundRect">
             <a:avLst>
@@ -5381,7 +5457,7 @@
       </p:sp>
       <p:pic>
         <p:nvPicPr>
-          <p:cNvPr id="7" name="Picture 6" descr="20-trivy-backend.png"/>
+          <p:cNvPr id="31" name="Picture 30" descr="50-github-actions-run.png"/>
           <p:cNvPicPr>
             <a:picLocks noChangeAspect="1"/>
           </p:cNvPicPr>
@@ -5395,8 +5471,8 @@
         </p:blipFill>
         <p:spPr>
           <a:xfrm>
-            <a:off x="650769" y="1508760"/>
-            <a:ext cx="5419300" cy="3291840"/>
+            <a:off x="2265883" y="3429000"/>
+            <a:ext cx="3423513" cy="2377440"/>
           </a:xfrm>
           <a:prstGeom prst="rect">
             <a:avLst/>
@@ -5405,14 +5481,14 @@
       </p:pic>
       <p:sp>
         <p:nvSpPr>
-          <p:cNvPr id="8" name="Rounded Rectangle 7"/>
+          <p:cNvPr id="32" name="Rounded Rectangle 31"/>
           <p:cNvSpPr/>
           <p:nvPr/>
         </p:nvSpPr>
         <p:spPr>
           <a:xfrm>
-            <a:off x="6231636" y="1869689"/>
-            <a:ext cx="5367528" cy="2569980"/>
+            <a:off x="7511796" y="3950716"/>
+            <a:ext cx="1892807" cy="1334008"/>
           </a:xfrm>
           <a:prstGeom prst="roundRect">
             <a:avLst>
@@ -5453,7 +5529,7 @@
       </p:sp>
       <p:pic>
         <p:nvPicPr>
-          <p:cNvPr id="9" name="Picture 8" descr="21-trivy-frontend.png"/>
+          <p:cNvPr id="33" name="Picture 32" descr="51-ghcr-backend.png"/>
           <p:cNvPicPr>
             <a:picLocks noChangeAspect="1"/>
           </p:cNvPicPr>
@@ -5467,8 +5543,8 @@
         </p:blipFill>
         <p:spPr>
           <a:xfrm>
-            <a:off x="6263640" y="1901693"/>
-            <a:ext cx="5303520" cy="2505972"/>
+            <a:off x="7543800" y="3982720"/>
+            <a:ext cx="1828800" cy="1270000"/>
           </a:xfrm>
           <a:prstGeom prst="rect">
             <a:avLst/>
@@ -5477,14 +5553,14 @@
       </p:pic>
       <p:sp>
         <p:nvSpPr>
-          <p:cNvPr id="10" name="Rounded Rectangle 9"/>
+          <p:cNvPr id="34" name="Rounded Rectangle 33"/>
           <p:cNvSpPr/>
           <p:nvPr/>
         </p:nvSpPr>
         <p:spPr>
           <a:xfrm>
-            <a:off x="713232" y="5074920"/>
-            <a:ext cx="10744200" cy="777240"/>
+            <a:off x="9523476" y="3950716"/>
+            <a:ext cx="1892807" cy="1334008"/>
           </a:xfrm>
           <a:prstGeom prst="roundRect">
             <a:avLst>
@@ -5492,10 +5568,12 @@
             </a:avLst>
           </a:prstGeom>
           <a:solidFill>
-            <a:srgbClr val="172237"/>
+            <a:srgbClr val="1D2B44"/>
           </a:solidFill>
           <a:ln>
-            <a:noFill/>
+            <a:solidFill>
+              <a:srgbClr val="405371"/>
+            </a:solidFill>
           </a:ln>
         </p:spPr>
         <p:style>
@@ -5521,50 +5599,40 @@
           </a:p>
         </p:txBody>
       </p:sp>
-      <p:sp>
-        <p:nvSpPr>
-          <p:cNvPr id="11" name="TextBox 10"/>
-          <p:cNvSpPr txBox="1"/>
-          <p:nvPr/>
-        </p:nvSpPr>
-        <p:spPr>
-          <a:xfrm>
-            <a:off x="914400" y="5285232"/>
-            <a:ext cx="10287000" cy="320040"/>
-          </a:xfrm>
-          <a:prstGeom prst="rect">
-            <a:avLst/>
-          </a:prstGeom>
-          <a:noFill/>
-        </p:spPr>
-        <p:txBody>
-          <a:bodyPr wrap="square" lIns="36576" tIns="36576" rIns="36576" bIns="36576" anchor="t">
-            <a:spAutoFit/>
-          </a:bodyPr>
-          <a:lstStyle/>
-          <a:p>
-            <a:r>
-              <a:rPr sz="1300" b="0">
-                <a:solidFill>
-                  <a:srgbClr val="F3F7FC"/>
-                </a:solidFill>
-                <a:latin typeface="Aptos"/>
-              </a:rPr>
-              <a:t>README reports 0 fixable HIGH/CRITICAL CVEs in the final backend and frontend scans. The CI gate uses Trivy with --ignore-unfixed.</a:t>
-            </a:r>
-          </a:p>
-        </p:txBody>
-      </p:sp>
-      <p:sp>
-        <p:nvSpPr>
-          <p:cNvPr id="12" name="TextBox 11"/>
-          <p:cNvSpPr txBox="1"/>
-          <p:nvPr/>
-        </p:nvSpPr>
-        <p:spPr>
-          <a:xfrm>
-            <a:off x="749808" y="6016752"/>
-            <a:ext cx="10698480" cy="228600"/>
+      <p:pic>
+        <p:nvPicPr>
+          <p:cNvPr id="35" name="Picture 34" descr="52-ghcr-frontend.png"/>
+          <p:cNvPicPr>
+            <a:picLocks noChangeAspect="1"/>
+          </p:cNvPicPr>
+          <p:nvPr/>
+        </p:nvPicPr>
+        <p:blipFill>
+          <a:blip r:embed="rId4"/>
+          <a:stretch>
+            <a:fillRect/>
+          </a:stretch>
+        </p:blipFill>
+        <p:spPr>
+          <a:xfrm>
+            <a:off x="9555480" y="3982720"/>
+            <a:ext cx="1828800" cy="1270000"/>
+          </a:xfrm>
+          <a:prstGeom prst="rect">
+            <a:avLst/>
+          </a:prstGeom>
+        </p:spPr>
+      </p:pic>
+      <p:sp>
+        <p:nvSpPr>
+          <p:cNvPr id="36" name="TextBox 35"/>
+          <p:cNvSpPr txBox="1"/>
+          <p:nvPr/>
+        </p:nvSpPr>
+        <p:spPr>
+          <a:xfrm>
+            <a:off x="731520" y="5989320"/>
+            <a:ext cx="10789920" cy="256032"/>
           </a:xfrm>
           <a:prstGeom prst="rect">
             <a:avLst/>
@@ -5584,7 +5652,7 @@
                 </a:solidFill>
                 <a:latin typeface="Aptos"/>
               </a:rPr>
-              <a:t>Images run as non-root users; backend runtime removes pip to reduce unnecessary packages.</a:t>
+              <a:t>Repository README links the latest green GitHub Actions run; images are published to GitHub Container Registry.</a:t>
             </a:r>
           </a:p>
         </p:txBody>
@@ -5651,7 +5719,7 @@
                 </a:solidFill>
                 <a:latin typeface="Aptos"/>
               </a:rPr>
-              <a:t>11 / ORCHESTRATION</a:t>
+              <a:t>10 / IMAGE SCANNING</a:t>
             </a:r>
           </a:p>
         </p:txBody>
@@ -5685,7 +5753,7 @@
                 </a:solidFill>
                 <a:latin typeface="Aptos"/>
               </a:rPr>
-              <a:t>Kubernetes deployment</a:t>
+              <a:t>Security checks in the pipeline</a:t>
             </a:r>
           </a:p>
         </p:txBody>
@@ -5764,7 +5832,7 @@
                 </a:solidFill>
                 <a:latin typeface="Aptos"/>
               </a:rPr>
-              <a:t>13</a:t>
+              <a:t>12</a:t>
             </a:r>
           </a:p>
         </p:txBody>
@@ -5777,8 +5845,8 @@
         </p:nvSpPr>
         <p:spPr>
           <a:xfrm>
-            <a:off x="608075" y="1872796"/>
-            <a:ext cx="5413248" cy="1695087"/>
+            <a:off x="618765" y="1476756"/>
+            <a:ext cx="5483308" cy="3355848"/>
           </a:xfrm>
           <a:prstGeom prst="roundRect">
             <a:avLst>
@@ -5819,7 +5887,7 @@
       </p:sp>
       <p:pic>
         <p:nvPicPr>
-          <p:cNvPr id="7" name="Picture 6" descr="40-kubectl-get-pods.png"/>
+          <p:cNvPr id="7" name="Picture 6" descr="20-trivy-backend.png"/>
           <p:cNvPicPr>
             <a:picLocks noChangeAspect="1"/>
           </p:cNvPicPr>
@@ -5833,8 +5901,8 @@
         </p:blipFill>
         <p:spPr>
           <a:xfrm>
-            <a:off x="640080" y="1904800"/>
-            <a:ext cx="5349240" cy="1631079"/>
+            <a:off x="650769" y="1508760"/>
+            <a:ext cx="5419300" cy="3291840"/>
           </a:xfrm>
           <a:prstGeom prst="rect">
             <a:avLst/>
@@ -5849,8 +5917,8 @@
         </p:nvSpPr>
         <p:spPr>
           <a:xfrm>
-            <a:off x="6359264" y="1476756"/>
-            <a:ext cx="5020830" cy="2487168"/>
+            <a:off x="6231636" y="1869689"/>
+            <a:ext cx="5367528" cy="2569980"/>
           </a:xfrm>
           <a:prstGeom prst="roundRect">
             <a:avLst>
@@ -5891,7 +5959,7 @@
       </p:sp>
       <p:pic>
         <p:nvPicPr>
-          <p:cNvPr id="9" name="Picture 8" descr="41-kubectl-get-svc-ingress.png"/>
+          <p:cNvPr id="9" name="Picture 8" descr="21-trivy-frontend.png"/>
           <p:cNvPicPr>
             <a:picLocks noChangeAspect="1"/>
           </p:cNvPicPr>
@@ -5905,8 +5973,8 @@
         </p:blipFill>
         <p:spPr>
           <a:xfrm>
-            <a:off x="6391268" y="1508760"/>
-            <a:ext cx="4956822" cy="2423160"/>
+            <a:off x="6263640" y="1901693"/>
+            <a:ext cx="5303520" cy="2505972"/>
           </a:xfrm>
           <a:prstGeom prst="rect">
             <a:avLst/>
@@ -5921,8 +5989,8 @@
         </p:nvSpPr>
         <p:spPr>
           <a:xfrm>
-            <a:off x="2400299" y="4219956"/>
-            <a:ext cx="2331720" cy="1481328"/>
+            <a:off x="713232" y="5074920"/>
+            <a:ext cx="10744200" cy="777240"/>
           </a:xfrm>
           <a:prstGeom prst="roundRect">
             <a:avLst>
@@ -5930,12 +5998,10 @@
             </a:avLst>
           </a:prstGeom>
           <a:solidFill>
-            <a:srgbClr val="1D2B44"/>
+            <a:srgbClr val="172237"/>
           </a:solidFill>
           <a:ln>
-            <a:solidFill>
-              <a:srgbClr val="405371"/>
-            </a:solidFill>
+            <a:noFill/>
           </a:ln>
         </p:spPr>
         <p:style>
@@ -5961,132 +6027,70 @@
           </a:p>
         </p:txBody>
       </p:sp>
-      <p:pic>
-        <p:nvPicPr>
-          <p:cNvPr id="11" name="Picture 10" descr="43-ingress-browser.png"/>
-          <p:cNvPicPr>
-            <a:picLocks noChangeAspect="1"/>
-          </p:cNvPicPr>
-          <p:nvPr/>
-        </p:nvPicPr>
-        <p:blipFill>
-          <a:blip r:embed="rId4"/>
-          <a:stretch>
-            <a:fillRect/>
-          </a:stretch>
-        </p:blipFill>
-        <p:spPr>
-          <a:xfrm>
-            <a:off x="2432303" y="4251960"/>
-            <a:ext cx="2267712" cy="1417320"/>
-          </a:xfrm>
-          <a:prstGeom prst="rect">
-            <a:avLst/>
-          </a:prstGeom>
-        </p:spPr>
-      </p:pic>
-      <p:sp>
-        <p:nvSpPr>
-          <p:cNvPr id="12" name="Rounded Rectangle 11"/>
-          <p:cNvSpPr/>
-          <p:nvPr/>
-        </p:nvSpPr>
-        <p:spPr>
-          <a:xfrm>
-            <a:off x="6368796" y="4543344"/>
-            <a:ext cx="5001768" cy="834550"/>
-          </a:xfrm>
-          <a:prstGeom prst="roundRect">
-            <a:avLst>
-              <a:gd name="adj" fmla="val 12000"/>
-            </a:avLst>
-          </a:prstGeom>
-          <a:solidFill>
-            <a:srgbClr val="1D2B44"/>
-          </a:solidFill>
-          <a:ln>
-            <a:solidFill>
-              <a:srgbClr val="405371"/>
-            </a:solidFill>
-          </a:ln>
-        </p:spPr>
-        <p:style>
-          <a:lnRef idx="1">
-            <a:schemeClr val="accent1"/>
-          </a:lnRef>
-          <a:fillRef idx="3">
-            <a:schemeClr val="accent1"/>
-          </a:fillRef>
-          <a:effectRef idx="2">
-            <a:schemeClr val="accent1"/>
-          </a:effectRef>
-          <a:fontRef idx="minor">
-            <a:schemeClr val="lt1"/>
-          </a:fontRef>
-        </p:style>
-        <p:txBody>
-          <a:bodyPr rtlCol="0" anchor="ctr"/>
-          <a:lstStyle/>
-          <a:p>
-            <a:pPr algn="ctr"/>
-            <a:endParaRPr/>
-          </a:p>
-        </p:txBody>
-      </p:sp>
-      <p:pic>
-        <p:nvPicPr>
-          <p:cNvPr id="13" name="Picture 12" descr="42-helm-list.png"/>
-          <p:cNvPicPr>
-            <a:picLocks noChangeAspect="1"/>
-          </p:cNvPicPr>
-          <p:nvPr/>
-        </p:nvPicPr>
-        <p:blipFill>
-          <a:blip r:embed="rId5"/>
-          <a:stretch>
-            <a:fillRect/>
-          </a:stretch>
-        </p:blipFill>
-        <p:spPr>
-          <a:xfrm>
-            <a:off x="6400800" y="4575348"/>
-            <a:ext cx="4937760" cy="770542"/>
-          </a:xfrm>
-          <a:prstGeom prst="rect">
-            <a:avLst/>
-          </a:prstGeom>
-        </p:spPr>
-      </p:pic>
-      <p:sp>
-        <p:nvSpPr>
-          <p:cNvPr id="14" name="TextBox 13"/>
-          <p:cNvSpPr txBox="1"/>
-          <p:nvPr/>
-        </p:nvSpPr>
-        <p:spPr>
-          <a:xfrm>
-            <a:off x="777240" y="5989320"/>
-            <a:ext cx="10698480" cy="274320"/>
-          </a:xfrm>
-          <a:prstGeom prst="rect">
-            <a:avLst/>
-          </a:prstGeom>
-          <a:noFill/>
-        </p:spPr>
-        <p:txBody>
-          <a:bodyPr wrap="square" lIns="36576" tIns="36576" rIns="36576" bIns="36576" anchor="t">
-            <a:spAutoFit/>
-          </a:bodyPr>
-          <a:lstStyle/>
-          <a:p>
-            <a:r>
-              <a:rPr sz="1100" b="0">
+      <p:sp>
+        <p:nvSpPr>
+          <p:cNvPr id="11" name="TextBox 10"/>
+          <p:cNvSpPr txBox="1"/>
+          <p:nvPr/>
+        </p:nvSpPr>
+        <p:spPr>
+          <a:xfrm>
+            <a:off x="914400" y="5285232"/>
+            <a:ext cx="10287000" cy="320040"/>
+          </a:xfrm>
+          <a:prstGeom prst="rect">
+            <a:avLst/>
+          </a:prstGeom>
+          <a:noFill/>
+        </p:spPr>
+        <p:txBody>
+          <a:bodyPr wrap="square" lIns="36576" tIns="36576" rIns="36576" bIns="36576" anchor="t">
+            <a:spAutoFit/>
+          </a:bodyPr>
+          <a:lstStyle/>
+          <a:p>
+            <a:r>
+              <a:rPr sz="1300" b="0">
+                <a:solidFill>
+                  <a:srgbClr val="F3F7FC"/>
+                </a:solidFill>
+                <a:latin typeface="Aptos"/>
+              </a:rPr>
+              <a:t>README reports 0 fixable HIGH/CRITICAL CVEs in the final backend and frontend scans. The CI gate uses Trivy with --ignore-unfixed.</a:t>
+            </a:r>
+          </a:p>
+        </p:txBody>
+      </p:sp>
+      <p:sp>
+        <p:nvSpPr>
+          <p:cNvPr id="12" name="TextBox 11"/>
+          <p:cNvSpPr txBox="1"/>
+          <p:nvPr/>
+        </p:nvSpPr>
+        <p:spPr>
+          <a:xfrm>
+            <a:off x="749808" y="6016752"/>
+            <a:ext cx="10698480" cy="228600"/>
+          </a:xfrm>
+          <a:prstGeom prst="rect">
+            <a:avLst/>
+          </a:prstGeom>
+          <a:noFill/>
+        </p:spPr>
+        <p:txBody>
+          <a:bodyPr wrap="square" lIns="36576" tIns="36576" rIns="36576" bIns="36576" anchor="t">
+            <a:spAutoFit/>
+          </a:bodyPr>
+          <a:lstStyle/>
+          <a:p>
+            <a:r>
+              <a:rPr sz="1000" b="0">
                 <a:solidFill>
                   <a:srgbClr val="ADBBCF"/>
                 </a:solidFill>
                 <a:latin typeface="Aptos"/>
               </a:rPr>
-              <a:t>Helm chart manages the application resources; Ingress routes browser traffic to the frontend and /api to FastAPI.</a:t>
+              <a:t>Images run as non-root users; backend runtime removes pip to reduce unnecessary packages.</a:t>
             </a:r>
           </a:p>
         </p:txBody>
@@ -6153,7 +6157,7 @@
                 </a:solidFill>
                 <a:latin typeface="Aptos"/>
               </a:rPr>
-              <a:t>12 / DESIGN DECISION</a:t>
+              <a:t>11 / ORCHESTRATION</a:t>
             </a:r>
           </a:p>
         </p:txBody>
@@ -6187,7 +6191,7 @@
                 </a:solidFill>
                 <a:latin typeface="Aptos"/>
               </a:rPr>
-              <a:t>Why Kubernetes instead of only Docker Compose?</a:t>
+              <a:t>Kubernetes deployment</a:t>
             </a:r>
           </a:p>
         </p:txBody>
@@ -6266,7 +6270,7 @@
                 </a:solidFill>
                 <a:latin typeface="Aptos"/>
               </a:rPr>
-              <a:t>14</a:t>
+              <a:t>13</a:t>
             </a:r>
           </a:p>
         </p:txBody>
@@ -6279,8 +6283,8 @@
         </p:nvSpPr>
         <p:spPr>
           <a:xfrm>
-            <a:off x="685800" y="1508760"/>
-            <a:ext cx="5212080" cy="4343400"/>
+            <a:off x="608075" y="1872796"/>
+            <a:ext cx="5413248" cy="1695087"/>
           </a:xfrm>
           <a:prstGeom prst="roundRect">
             <a:avLst>
@@ -6288,10 +6292,12 @@
             </a:avLst>
           </a:prstGeom>
           <a:solidFill>
-            <a:srgbClr val="172237"/>
+            <a:srgbClr val="1D2B44"/>
           </a:solidFill>
           <a:ln>
-            <a:noFill/>
+            <a:solidFill>
+              <a:srgbClr val="405371"/>
+            </a:solidFill>
           </a:ln>
         </p:spPr>
         <p:style>
@@ -6317,137 +6323,40 @@
           </a:p>
         </p:txBody>
       </p:sp>
-      <p:sp>
-        <p:nvSpPr>
-          <p:cNvPr id="7" name="TextBox 6"/>
-          <p:cNvSpPr txBox="1"/>
-          <p:nvPr/>
-        </p:nvSpPr>
-        <p:spPr>
-          <a:xfrm>
-            <a:off x="914400" y="1783080"/>
-            <a:ext cx="4572000" cy="320040"/>
-          </a:xfrm>
-          <a:prstGeom prst="rect">
-            <a:avLst/>
-          </a:prstGeom>
-          <a:noFill/>
-        </p:spPr>
-        <p:txBody>
-          <a:bodyPr wrap="square" lIns="36576" tIns="36576" rIns="36576" bIns="36576" anchor="t">
-            <a:spAutoFit/>
-          </a:bodyPr>
-          <a:lstStyle/>
-          <a:p>
-            <a:r>
-              <a:rPr sz="2000" b="1">
-                <a:solidFill>
-                  <a:srgbClr val="FFBE69"/>
-                </a:solidFill>
-                <a:latin typeface="Aptos"/>
-              </a:rPr>
-              <a:t>Docker Compose</a:t>
-            </a:r>
-          </a:p>
-        </p:txBody>
-      </p:sp>
-      <p:sp>
-        <p:nvSpPr>
-          <p:cNvPr id="8" name="TextBox 7"/>
-          <p:cNvSpPr txBox="1"/>
-          <p:nvPr/>
-        </p:nvSpPr>
-        <p:spPr>
-          <a:xfrm>
-            <a:off x="914400" y="2331720"/>
-            <a:ext cx="4526280" cy="2834640"/>
-          </a:xfrm>
-          <a:prstGeom prst="rect">
-            <a:avLst/>
-          </a:prstGeom>
-          <a:noFill/>
-        </p:spPr>
-        <p:txBody>
-          <a:bodyPr wrap="square" lIns="18288" tIns="18288" rIns="36576" bIns="18288">
-            <a:spAutoFit/>
-          </a:bodyPr>
-          <a:lstStyle/>
-          <a:p>
-            <a:pPr>
-              <a:spcAft>
-                <a:spcPts val="1100"/>
-              </a:spcAft>
-              <a:defRPr sz="1500">
-                <a:solidFill>
-                  <a:srgbClr val="F3F7FC"/>
-                </a:solidFill>
-                <a:latin typeface="Aptos"/>
-              </a:defRPr>
-            </a:pPr>
-            <a:r>
-              <a:t>•  Best for local development and demos.</a:t>
-            </a:r>
-          </a:p>
-          <a:p>
-            <a:pPr>
-              <a:spcAft>
-                <a:spcPts val="1100"/>
-              </a:spcAft>
-              <a:defRPr sz="1500">
-                <a:solidFill>
-                  <a:srgbClr val="F3F7FC"/>
-                </a:solidFill>
-                <a:latin typeface="Aptos"/>
-              </a:defRPr>
-            </a:pPr>
-            <a:r>
-              <a:t>•  Starts related containers with a simple config.</a:t>
-            </a:r>
-          </a:p>
-          <a:p>
-            <a:pPr>
-              <a:spcAft>
-                <a:spcPts val="1100"/>
-              </a:spcAft>
-              <a:defRPr sz="1500">
-                <a:solidFill>
-                  <a:srgbClr val="F3F7FC"/>
-                </a:solidFill>
-                <a:latin typeface="Aptos"/>
-              </a:defRPr>
-            </a:pPr>
-            <a:r>
-              <a:t>•  Does not provide the same orchestration model for scaling and self-healing across nodes.</a:t>
-            </a:r>
-          </a:p>
-          <a:p>
-            <a:pPr>
-              <a:spcAft>
-                <a:spcPts val="1100"/>
-              </a:spcAft>
-              <a:defRPr sz="1500">
-                <a:solidFill>
-                  <a:srgbClr val="F3F7FC"/>
-                </a:solidFill>
-                <a:latin typeface="Aptos"/>
-              </a:defRPr>
-            </a:pPr>
-            <a:r>
-              <a:t>•  Used here for the local developer experience.</a:t>
-            </a:r>
-          </a:p>
-        </p:txBody>
-      </p:sp>
-      <p:sp>
-        <p:nvSpPr>
-          <p:cNvPr id="9" name="Rounded Rectangle 8"/>
+      <p:pic>
+        <p:nvPicPr>
+          <p:cNvPr id="7" name="Picture 6" descr="40-kubectl-get-pods.png"/>
+          <p:cNvPicPr>
+            <a:picLocks noChangeAspect="1"/>
+          </p:cNvPicPr>
+          <p:nvPr/>
+        </p:nvPicPr>
+        <p:blipFill>
+          <a:blip r:embed="rId2"/>
+          <a:stretch>
+            <a:fillRect/>
+          </a:stretch>
+        </p:blipFill>
+        <p:spPr>
+          <a:xfrm>
+            <a:off x="640080" y="1904800"/>
+            <a:ext cx="5349240" cy="1631079"/>
+          </a:xfrm>
+          <a:prstGeom prst="rect">
+            <a:avLst/>
+          </a:prstGeom>
+        </p:spPr>
+      </p:pic>
+      <p:sp>
+        <p:nvSpPr>
+          <p:cNvPr id="8" name="Rounded Rectangle 7"/>
           <p:cNvSpPr/>
           <p:nvPr/>
         </p:nvSpPr>
         <p:spPr>
           <a:xfrm>
-            <a:off x="6263640" y="1508760"/>
-            <a:ext cx="5212080" cy="4343400"/>
+            <a:off x="6359264" y="1476756"/>
+            <a:ext cx="5020830" cy="2487168"/>
           </a:xfrm>
           <a:prstGeom prst="roundRect">
             <a:avLst>
@@ -6455,10 +6364,12 @@
             </a:avLst>
           </a:prstGeom>
           <a:solidFill>
-            <a:srgbClr val="172237"/>
+            <a:srgbClr val="1D2B44"/>
           </a:solidFill>
           <a:ln>
-            <a:noFill/>
+            <a:solidFill>
+              <a:srgbClr val="405371"/>
+            </a:solidFill>
           </a:ln>
         </p:spPr>
         <p:style>
@@ -6484,157 +6395,204 @@
           </a:p>
         </p:txBody>
       </p:sp>
-      <p:sp>
-        <p:nvSpPr>
-          <p:cNvPr id="10" name="TextBox 9"/>
-          <p:cNvSpPr txBox="1"/>
-          <p:nvPr/>
-        </p:nvSpPr>
-        <p:spPr>
-          <a:xfrm>
-            <a:off x="6492240" y="1783080"/>
-            <a:ext cx="4572000" cy="320040"/>
-          </a:xfrm>
-          <a:prstGeom prst="rect">
-            <a:avLst/>
-          </a:prstGeom>
-          <a:noFill/>
-        </p:spPr>
-        <p:txBody>
-          <a:bodyPr wrap="square" lIns="36576" tIns="36576" rIns="36576" bIns="36576" anchor="t">
-            <a:spAutoFit/>
-          </a:bodyPr>
-          <a:lstStyle/>
-          <a:p>
-            <a:r>
-              <a:rPr sz="2000" b="1">
-                <a:solidFill>
-                  <a:srgbClr val="70E0AA"/>
-                </a:solidFill>
-                <a:latin typeface="Aptos"/>
-              </a:rPr>
-              <a:t>Kubernetes + Helm</a:t>
-            </a:r>
-          </a:p>
-        </p:txBody>
-      </p:sp>
-      <p:sp>
-        <p:nvSpPr>
-          <p:cNvPr id="11" name="TextBox 10"/>
-          <p:cNvSpPr txBox="1"/>
-          <p:nvPr/>
-        </p:nvSpPr>
-        <p:spPr>
-          <a:xfrm>
-            <a:off x="6492240" y="2331720"/>
-            <a:ext cx="4526280" cy="2834640"/>
-          </a:xfrm>
-          <a:prstGeom prst="rect">
-            <a:avLst/>
-          </a:prstGeom>
-          <a:noFill/>
-        </p:spPr>
-        <p:txBody>
-          <a:bodyPr wrap="square" lIns="18288" tIns="18288" rIns="36576" bIns="18288">
-            <a:spAutoFit/>
-          </a:bodyPr>
-          <a:lstStyle/>
-          <a:p>
-            <a:pPr>
-              <a:spcAft>
-                <a:spcPts val="1100"/>
-              </a:spcAft>
-              <a:defRPr sz="1500">
-                <a:solidFill>
-                  <a:srgbClr val="F3F7FC"/>
-                </a:solidFill>
-                <a:latin typeface="Aptos"/>
-              </a:defRPr>
-            </a:pPr>
-            <a:r>
-              <a:t>•  Declarative deployments and replica management.</a:t>
-            </a:r>
-          </a:p>
-          <a:p>
-            <a:pPr>
-              <a:spcAft>
-                <a:spcPts val="1100"/>
-              </a:spcAft>
-              <a:defRPr sz="1500">
-                <a:solidFill>
-                  <a:srgbClr val="F3F7FC"/>
-                </a:solidFill>
-                <a:latin typeface="Aptos"/>
-              </a:defRPr>
-            </a:pPr>
-            <a:r>
-              <a:t>•  Services and Ingress provide stable routing.</a:t>
-            </a:r>
-          </a:p>
-          <a:p>
-            <a:pPr>
-              <a:spcAft>
-                <a:spcPts val="1100"/>
-              </a:spcAft>
-              <a:defRPr sz="1500">
-                <a:solidFill>
-                  <a:srgbClr val="F3F7FC"/>
-                </a:solidFill>
-                <a:latin typeface="Aptos"/>
-              </a:defRPr>
-            </a:pPr>
-            <a:r>
-              <a:t>•  Supports resource-driven scaling and rollout controls.</a:t>
-            </a:r>
-          </a:p>
-          <a:p>
-            <a:pPr>
-              <a:spcAft>
-                <a:spcPts val="1100"/>
-              </a:spcAft>
-              <a:defRPr sz="1500">
-                <a:solidFill>
-                  <a:srgbClr val="F3F7FC"/>
-                </a:solidFill>
-                <a:latin typeface="Aptos"/>
-              </a:defRPr>
-            </a:pPr>
-            <a:r>
-              <a:t>•  Helm packages resources and values for repeatable environments.</a:t>
-            </a:r>
-          </a:p>
-        </p:txBody>
-      </p:sp>
-      <p:sp>
-        <p:nvSpPr>
-          <p:cNvPr id="12" name="TextBox 11"/>
-          <p:cNvSpPr txBox="1"/>
-          <p:nvPr/>
-        </p:nvSpPr>
-        <p:spPr>
-          <a:xfrm>
-            <a:off x="822960" y="6062472"/>
-            <a:ext cx="10607040" cy="274320"/>
-          </a:xfrm>
-          <a:prstGeom prst="rect">
-            <a:avLst/>
-          </a:prstGeom>
-          <a:noFill/>
-        </p:spPr>
-        <p:txBody>
-          <a:bodyPr wrap="square" lIns="36576" tIns="36576" rIns="36576" bIns="36576" anchor="t">
-            <a:spAutoFit/>
-          </a:bodyPr>
-          <a:lstStyle/>
-          <a:p>
-            <a:r>
-              <a:rPr sz="1200" b="1">
-                <a:solidFill>
-                  <a:srgbClr val="45D3E6"/>
-                </a:solidFill>
-                <a:latin typeface="Aptos"/>
-              </a:rPr>
-              <a:t>Decision: use Compose to run locally; use Kubernetes to demonstrate production-style orchestration.</a:t>
+      <p:pic>
+        <p:nvPicPr>
+          <p:cNvPr id="9" name="Picture 8" descr="41-kubectl-get-svc-ingress.png"/>
+          <p:cNvPicPr>
+            <a:picLocks noChangeAspect="1"/>
+          </p:cNvPicPr>
+          <p:nvPr/>
+        </p:nvPicPr>
+        <p:blipFill>
+          <a:blip r:embed="rId3"/>
+          <a:stretch>
+            <a:fillRect/>
+          </a:stretch>
+        </p:blipFill>
+        <p:spPr>
+          <a:xfrm>
+            <a:off x="6391268" y="1508760"/>
+            <a:ext cx="4956822" cy="2423160"/>
+          </a:xfrm>
+          <a:prstGeom prst="rect">
+            <a:avLst/>
+          </a:prstGeom>
+        </p:spPr>
+      </p:pic>
+      <p:sp>
+        <p:nvSpPr>
+          <p:cNvPr id="10" name="Rounded Rectangle 9"/>
+          <p:cNvSpPr/>
+          <p:nvPr/>
+        </p:nvSpPr>
+        <p:spPr>
+          <a:xfrm>
+            <a:off x="2400299" y="4219956"/>
+            <a:ext cx="2331720" cy="1481328"/>
+          </a:xfrm>
+          <a:prstGeom prst="roundRect">
+            <a:avLst>
+              <a:gd name="adj" fmla="val 12000"/>
+            </a:avLst>
+          </a:prstGeom>
+          <a:solidFill>
+            <a:srgbClr val="1D2B44"/>
+          </a:solidFill>
+          <a:ln>
+            <a:solidFill>
+              <a:srgbClr val="405371"/>
+            </a:solidFill>
+          </a:ln>
+        </p:spPr>
+        <p:style>
+          <a:lnRef idx="1">
+            <a:schemeClr val="accent1"/>
+          </a:lnRef>
+          <a:fillRef idx="3">
+            <a:schemeClr val="accent1"/>
+          </a:fillRef>
+          <a:effectRef idx="2">
+            <a:schemeClr val="accent1"/>
+          </a:effectRef>
+          <a:fontRef idx="minor">
+            <a:schemeClr val="lt1"/>
+          </a:fontRef>
+        </p:style>
+        <p:txBody>
+          <a:bodyPr rtlCol="0" anchor="ctr"/>
+          <a:lstStyle/>
+          <a:p>
+            <a:pPr algn="ctr"/>
+            <a:endParaRPr/>
+          </a:p>
+        </p:txBody>
+      </p:sp>
+      <p:pic>
+        <p:nvPicPr>
+          <p:cNvPr id="11" name="Picture 10" descr="43-ingress-browser.png"/>
+          <p:cNvPicPr>
+            <a:picLocks noChangeAspect="1"/>
+          </p:cNvPicPr>
+          <p:nvPr/>
+        </p:nvPicPr>
+        <p:blipFill>
+          <a:blip r:embed="rId4"/>
+          <a:stretch>
+            <a:fillRect/>
+          </a:stretch>
+        </p:blipFill>
+        <p:spPr>
+          <a:xfrm>
+            <a:off x="2432303" y="4251960"/>
+            <a:ext cx="2267712" cy="1417320"/>
+          </a:xfrm>
+          <a:prstGeom prst="rect">
+            <a:avLst/>
+          </a:prstGeom>
+        </p:spPr>
+      </p:pic>
+      <p:sp>
+        <p:nvSpPr>
+          <p:cNvPr id="12" name="Rounded Rectangle 11"/>
+          <p:cNvSpPr/>
+          <p:nvPr/>
+        </p:nvSpPr>
+        <p:spPr>
+          <a:xfrm>
+            <a:off x="6368796" y="4543344"/>
+            <a:ext cx="5001768" cy="834550"/>
+          </a:xfrm>
+          <a:prstGeom prst="roundRect">
+            <a:avLst>
+              <a:gd name="adj" fmla="val 12000"/>
+            </a:avLst>
+          </a:prstGeom>
+          <a:solidFill>
+            <a:srgbClr val="1D2B44"/>
+          </a:solidFill>
+          <a:ln>
+            <a:solidFill>
+              <a:srgbClr val="405371"/>
+            </a:solidFill>
+          </a:ln>
+        </p:spPr>
+        <p:style>
+          <a:lnRef idx="1">
+            <a:schemeClr val="accent1"/>
+          </a:lnRef>
+          <a:fillRef idx="3">
+            <a:schemeClr val="accent1"/>
+          </a:fillRef>
+          <a:effectRef idx="2">
+            <a:schemeClr val="accent1"/>
+          </a:effectRef>
+          <a:fontRef idx="minor">
+            <a:schemeClr val="lt1"/>
+          </a:fontRef>
+        </p:style>
+        <p:txBody>
+          <a:bodyPr rtlCol="0" anchor="ctr"/>
+          <a:lstStyle/>
+          <a:p>
+            <a:pPr algn="ctr"/>
+            <a:endParaRPr/>
+          </a:p>
+        </p:txBody>
+      </p:sp>
+      <p:pic>
+        <p:nvPicPr>
+          <p:cNvPr id="13" name="Picture 12" descr="42-helm-list.png"/>
+          <p:cNvPicPr>
+            <a:picLocks noChangeAspect="1"/>
+          </p:cNvPicPr>
+          <p:nvPr/>
+        </p:nvPicPr>
+        <p:blipFill>
+          <a:blip r:embed="rId5"/>
+          <a:stretch>
+            <a:fillRect/>
+          </a:stretch>
+        </p:blipFill>
+        <p:spPr>
+          <a:xfrm>
+            <a:off x="6400800" y="4575348"/>
+            <a:ext cx="4937760" cy="770542"/>
+          </a:xfrm>
+          <a:prstGeom prst="rect">
+            <a:avLst/>
+          </a:prstGeom>
+        </p:spPr>
+      </p:pic>
+      <p:sp>
+        <p:nvSpPr>
+          <p:cNvPr id="14" name="TextBox 13"/>
+          <p:cNvSpPr txBox="1"/>
+          <p:nvPr/>
+        </p:nvSpPr>
+        <p:spPr>
+          <a:xfrm>
+            <a:off x="777240" y="5989320"/>
+            <a:ext cx="10698480" cy="274320"/>
+          </a:xfrm>
+          <a:prstGeom prst="rect">
+            <a:avLst/>
+          </a:prstGeom>
+          <a:noFill/>
+        </p:spPr>
+        <p:txBody>
+          <a:bodyPr wrap="square" lIns="36576" tIns="36576" rIns="36576" bIns="36576" anchor="t">
+            <a:spAutoFit/>
+          </a:bodyPr>
+          <a:lstStyle/>
+          <a:p>
+            <a:r>
+              <a:rPr sz="1100" b="0">
+                <a:solidFill>
+                  <a:srgbClr val="ADBBCF"/>
+                </a:solidFill>
+                <a:latin typeface="Aptos"/>
+              </a:rPr>
+              <a:t>Helm chart manages the application resources; Ingress routes browser traffic to the frontend and /api to FastAPI.</a:t>
             </a:r>
           </a:p>
         </p:txBody>
@@ -6701,7 +6659,7 @@
                 </a:solidFill>
                 <a:latin typeface="Aptos"/>
               </a:rPr>
-              <a:t>13 / OPERATE AND RECONCILE</a:t>
+              <a:t>12 / DESIGN DECISION</a:t>
             </a:r>
           </a:p>
         </p:txBody>
@@ -6735,7 +6693,7 @@
                 </a:solidFill>
                 <a:latin typeface="Aptos"/>
               </a:rPr>
-              <a:t>Monitoring and GitOps</a:t>
+              <a:t>Why Kubernetes instead of only Docker Compose?</a:t>
             </a:r>
           </a:p>
         </p:txBody>
@@ -6814,7 +6772,7 @@
                 </a:solidFill>
                 <a:latin typeface="Aptos"/>
               </a:rPr>
-              <a:t>15</a:t>
+              <a:t>14</a:t>
             </a:r>
           </a:p>
         </p:txBody>
@@ -6827,428 +6785,8 @@
         </p:nvSpPr>
         <p:spPr>
           <a:xfrm>
-            <a:off x="608075" y="1759521"/>
-            <a:ext cx="3584448" cy="1775333"/>
-          </a:xfrm>
-          <a:prstGeom prst="roundRect">
-            <a:avLst>
-              <a:gd name="adj" fmla="val 12000"/>
-            </a:avLst>
-          </a:prstGeom>
-          <a:solidFill>
-            <a:srgbClr val="1D2B44"/>
-          </a:solidFill>
-          <a:ln>
-            <a:solidFill>
-              <a:srgbClr val="405371"/>
-            </a:solidFill>
-          </a:ln>
-        </p:spPr>
-        <p:style>
-          <a:lnRef idx="1">
-            <a:schemeClr val="accent1"/>
-          </a:lnRef>
-          <a:fillRef idx="3">
-            <a:schemeClr val="accent1"/>
-          </a:fillRef>
-          <a:effectRef idx="2">
-            <a:schemeClr val="accent1"/>
-          </a:effectRef>
-          <a:fontRef idx="minor">
-            <a:schemeClr val="lt1"/>
-          </a:fontRef>
-        </p:style>
-        <p:txBody>
-          <a:bodyPr rtlCol="0" anchor="ctr"/>
-          <a:lstStyle/>
-          <a:p>
-            <a:pPr algn="ctr"/>
-            <a:endParaRPr/>
-          </a:p>
-        </p:txBody>
-      </p:sp>
-      <p:pic>
-        <p:nvPicPr>
-          <p:cNvPr id="7" name="Picture 6" descr="45-prometheus-targets.png"/>
-          <p:cNvPicPr>
-            <a:picLocks noChangeAspect="1"/>
-          </p:cNvPicPr>
-          <p:nvPr/>
-        </p:nvPicPr>
-        <p:blipFill>
-          <a:blip r:embed="rId2"/>
-          <a:stretch>
-            <a:fillRect/>
-          </a:stretch>
-        </p:blipFill>
-        <p:spPr>
-          <a:xfrm>
-            <a:off x="640080" y="1791525"/>
-            <a:ext cx="3520440" cy="1711325"/>
-          </a:xfrm>
-          <a:prstGeom prst="rect">
-            <a:avLst/>
-          </a:prstGeom>
-        </p:spPr>
-      </p:pic>
-      <p:sp>
-        <p:nvSpPr>
-          <p:cNvPr id="8" name="Rounded Rectangle 7"/>
-          <p:cNvSpPr/>
-          <p:nvPr/>
-        </p:nvSpPr>
-        <p:spPr>
-          <a:xfrm>
-            <a:off x="4366260" y="1449324"/>
-            <a:ext cx="3794760" cy="2395727"/>
-          </a:xfrm>
-          <a:prstGeom prst="roundRect">
-            <a:avLst>
-              <a:gd name="adj" fmla="val 12000"/>
-            </a:avLst>
-          </a:prstGeom>
-          <a:solidFill>
-            <a:srgbClr val="1D2B44"/>
-          </a:solidFill>
-          <a:ln>
-            <a:solidFill>
-              <a:srgbClr val="405371"/>
-            </a:solidFill>
-          </a:ln>
-        </p:spPr>
-        <p:style>
-          <a:lnRef idx="1">
-            <a:schemeClr val="accent1"/>
-          </a:lnRef>
-          <a:fillRef idx="3">
-            <a:schemeClr val="accent1"/>
-          </a:fillRef>
-          <a:effectRef idx="2">
-            <a:schemeClr val="accent1"/>
-          </a:effectRef>
-          <a:fontRef idx="minor">
-            <a:schemeClr val="lt1"/>
-          </a:fontRef>
-        </p:style>
-        <p:txBody>
-          <a:bodyPr rtlCol="0" anchor="ctr"/>
-          <a:lstStyle/>
-          <a:p>
-            <a:pPr algn="ctr"/>
-            <a:endParaRPr/>
-          </a:p>
-        </p:txBody>
-      </p:sp>
-      <p:pic>
-        <p:nvPicPr>
-          <p:cNvPr id="9" name="Picture 8" descr="46-grafana-dashboard.png"/>
-          <p:cNvPicPr>
-            <a:picLocks noChangeAspect="1"/>
-          </p:cNvPicPr>
-          <p:nvPr/>
-        </p:nvPicPr>
-        <p:blipFill>
-          <a:blip r:embed="rId3"/>
-          <a:stretch>
-            <a:fillRect/>
-          </a:stretch>
-        </p:blipFill>
-        <p:spPr>
-          <a:xfrm>
-            <a:off x="4398264" y="1481328"/>
-            <a:ext cx="3730752" cy="2331720"/>
-          </a:xfrm>
-          <a:prstGeom prst="rect">
-            <a:avLst/>
-          </a:prstGeom>
-        </p:spPr>
-      </p:pic>
-      <p:sp>
-        <p:nvSpPr>
-          <p:cNvPr id="10" name="Rounded Rectangle 9"/>
-          <p:cNvSpPr/>
-          <p:nvPr/>
-        </p:nvSpPr>
-        <p:spPr>
-          <a:xfrm>
-            <a:off x="8334756" y="1872753"/>
-            <a:ext cx="3218688" cy="1548869"/>
-          </a:xfrm>
-          <a:prstGeom prst="roundRect">
-            <a:avLst>
-              <a:gd name="adj" fmla="val 12000"/>
-            </a:avLst>
-          </a:prstGeom>
-          <a:solidFill>
-            <a:srgbClr val="1D2B44"/>
-          </a:solidFill>
-          <a:ln>
-            <a:solidFill>
-              <a:srgbClr val="405371"/>
-            </a:solidFill>
-          </a:ln>
-        </p:spPr>
-        <p:style>
-          <a:lnRef idx="1">
-            <a:schemeClr val="accent1"/>
-          </a:lnRef>
-          <a:fillRef idx="3">
-            <a:schemeClr val="accent1"/>
-          </a:fillRef>
-          <a:effectRef idx="2">
-            <a:schemeClr val="accent1"/>
-          </a:effectRef>
-          <a:fontRef idx="minor">
-            <a:schemeClr val="lt1"/>
-          </a:fontRef>
-        </p:style>
-        <p:txBody>
-          <a:bodyPr rtlCol="0" anchor="ctr"/>
-          <a:lstStyle/>
-          <a:p>
-            <a:pPr algn="ctr"/>
-            <a:endParaRPr/>
-          </a:p>
-        </p:txBody>
-      </p:sp>
-      <p:pic>
-        <p:nvPicPr>
-          <p:cNvPr id="11" name="Picture 10" descr="47-argocd-app-synced.png"/>
-          <p:cNvPicPr>
-            <a:picLocks noChangeAspect="1"/>
-          </p:cNvPicPr>
-          <p:nvPr/>
-        </p:nvPicPr>
-        <p:blipFill>
-          <a:blip r:embed="rId4"/>
-          <a:stretch>
-            <a:fillRect/>
-          </a:stretch>
-        </p:blipFill>
-        <p:spPr>
-          <a:xfrm>
-            <a:off x="8366760" y="1904757"/>
-            <a:ext cx="3154680" cy="1484861"/>
-          </a:xfrm>
-          <a:prstGeom prst="rect">
-            <a:avLst/>
-          </a:prstGeom>
-        </p:spPr>
-      </p:pic>
-      <p:sp>
-        <p:nvSpPr>
-          <p:cNvPr id="12" name="TextBox 11"/>
-          <p:cNvSpPr txBox="1"/>
-          <p:nvPr/>
-        </p:nvSpPr>
-        <p:spPr>
-          <a:xfrm>
-            <a:off x="685800" y="4069080"/>
-            <a:ext cx="3200400" cy="274320"/>
-          </a:xfrm>
-          <a:prstGeom prst="rect">
-            <a:avLst/>
-          </a:prstGeom>
-          <a:noFill/>
-        </p:spPr>
-        <p:txBody>
-          <a:bodyPr wrap="square" lIns="36576" tIns="36576" rIns="36576" bIns="36576" anchor="t">
-            <a:spAutoFit/>
-          </a:bodyPr>
-          <a:lstStyle/>
-          <a:p>
-            <a:r>
-              <a:rPr sz="1500" b="1">
-                <a:solidFill>
-                  <a:srgbClr val="45D3E6"/>
-                </a:solidFill>
-                <a:latin typeface="Aptos"/>
-              </a:rPr>
-              <a:t>Prometheus</a:t>
-            </a:r>
-          </a:p>
-        </p:txBody>
-      </p:sp>
-      <p:sp>
-        <p:nvSpPr>
-          <p:cNvPr id="13" name="TextBox 12"/>
-          <p:cNvSpPr txBox="1"/>
-          <p:nvPr/>
-        </p:nvSpPr>
-        <p:spPr>
-          <a:xfrm>
-            <a:off x="685800" y="4434840"/>
-            <a:ext cx="3108960" cy="822960"/>
-          </a:xfrm>
-          <a:prstGeom prst="rect">
-            <a:avLst/>
-          </a:prstGeom>
-          <a:noFill/>
-        </p:spPr>
-        <p:txBody>
-          <a:bodyPr wrap="square" lIns="36576" tIns="36576" rIns="36576" bIns="36576" anchor="t">
-            <a:spAutoFit/>
-          </a:bodyPr>
-          <a:lstStyle/>
-          <a:p>
-            <a:r>
-              <a:rPr sz="1200" b="0">
-                <a:solidFill>
-                  <a:srgbClr val="F3F7FC"/>
-                </a:solidFill>
-                <a:latin typeface="Aptos"/>
-              </a:rPr>
-              <a:t>Scrapes backend metrics at /metrics.</a:t>
-            </a:r>
-          </a:p>
-        </p:txBody>
-      </p:sp>
-      <p:sp>
-        <p:nvSpPr>
-          <p:cNvPr id="14" name="TextBox 13"/>
-          <p:cNvSpPr txBox="1"/>
-          <p:nvPr/>
-        </p:nvSpPr>
-        <p:spPr>
-          <a:xfrm>
-            <a:off x="4343400" y="4069080"/>
-            <a:ext cx="3200400" cy="274320"/>
-          </a:xfrm>
-          <a:prstGeom prst="rect">
-            <a:avLst/>
-          </a:prstGeom>
-          <a:noFill/>
-        </p:spPr>
-        <p:txBody>
-          <a:bodyPr wrap="square" lIns="36576" tIns="36576" rIns="36576" bIns="36576" anchor="t">
-            <a:spAutoFit/>
-          </a:bodyPr>
-          <a:lstStyle/>
-          <a:p>
-            <a:r>
-              <a:rPr sz="1500" b="1">
-                <a:solidFill>
-                  <a:srgbClr val="45D3E6"/>
-                </a:solidFill>
-                <a:latin typeface="Aptos"/>
-              </a:rPr>
-              <a:t>Grafana</a:t>
-            </a:r>
-          </a:p>
-        </p:txBody>
-      </p:sp>
-      <p:sp>
-        <p:nvSpPr>
-          <p:cNvPr id="15" name="TextBox 14"/>
-          <p:cNvSpPr txBox="1"/>
-          <p:nvPr/>
-        </p:nvSpPr>
-        <p:spPr>
-          <a:xfrm>
-            <a:off x="4343400" y="4434840"/>
-            <a:ext cx="3108960" cy="822960"/>
-          </a:xfrm>
-          <a:prstGeom prst="rect">
-            <a:avLst/>
-          </a:prstGeom>
-          <a:noFill/>
-        </p:spPr>
-        <p:txBody>
-          <a:bodyPr wrap="square" lIns="36576" tIns="36576" rIns="36576" bIns="36576" anchor="t">
-            <a:spAutoFit/>
-          </a:bodyPr>
-          <a:lstStyle/>
-          <a:p>
-            <a:r>
-              <a:rPr sz="1200" b="0">
-                <a:solidFill>
-                  <a:srgbClr val="F3F7FC"/>
-                </a:solidFill>
-                <a:latin typeface="Aptos"/>
-              </a:rPr>
-              <a:t>Visualizes request rate, latency and error signals.</a:t>
-            </a:r>
-          </a:p>
-        </p:txBody>
-      </p:sp>
-      <p:sp>
-        <p:nvSpPr>
-          <p:cNvPr id="16" name="TextBox 15"/>
-          <p:cNvSpPr txBox="1"/>
-          <p:nvPr/>
-        </p:nvSpPr>
-        <p:spPr>
-          <a:xfrm>
-            <a:off x="8366760" y="4069080"/>
-            <a:ext cx="3200400" cy="274320"/>
-          </a:xfrm>
-          <a:prstGeom prst="rect">
-            <a:avLst/>
-          </a:prstGeom>
-          <a:noFill/>
-        </p:spPr>
-        <p:txBody>
-          <a:bodyPr wrap="square" lIns="36576" tIns="36576" rIns="36576" bIns="36576" anchor="t">
-            <a:spAutoFit/>
-          </a:bodyPr>
-          <a:lstStyle/>
-          <a:p>
-            <a:r>
-              <a:rPr sz="1500" b="1">
-                <a:solidFill>
-                  <a:srgbClr val="45D3E6"/>
-                </a:solidFill>
-                <a:latin typeface="Aptos"/>
-              </a:rPr>
-              <a:t>Argo CD</a:t>
-            </a:r>
-          </a:p>
-        </p:txBody>
-      </p:sp>
-      <p:sp>
-        <p:nvSpPr>
-          <p:cNvPr id="17" name="TextBox 16"/>
-          <p:cNvSpPr txBox="1"/>
-          <p:nvPr/>
-        </p:nvSpPr>
-        <p:spPr>
-          <a:xfrm>
-            <a:off x="8366760" y="4434840"/>
-            <a:ext cx="3108960" cy="822960"/>
-          </a:xfrm>
-          <a:prstGeom prst="rect">
-            <a:avLst/>
-          </a:prstGeom>
-          <a:noFill/>
-        </p:spPr>
-        <p:txBody>
-          <a:bodyPr wrap="square" lIns="36576" tIns="36576" rIns="36576" bIns="36576" anchor="t">
-            <a:spAutoFit/>
-          </a:bodyPr>
-          <a:lstStyle/>
-          <a:p>
-            <a:r>
-              <a:rPr sz="1200" b="0">
-                <a:solidFill>
-                  <a:srgbClr val="F3F7FC"/>
-                </a:solidFill>
-                <a:latin typeface="Aptos"/>
-              </a:rPr>
-              <a:t>Watches Helm config and syncs desired state.</a:t>
-            </a:r>
-          </a:p>
-        </p:txBody>
-      </p:sp>
-      <p:sp>
-        <p:nvSpPr>
-          <p:cNvPr id="18" name="Rounded Rectangle 17"/>
-          <p:cNvSpPr/>
-          <p:nvPr/>
-        </p:nvSpPr>
-        <p:spPr>
-          <a:xfrm>
-            <a:off x="713232" y="5440680"/>
-            <a:ext cx="10698480" cy="502920"/>
+            <a:off x="685800" y="1508760"/>
+            <a:ext cx="5212080" cy="4343400"/>
           </a:xfrm>
           <a:prstGeom prst="roundRect">
             <a:avLst>
@@ -7287,34 +6825,296 @@
       </p:sp>
       <p:sp>
         <p:nvSpPr>
-          <p:cNvPr id="19" name="TextBox 18"/>
-          <p:cNvSpPr txBox="1"/>
-          <p:nvPr/>
-        </p:nvSpPr>
-        <p:spPr>
-          <a:xfrm>
-            <a:off x="914400" y="5559552"/>
-            <a:ext cx="10241280" cy="228600"/>
-          </a:xfrm>
-          <a:prstGeom prst="rect">
-            <a:avLst/>
-          </a:prstGeom>
-          <a:noFill/>
-        </p:spPr>
-        <p:txBody>
-          <a:bodyPr wrap="square" lIns="36576" tIns="36576" rIns="36576" bIns="36576" anchor="t">
-            <a:spAutoFit/>
-          </a:bodyPr>
-          <a:lstStyle/>
-          <a:p>
-            <a:r>
-              <a:rPr sz="1100" b="0">
-                <a:solidFill>
-                  <a:srgbClr val="ADBBCF"/>
-                </a:solidFill>
-                <a:latin typeface="Aptos"/>
-              </a:rPr>
-              <a:t>Monitoring and GitOps are separate concerns: one shows system health; the other reconciles deployment configuration.</a:t>
+          <p:cNvPr id="7" name="TextBox 6"/>
+          <p:cNvSpPr txBox="1"/>
+          <p:nvPr/>
+        </p:nvSpPr>
+        <p:spPr>
+          <a:xfrm>
+            <a:off x="914400" y="1783080"/>
+            <a:ext cx="4572000" cy="320040"/>
+          </a:xfrm>
+          <a:prstGeom prst="rect">
+            <a:avLst/>
+          </a:prstGeom>
+          <a:noFill/>
+        </p:spPr>
+        <p:txBody>
+          <a:bodyPr wrap="square" lIns="36576" tIns="36576" rIns="36576" bIns="36576" anchor="t">
+            <a:spAutoFit/>
+          </a:bodyPr>
+          <a:lstStyle/>
+          <a:p>
+            <a:r>
+              <a:rPr sz="2000" b="1">
+                <a:solidFill>
+                  <a:srgbClr val="FFBE69"/>
+                </a:solidFill>
+                <a:latin typeface="Aptos"/>
+              </a:rPr>
+              <a:t>Docker Compose</a:t>
+            </a:r>
+          </a:p>
+        </p:txBody>
+      </p:sp>
+      <p:sp>
+        <p:nvSpPr>
+          <p:cNvPr id="8" name="TextBox 7"/>
+          <p:cNvSpPr txBox="1"/>
+          <p:nvPr/>
+        </p:nvSpPr>
+        <p:spPr>
+          <a:xfrm>
+            <a:off x="914400" y="2331720"/>
+            <a:ext cx="4526280" cy="2834640"/>
+          </a:xfrm>
+          <a:prstGeom prst="rect">
+            <a:avLst/>
+          </a:prstGeom>
+          <a:noFill/>
+        </p:spPr>
+        <p:txBody>
+          <a:bodyPr wrap="square" lIns="18288" tIns="18288" rIns="36576" bIns="18288">
+            <a:spAutoFit/>
+          </a:bodyPr>
+          <a:lstStyle/>
+          <a:p>
+            <a:pPr>
+              <a:spcAft>
+                <a:spcPts val="1400"/>
+              </a:spcAft>
+              <a:defRPr sz="1500">
+                <a:solidFill>
+                  <a:srgbClr val="F3F7FC"/>
+                </a:solidFill>
+                <a:latin typeface="Aptos"/>
+              </a:defRPr>
+            </a:pPr>
+            <a:r>
+              <a:rPr sz="2000"/>
+              <a:t>•  Great for local development</a:t>
+            </a:r>
+          </a:p>
+          <a:p>
+            <a:pPr>
+              <a:spcAft>
+                <a:spcPts val="1400"/>
+              </a:spcAft>
+              <a:defRPr sz="1500">
+                <a:solidFill>
+                  <a:srgbClr val="F3F7FC"/>
+                </a:solidFill>
+                <a:latin typeface="Aptos"/>
+              </a:defRPr>
+            </a:pPr>
+            <a:r>
+              <a:rPr sz="2000"/>
+              <a:t>•  One command starts all three containers</a:t>
+            </a:r>
+          </a:p>
+          <a:p>
+            <a:pPr>
+              <a:spcAft>
+                <a:spcPts val="1400"/>
+              </a:spcAft>
+              <a:defRPr sz="1500">
+                <a:solidFill>
+                  <a:srgbClr val="F3F7FC"/>
+                </a:solidFill>
+                <a:latin typeface="Aptos"/>
+              </a:defRPr>
+            </a:pPr>
+            <a:r>
+              <a:rPr sz="2000"/>
+              <a:t>•  No self-healing or scaling across nodes</a:t>
+            </a:r>
+          </a:p>
+        </p:txBody>
+      </p:sp>
+      <p:sp>
+        <p:nvSpPr>
+          <p:cNvPr id="9" name="Rounded Rectangle 8"/>
+          <p:cNvSpPr/>
+          <p:nvPr/>
+        </p:nvSpPr>
+        <p:spPr>
+          <a:xfrm>
+            <a:off x="6263640" y="1508760"/>
+            <a:ext cx="5212080" cy="4343400"/>
+          </a:xfrm>
+          <a:prstGeom prst="roundRect">
+            <a:avLst>
+              <a:gd name="adj" fmla="val 12000"/>
+            </a:avLst>
+          </a:prstGeom>
+          <a:solidFill>
+            <a:srgbClr val="172237"/>
+          </a:solidFill>
+          <a:ln>
+            <a:noFill/>
+          </a:ln>
+        </p:spPr>
+        <p:style>
+          <a:lnRef idx="1">
+            <a:schemeClr val="accent1"/>
+          </a:lnRef>
+          <a:fillRef idx="3">
+            <a:schemeClr val="accent1"/>
+          </a:fillRef>
+          <a:effectRef idx="2">
+            <a:schemeClr val="accent1"/>
+          </a:effectRef>
+          <a:fontRef idx="minor">
+            <a:schemeClr val="lt1"/>
+          </a:fontRef>
+        </p:style>
+        <p:txBody>
+          <a:bodyPr rtlCol="0" anchor="ctr"/>
+          <a:lstStyle/>
+          <a:p>
+            <a:pPr algn="ctr"/>
+            <a:endParaRPr/>
+          </a:p>
+        </p:txBody>
+      </p:sp>
+      <p:sp>
+        <p:nvSpPr>
+          <p:cNvPr id="10" name="TextBox 9"/>
+          <p:cNvSpPr txBox="1"/>
+          <p:nvPr/>
+        </p:nvSpPr>
+        <p:spPr>
+          <a:xfrm>
+            <a:off x="6492240" y="1783080"/>
+            <a:ext cx="4572000" cy="320040"/>
+          </a:xfrm>
+          <a:prstGeom prst="rect">
+            <a:avLst/>
+          </a:prstGeom>
+          <a:noFill/>
+        </p:spPr>
+        <p:txBody>
+          <a:bodyPr wrap="square" lIns="36576" tIns="36576" rIns="36576" bIns="36576" anchor="t">
+            <a:spAutoFit/>
+          </a:bodyPr>
+          <a:lstStyle/>
+          <a:p>
+            <a:r>
+              <a:rPr sz="2000" b="1">
+                <a:solidFill>
+                  <a:srgbClr val="70E0AA"/>
+                </a:solidFill>
+                <a:latin typeface="Aptos"/>
+              </a:rPr>
+              <a:t>Kubernetes + Helm</a:t>
+            </a:r>
+          </a:p>
+        </p:txBody>
+      </p:sp>
+      <p:sp>
+        <p:nvSpPr>
+          <p:cNvPr id="11" name="TextBox 10"/>
+          <p:cNvSpPr txBox="1"/>
+          <p:nvPr/>
+        </p:nvSpPr>
+        <p:spPr>
+          <a:xfrm>
+            <a:off x="6492240" y="2331720"/>
+            <a:ext cx="4526280" cy="2834640"/>
+          </a:xfrm>
+          <a:prstGeom prst="rect">
+            <a:avLst/>
+          </a:prstGeom>
+          <a:noFill/>
+        </p:spPr>
+        <p:txBody>
+          <a:bodyPr wrap="square" lIns="18288" tIns="18288" rIns="36576" bIns="18288">
+            <a:spAutoFit/>
+          </a:bodyPr>
+          <a:lstStyle/>
+          <a:p>
+            <a:pPr>
+              <a:spcAft>
+                <a:spcPts val="1400"/>
+              </a:spcAft>
+              <a:defRPr sz="1500">
+                <a:solidFill>
+                  <a:srgbClr val="F3F7FC"/>
+                </a:solidFill>
+                <a:latin typeface="Aptos"/>
+              </a:defRPr>
+            </a:pPr>
+            <a:r>
+              <a:rPr sz="2000"/>
+              <a:t>•  Replicas, self-healing, rolling updates</a:t>
+            </a:r>
+          </a:p>
+          <a:p>
+            <a:pPr>
+              <a:spcAft>
+                <a:spcPts val="1400"/>
+              </a:spcAft>
+              <a:defRPr sz="1500">
+                <a:solidFill>
+                  <a:srgbClr val="F3F7FC"/>
+                </a:solidFill>
+                <a:latin typeface="Aptos"/>
+              </a:defRPr>
+            </a:pPr>
+            <a:r>
+              <a:rPr sz="2000"/>
+              <a:t>•  Services + Ingress route traffic</a:t>
+            </a:r>
+          </a:p>
+          <a:p>
+            <a:pPr>
+              <a:spcAft>
+                <a:spcPts val="1400"/>
+              </a:spcAft>
+              <a:defRPr sz="1500">
+                <a:solidFill>
+                  <a:srgbClr val="F3F7FC"/>
+                </a:solidFill>
+                <a:latin typeface="Aptos"/>
+              </a:defRPr>
+            </a:pPr>
+            <a:r>
+              <a:rPr sz="2000"/>
+              <a:t>•  Helm values for each environment</a:t>
+            </a:r>
+          </a:p>
+        </p:txBody>
+      </p:sp>
+      <p:sp>
+        <p:nvSpPr>
+          <p:cNvPr id="12" name="TextBox 11"/>
+          <p:cNvSpPr txBox="1"/>
+          <p:nvPr/>
+        </p:nvSpPr>
+        <p:spPr>
+          <a:xfrm>
+            <a:off x="822960" y="6062472"/>
+            <a:ext cx="10607040" cy="274320"/>
+          </a:xfrm>
+          <a:prstGeom prst="rect">
+            <a:avLst/>
+          </a:prstGeom>
+          <a:noFill/>
+        </p:spPr>
+        <p:txBody>
+          <a:bodyPr wrap="square" lIns="36576" tIns="36576" rIns="36576" bIns="36576" anchor="t">
+            <a:spAutoFit/>
+          </a:bodyPr>
+          <a:lstStyle/>
+          <a:p>
+            <a:r>
+              <a:rPr sz="1200" b="1">
+                <a:solidFill>
+                  <a:srgbClr val="45D3E6"/>
+                </a:solidFill>
+                <a:latin typeface="Aptos"/>
+              </a:rPr>
+              <a:t>Decision: use Compose to run locally; use Kubernetes to demonstrate production-style orchestration.</a:t>
             </a:r>
           </a:p>
         </p:txBody>
@@ -7381,7 +7181,7 @@
                 </a:solidFill>
                 <a:latin typeface="Aptos"/>
               </a:rPr>
-              <a:t>14 / CLOUD INFRASTRUCTURE</a:t>
+              <a:t>13 / OPERATE AND RECONCILE</a:t>
             </a:r>
           </a:p>
         </p:txBody>
@@ -7415,7 +7215,7 @@
                 </a:solidFill>
                 <a:latin typeface="Aptos"/>
               </a:rPr>
-              <a:t>Infrastructure as code: Terraform</a:t>
+              <a:t>Monitoring and GitOps</a:t>
             </a:r>
           </a:p>
         </p:txBody>
@@ -7494,7 +7294,7 @@
                 </a:solidFill>
                 <a:latin typeface="Aptos"/>
               </a:rPr>
-              <a:t>16</a:t>
+              <a:t>15</a:t>
             </a:r>
           </a:p>
         </p:txBody>
@@ -7507,8 +7307,8 @@
         </p:nvSpPr>
         <p:spPr>
           <a:xfrm>
-            <a:off x="653796" y="1907308"/>
-            <a:ext cx="5230368" cy="1168862"/>
+            <a:off x="608075" y="1759521"/>
+            <a:ext cx="3584448" cy="1775333"/>
           </a:xfrm>
           <a:prstGeom prst="roundRect">
             <a:avLst>
@@ -7549,7 +7349,7 @@
       </p:sp>
       <p:pic>
         <p:nvPicPr>
-          <p:cNvPr id="7" name="Picture 6" descr="24-terraform-validate.png"/>
+          <p:cNvPr id="7" name="Picture 6" descr="45-prometheus-targets.png"/>
           <p:cNvPicPr>
             <a:picLocks noChangeAspect="1"/>
           </p:cNvPicPr>
@@ -7563,8 +7363,8 @@
         </p:blipFill>
         <p:spPr>
           <a:xfrm>
-            <a:off x="685800" y="1939312"/>
-            <a:ext cx="5166360" cy="1104854"/>
+            <a:off x="640080" y="1791525"/>
+            <a:ext cx="3520440" cy="1711325"/>
           </a:xfrm>
           <a:prstGeom prst="rect">
             <a:avLst/>
@@ -7579,8 +7379,8 @@
         </p:nvSpPr>
         <p:spPr>
           <a:xfrm>
-            <a:off x="7673767" y="1431036"/>
-            <a:ext cx="2300385" cy="2121408"/>
+            <a:off x="4366260" y="1449324"/>
+            <a:ext cx="3794760" cy="2395727"/>
           </a:xfrm>
           <a:prstGeom prst="roundRect">
             <a:avLst>
@@ -7621,7 +7421,7 @@
       </p:sp>
       <p:pic>
         <p:nvPicPr>
-          <p:cNvPr id="9" name="Picture 8" descr="30-terraform-plan.png"/>
+          <p:cNvPr id="9" name="Picture 8" descr="46-grafana-dashboard.png"/>
           <p:cNvPicPr>
             <a:picLocks noChangeAspect="1"/>
           </p:cNvPicPr>
@@ -7635,8 +7435,8 @@
         </p:blipFill>
         <p:spPr>
           <a:xfrm>
-            <a:off x="7705771" y="1463040"/>
-            <a:ext cx="2236377" cy="2057400"/>
+            <a:off x="4398264" y="1481328"/>
+            <a:ext cx="3730752" cy="2331720"/>
           </a:xfrm>
           <a:prstGeom prst="rect">
             <a:avLst/>
@@ -7651,8 +7451,8 @@
         </p:nvSpPr>
         <p:spPr>
           <a:xfrm>
-            <a:off x="2470167" y="3762756"/>
-            <a:ext cx="1597625" cy="1892807"/>
+            <a:off x="8334756" y="1872753"/>
+            <a:ext cx="3218688" cy="1548869"/>
           </a:xfrm>
           <a:prstGeom prst="roundRect">
             <a:avLst>
@@ -7693,7 +7493,7 @@
       </p:sp>
       <p:pic>
         <p:nvPicPr>
-          <p:cNvPr id="11" name="Picture 10" descr="31-terraform-apply.png"/>
+          <p:cNvPr id="11" name="Picture 10" descr="47-argocd-app-synced.png"/>
           <p:cNvPicPr>
             <a:picLocks noChangeAspect="1"/>
           </p:cNvPicPr>
@@ -7707,8 +7507,8 @@
         </p:blipFill>
         <p:spPr>
           <a:xfrm>
-            <a:off x="2502171" y="3794760"/>
-            <a:ext cx="1533617" cy="1828800"/>
+            <a:off x="8366760" y="1904757"/>
+            <a:ext cx="3154680" cy="1484861"/>
           </a:xfrm>
           <a:prstGeom prst="rect">
             <a:avLst/>
@@ -7717,86 +7517,218 @@
       </p:pic>
       <p:sp>
         <p:nvSpPr>
-          <p:cNvPr id="12" name="Rounded Rectangle 11"/>
+          <p:cNvPr id="12" name="TextBox 11"/>
+          <p:cNvSpPr txBox="1"/>
+          <p:nvPr/>
+        </p:nvSpPr>
+        <p:spPr>
+          <a:xfrm>
+            <a:off x="685800" y="4069080"/>
+            <a:ext cx="3200400" cy="274320"/>
+          </a:xfrm>
+          <a:prstGeom prst="rect">
+            <a:avLst/>
+          </a:prstGeom>
+          <a:noFill/>
+        </p:spPr>
+        <p:txBody>
+          <a:bodyPr wrap="square" lIns="36576" tIns="36576" rIns="36576" bIns="36576" anchor="t">
+            <a:spAutoFit/>
+          </a:bodyPr>
+          <a:lstStyle/>
+          <a:p>
+            <a:r>
+              <a:rPr sz="1500" b="1">
+                <a:solidFill>
+                  <a:srgbClr val="45D3E6"/>
+                </a:solidFill>
+                <a:latin typeface="Aptos"/>
+              </a:rPr>
+              <a:t>Prometheus</a:t>
+            </a:r>
+          </a:p>
+        </p:txBody>
+      </p:sp>
+      <p:sp>
+        <p:nvSpPr>
+          <p:cNvPr id="13" name="TextBox 12"/>
+          <p:cNvSpPr txBox="1"/>
+          <p:nvPr/>
+        </p:nvSpPr>
+        <p:spPr>
+          <a:xfrm>
+            <a:off x="685800" y="4434840"/>
+            <a:ext cx="3108960" cy="822960"/>
+          </a:xfrm>
+          <a:prstGeom prst="rect">
+            <a:avLst/>
+          </a:prstGeom>
+          <a:noFill/>
+        </p:spPr>
+        <p:txBody>
+          <a:bodyPr wrap="square" lIns="36576" tIns="36576" rIns="36576" bIns="36576" anchor="t">
+            <a:spAutoFit/>
+          </a:bodyPr>
+          <a:lstStyle/>
+          <a:p>
+            <a:r>
+              <a:rPr sz="1200" b="0">
+                <a:solidFill>
+                  <a:srgbClr val="F3F7FC"/>
+                </a:solidFill>
+                <a:latin typeface="Aptos"/>
+              </a:rPr>
+              <a:t>Scrapes backend metrics at /metrics.</a:t>
+            </a:r>
+          </a:p>
+        </p:txBody>
+      </p:sp>
+      <p:sp>
+        <p:nvSpPr>
+          <p:cNvPr id="14" name="TextBox 13"/>
+          <p:cNvSpPr txBox="1"/>
+          <p:nvPr/>
+        </p:nvSpPr>
+        <p:spPr>
+          <a:xfrm>
+            <a:off x="4343400" y="4069080"/>
+            <a:ext cx="3200400" cy="274320"/>
+          </a:xfrm>
+          <a:prstGeom prst="rect">
+            <a:avLst/>
+          </a:prstGeom>
+          <a:noFill/>
+        </p:spPr>
+        <p:txBody>
+          <a:bodyPr wrap="square" lIns="36576" tIns="36576" rIns="36576" bIns="36576" anchor="t">
+            <a:spAutoFit/>
+          </a:bodyPr>
+          <a:lstStyle/>
+          <a:p>
+            <a:r>
+              <a:rPr sz="1500" b="1">
+                <a:solidFill>
+                  <a:srgbClr val="45D3E6"/>
+                </a:solidFill>
+                <a:latin typeface="Aptos"/>
+              </a:rPr>
+              <a:t>Grafana</a:t>
+            </a:r>
+          </a:p>
+        </p:txBody>
+      </p:sp>
+      <p:sp>
+        <p:nvSpPr>
+          <p:cNvPr id="15" name="TextBox 14"/>
+          <p:cNvSpPr txBox="1"/>
+          <p:nvPr/>
+        </p:nvSpPr>
+        <p:spPr>
+          <a:xfrm>
+            <a:off x="4343400" y="4434840"/>
+            <a:ext cx="3108960" cy="822960"/>
+          </a:xfrm>
+          <a:prstGeom prst="rect">
+            <a:avLst/>
+          </a:prstGeom>
+          <a:noFill/>
+        </p:spPr>
+        <p:txBody>
+          <a:bodyPr wrap="square" lIns="36576" tIns="36576" rIns="36576" bIns="36576" anchor="t">
+            <a:spAutoFit/>
+          </a:bodyPr>
+          <a:lstStyle/>
+          <a:p>
+            <a:r>
+              <a:rPr sz="1200" b="0">
+                <a:solidFill>
+                  <a:srgbClr val="F3F7FC"/>
+                </a:solidFill>
+                <a:latin typeface="Aptos"/>
+              </a:rPr>
+              <a:t>Visualizes request rate, latency and error signals.</a:t>
+            </a:r>
+          </a:p>
+        </p:txBody>
+      </p:sp>
+      <p:sp>
+        <p:nvSpPr>
+          <p:cNvPr id="16" name="TextBox 15"/>
+          <p:cNvSpPr txBox="1"/>
+          <p:nvPr/>
+        </p:nvSpPr>
+        <p:spPr>
+          <a:xfrm>
+            <a:off x="8366760" y="4069080"/>
+            <a:ext cx="3200400" cy="274320"/>
+          </a:xfrm>
+          <a:prstGeom prst="rect">
+            <a:avLst/>
+          </a:prstGeom>
+          <a:noFill/>
+        </p:spPr>
+        <p:txBody>
+          <a:bodyPr wrap="square" lIns="36576" tIns="36576" rIns="36576" bIns="36576" anchor="t">
+            <a:spAutoFit/>
+          </a:bodyPr>
+          <a:lstStyle/>
+          <a:p>
+            <a:r>
+              <a:rPr sz="1500" b="1">
+                <a:solidFill>
+                  <a:srgbClr val="45D3E6"/>
+                </a:solidFill>
+                <a:latin typeface="Aptos"/>
+              </a:rPr>
+              <a:t>Argo CD</a:t>
+            </a:r>
+          </a:p>
+        </p:txBody>
+      </p:sp>
+      <p:sp>
+        <p:nvSpPr>
+          <p:cNvPr id="17" name="TextBox 16"/>
+          <p:cNvSpPr txBox="1"/>
+          <p:nvPr/>
+        </p:nvSpPr>
+        <p:spPr>
+          <a:xfrm>
+            <a:off x="8366760" y="4434840"/>
+            <a:ext cx="3108960" cy="822960"/>
+          </a:xfrm>
+          <a:prstGeom prst="rect">
+            <a:avLst/>
+          </a:prstGeom>
+          <a:noFill/>
+        </p:spPr>
+        <p:txBody>
+          <a:bodyPr wrap="square" lIns="36576" tIns="36576" rIns="36576" bIns="36576" anchor="t">
+            <a:spAutoFit/>
+          </a:bodyPr>
+          <a:lstStyle/>
+          <a:p>
+            <a:r>
+              <a:rPr sz="1200" b="0">
+                <a:solidFill>
+                  <a:srgbClr val="F3F7FC"/>
+                </a:solidFill>
+                <a:latin typeface="Aptos"/>
+              </a:rPr>
+              <a:t>Watches Helm config and syncs desired state.</a:t>
+            </a:r>
+          </a:p>
+        </p:txBody>
+      </p:sp>
+      <p:sp>
+        <p:nvSpPr>
+          <p:cNvPr id="18" name="Rounded Rectangle 17"/>
           <p:cNvSpPr/>
           <p:nvPr/>
         </p:nvSpPr>
         <p:spPr>
           <a:xfrm>
-            <a:off x="7759471" y="3762756"/>
-            <a:ext cx="2128977" cy="1892807"/>
-          </a:xfrm>
-          <a:prstGeom prst="roundRect">
-            <a:avLst>
-              <a:gd name="adj" fmla="val 12000"/>
-            </a:avLst>
-          </a:prstGeom>
-          <a:solidFill>
-            <a:srgbClr val="1D2B44"/>
-          </a:solidFill>
-          <a:ln>
-            <a:solidFill>
-              <a:srgbClr val="405371"/>
-            </a:solidFill>
-          </a:ln>
-        </p:spPr>
-        <p:style>
-          <a:lnRef idx="1">
-            <a:schemeClr val="accent1"/>
-          </a:lnRef>
-          <a:fillRef idx="3">
-            <a:schemeClr val="accent1"/>
-          </a:fillRef>
-          <a:effectRef idx="2">
-            <a:schemeClr val="accent1"/>
-          </a:effectRef>
-          <a:fontRef idx="minor">
-            <a:schemeClr val="lt1"/>
-          </a:fontRef>
-        </p:style>
-        <p:txBody>
-          <a:bodyPr rtlCol="0" anchor="ctr"/>
-          <a:lstStyle/>
-          <a:p>
-            <a:pPr algn="ctr"/>
-            <a:endParaRPr/>
-          </a:p>
-        </p:txBody>
-      </p:sp>
-      <p:pic>
-        <p:nvPicPr>
-          <p:cNvPr id="13" name="Picture 12" descr="34-terraform-destroy.png"/>
-          <p:cNvPicPr>
-            <a:picLocks noChangeAspect="1"/>
-          </p:cNvPicPr>
-          <p:nvPr/>
-        </p:nvPicPr>
-        <p:blipFill>
-          <a:blip r:embed="rId5"/>
-          <a:stretch>
-            <a:fillRect/>
-          </a:stretch>
-        </p:blipFill>
-        <p:spPr>
-          <a:xfrm>
-            <a:off x="7791475" y="3794760"/>
-            <a:ext cx="2064969" cy="1828800"/>
-          </a:xfrm>
-          <a:prstGeom prst="rect">
-            <a:avLst/>
-          </a:prstGeom>
-        </p:spPr>
-      </p:pic>
-      <p:sp>
-        <p:nvSpPr>
-          <p:cNvPr id="14" name="Rounded Rectangle 13"/>
-          <p:cNvSpPr/>
-          <p:nvPr/>
-        </p:nvSpPr>
-        <p:spPr>
-          <a:xfrm>
-            <a:off x="731520" y="5870448"/>
-            <a:ext cx="10698480" cy="438912"/>
+            <a:off x="713232" y="5440680"/>
+            <a:ext cx="10698480" cy="502920"/>
           </a:xfrm>
           <a:prstGeom prst="roundRect">
             <a:avLst>
@@ -7835,34 +7767,34 @@
       </p:sp>
       <p:sp>
         <p:nvSpPr>
-          <p:cNvPr id="15" name="TextBox 14"/>
-          <p:cNvSpPr txBox="1"/>
-          <p:nvPr/>
-        </p:nvSpPr>
-        <p:spPr>
-          <a:xfrm>
-            <a:off x="896112" y="5952744"/>
-            <a:ext cx="10332720" cy="228600"/>
-          </a:xfrm>
-          <a:prstGeom prst="rect">
-            <a:avLst/>
-          </a:prstGeom>
-          <a:noFill/>
-        </p:spPr>
-        <p:txBody>
-          <a:bodyPr wrap="square" lIns="36576" tIns="36576" rIns="36576" bIns="36576" anchor="t">
-            <a:spAutoFit/>
-          </a:bodyPr>
-          <a:lstStyle/>
-          <a:p>
-            <a:r>
-              <a:rPr sz="1000" b="1">
-                <a:solidFill>
-                  <a:srgbClr val="FFBE69"/>
-                </a:solidFill>
-                <a:latin typeface="Aptos"/>
-              </a:rPr>
-              <a:t>Important scope note: README states Terraform was exercised against Moto mock services; this is not proof of a live AWS EKS deployment.</a:t>
+          <p:cNvPr id="19" name="TextBox 18"/>
+          <p:cNvSpPr txBox="1"/>
+          <p:nvPr/>
+        </p:nvSpPr>
+        <p:spPr>
+          <a:xfrm>
+            <a:off x="914400" y="5559552"/>
+            <a:ext cx="10241280" cy="228600"/>
+          </a:xfrm>
+          <a:prstGeom prst="rect">
+            <a:avLst/>
+          </a:prstGeom>
+          <a:noFill/>
+        </p:spPr>
+        <p:txBody>
+          <a:bodyPr wrap="square" lIns="36576" tIns="36576" rIns="36576" bIns="36576" anchor="t">
+            <a:spAutoFit/>
+          </a:bodyPr>
+          <a:lstStyle/>
+          <a:p>
+            <a:r>
+              <a:rPr sz="1100" b="0">
+                <a:solidFill>
+                  <a:srgbClr val="ADBBCF"/>
+                </a:solidFill>
+                <a:latin typeface="Aptos"/>
+              </a:rPr>
+              <a:t>Monitoring and GitOps are separate concerns: one shows system health; the other reconciles deployment configuration.</a:t>
             </a:r>
           </a:p>
         </p:txBody>
@@ -7929,7 +7861,7 @@
                 </a:solidFill>
                 <a:latin typeface="Aptos"/>
               </a:rPr>
-              <a:t>15 / SUMMARY</a:t>
+              <a:t>14 / CLOUD INFRASTRUCTURE</a:t>
             </a:r>
           </a:p>
         </p:txBody>
@@ -7963,7 +7895,7 @@
                 </a:solidFill>
                 <a:latin typeface="Aptos"/>
               </a:rPr>
-              <a:t>What was demonstrated</a:t>
+              <a:t>Infrastructure as code: Terraform</a:t>
             </a:r>
           </a:p>
         </p:txBody>
@@ -8042,7 +7974,7 @@
                 </a:solidFill>
                 <a:latin typeface="Aptos"/>
               </a:rPr>
-              <a:t>17</a:t>
+              <a:t>16</a:t>
             </a:r>
           </a:p>
         </p:txBody>
@@ -8055,8 +7987,296 @@
         </p:nvSpPr>
         <p:spPr>
           <a:xfrm>
-            <a:off x="685800" y="1508760"/>
-            <a:ext cx="5257800" cy="4297680"/>
+            <a:off x="653796" y="1907308"/>
+            <a:ext cx="5230368" cy="1168862"/>
+          </a:xfrm>
+          <a:prstGeom prst="roundRect">
+            <a:avLst>
+              <a:gd name="adj" fmla="val 12000"/>
+            </a:avLst>
+          </a:prstGeom>
+          <a:solidFill>
+            <a:srgbClr val="1D2B44"/>
+          </a:solidFill>
+          <a:ln>
+            <a:solidFill>
+              <a:srgbClr val="405371"/>
+            </a:solidFill>
+          </a:ln>
+        </p:spPr>
+        <p:style>
+          <a:lnRef idx="1">
+            <a:schemeClr val="accent1"/>
+          </a:lnRef>
+          <a:fillRef idx="3">
+            <a:schemeClr val="accent1"/>
+          </a:fillRef>
+          <a:effectRef idx="2">
+            <a:schemeClr val="accent1"/>
+          </a:effectRef>
+          <a:fontRef idx="minor">
+            <a:schemeClr val="lt1"/>
+          </a:fontRef>
+        </p:style>
+        <p:txBody>
+          <a:bodyPr rtlCol="0" anchor="ctr"/>
+          <a:lstStyle/>
+          <a:p>
+            <a:pPr algn="ctr"/>
+            <a:endParaRPr/>
+          </a:p>
+        </p:txBody>
+      </p:sp>
+      <p:pic>
+        <p:nvPicPr>
+          <p:cNvPr id="7" name="Picture 6" descr="24-terraform-validate.png"/>
+          <p:cNvPicPr>
+            <a:picLocks noChangeAspect="1"/>
+          </p:cNvPicPr>
+          <p:nvPr/>
+        </p:nvPicPr>
+        <p:blipFill>
+          <a:blip r:embed="rId2"/>
+          <a:stretch>
+            <a:fillRect/>
+          </a:stretch>
+        </p:blipFill>
+        <p:spPr>
+          <a:xfrm>
+            <a:off x="685800" y="1939312"/>
+            <a:ext cx="5166360" cy="1104854"/>
+          </a:xfrm>
+          <a:prstGeom prst="rect">
+            <a:avLst/>
+          </a:prstGeom>
+        </p:spPr>
+      </p:pic>
+      <p:sp>
+        <p:nvSpPr>
+          <p:cNvPr id="8" name="Rounded Rectangle 7"/>
+          <p:cNvSpPr/>
+          <p:nvPr/>
+        </p:nvSpPr>
+        <p:spPr>
+          <a:xfrm>
+            <a:off x="7673767" y="1431036"/>
+            <a:ext cx="2300385" cy="2121408"/>
+          </a:xfrm>
+          <a:prstGeom prst="roundRect">
+            <a:avLst>
+              <a:gd name="adj" fmla="val 12000"/>
+            </a:avLst>
+          </a:prstGeom>
+          <a:solidFill>
+            <a:srgbClr val="1D2B44"/>
+          </a:solidFill>
+          <a:ln>
+            <a:solidFill>
+              <a:srgbClr val="405371"/>
+            </a:solidFill>
+          </a:ln>
+        </p:spPr>
+        <p:style>
+          <a:lnRef idx="1">
+            <a:schemeClr val="accent1"/>
+          </a:lnRef>
+          <a:fillRef idx="3">
+            <a:schemeClr val="accent1"/>
+          </a:fillRef>
+          <a:effectRef idx="2">
+            <a:schemeClr val="accent1"/>
+          </a:effectRef>
+          <a:fontRef idx="minor">
+            <a:schemeClr val="lt1"/>
+          </a:fontRef>
+        </p:style>
+        <p:txBody>
+          <a:bodyPr rtlCol="0" anchor="ctr"/>
+          <a:lstStyle/>
+          <a:p>
+            <a:pPr algn="ctr"/>
+            <a:endParaRPr/>
+          </a:p>
+        </p:txBody>
+      </p:sp>
+      <p:pic>
+        <p:nvPicPr>
+          <p:cNvPr id="9" name="Picture 8" descr="30-terraform-plan.png"/>
+          <p:cNvPicPr>
+            <a:picLocks noChangeAspect="1"/>
+          </p:cNvPicPr>
+          <p:nvPr/>
+        </p:nvPicPr>
+        <p:blipFill>
+          <a:blip r:embed="rId3"/>
+          <a:stretch>
+            <a:fillRect/>
+          </a:stretch>
+        </p:blipFill>
+        <p:spPr>
+          <a:xfrm>
+            <a:off x="7705771" y="1463040"/>
+            <a:ext cx="2236377" cy="2057400"/>
+          </a:xfrm>
+          <a:prstGeom prst="rect">
+            <a:avLst/>
+          </a:prstGeom>
+        </p:spPr>
+      </p:pic>
+      <p:sp>
+        <p:nvSpPr>
+          <p:cNvPr id="10" name="Rounded Rectangle 9"/>
+          <p:cNvSpPr/>
+          <p:nvPr/>
+        </p:nvSpPr>
+        <p:spPr>
+          <a:xfrm>
+            <a:off x="2470167" y="3762756"/>
+            <a:ext cx="1597625" cy="1892807"/>
+          </a:xfrm>
+          <a:prstGeom prst="roundRect">
+            <a:avLst>
+              <a:gd name="adj" fmla="val 12000"/>
+            </a:avLst>
+          </a:prstGeom>
+          <a:solidFill>
+            <a:srgbClr val="1D2B44"/>
+          </a:solidFill>
+          <a:ln>
+            <a:solidFill>
+              <a:srgbClr val="405371"/>
+            </a:solidFill>
+          </a:ln>
+        </p:spPr>
+        <p:style>
+          <a:lnRef idx="1">
+            <a:schemeClr val="accent1"/>
+          </a:lnRef>
+          <a:fillRef idx="3">
+            <a:schemeClr val="accent1"/>
+          </a:fillRef>
+          <a:effectRef idx="2">
+            <a:schemeClr val="accent1"/>
+          </a:effectRef>
+          <a:fontRef idx="minor">
+            <a:schemeClr val="lt1"/>
+          </a:fontRef>
+        </p:style>
+        <p:txBody>
+          <a:bodyPr rtlCol="0" anchor="ctr"/>
+          <a:lstStyle/>
+          <a:p>
+            <a:pPr algn="ctr"/>
+            <a:endParaRPr/>
+          </a:p>
+        </p:txBody>
+      </p:sp>
+      <p:pic>
+        <p:nvPicPr>
+          <p:cNvPr id="11" name="Picture 10" descr="31-terraform-apply.png"/>
+          <p:cNvPicPr>
+            <a:picLocks noChangeAspect="1"/>
+          </p:cNvPicPr>
+          <p:nvPr/>
+        </p:nvPicPr>
+        <p:blipFill>
+          <a:blip r:embed="rId4"/>
+          <a:stretch>
+            <a:fillRect/>
+          </a:stretch>
+        </p:blipFill>
+        <p:spPr>
+          <a:xfrm>
+            <a:off x="2502171" y="3794760"/>
+            <a:ext cx="1533617" cy="1828800"/>
+          </a:xfrm>
+          <a:prstGeom prst="rect">
+            <a:avLst/>
+          </a:prstGeom>
+        </p:spPr>
+      </p:pic>
+      <p:sp>
+        <p:nvSpPr>
+          <p:cNvPr id="12" name="Rounded Rectangle 11"/>
+          <p:cNvSpPr/>
+          <p:nvPr/>
+        </p:nvSpPr>
+        <p:spPr>
+          <a:xfrm>
+            <a:off x="7759471" y="3762756"/>
+            <a:ext cx="2128977" cy="1892807"/>
+          </a:xfrm>
+          <a:prstGeom prst="roundRect">
+            <a:avLst>
+              <a:gd name="adj" fmla="val 12000"/>
+            </a:avLst>
+          </a:prstGeom>
+          <a:solidFill>
+            <a:srgbClr val="1D2B44"/>
+          </a:solidFill>
+          <a:ln>
+            <a:solidFill>
+              <a:srgbClr val="405371"/>
+            </a:solidFill>
+          </a:ln>
+        </p:spPr>
+        <p:style>
+          <a:lnRef idx="1">
+            <a:schemeClr val="accent1"/>
+          </a:lnRef>
+          <a:fillRef idx="3">
+            <a:schemeClr val="accent1"/>
+          </a:fillRef>
+          <a:effectRef idx="2">
+            <a:schemeClr val="accent1"/>
+          </a:effectRef>
+          <a:fontRef idx="minor">
+            <a:schemeClr val="lt1"/>
+          </a:fontRef>
+        </p:style>
+        <p:txBody>
+          <a:bodyPr rtlCol="0" anchor="ctr"/>
+          <a:lstStyle/>
+          <a:p>
+            <a:pPr algn="ctr"/>
+            <a:endParaRPr/>
+          </a:p>
+        </p:txBody>
+      </p:sp>
+      <p:pic>
+        <p:nvPicPr>
+          <p:cNvPr id="13" name="Picture 12" descr="34-terraform-destroy.png"/>
+          <p:cNvPicPr>
+            <a:picLocks noChangeAspect="1"/>
+          </p:cNvPicPr>
+          <p:nvPr/>
+        </p:nvPicPr>
+        <p:blipFill>
+          <a:blip r:embed="rId5"/>
+          <a:stretch>
+            <a:fillRect/>
+          </a:stretch>
+        </p:blipFill>
+        <p:spPr>
+          <a:xfrm>
+            <a:off x="7791475" y="3794760"/>
+            <a:ext cx="2064969" cy="1828800"/>
+          </a:xfrm>
+          <a:prstGeom prst="rect">
+            <a:avLst/>
+          </a:prstGeom>
+        </p:spPr>
+      </p:pic>
+      <p:sp>
+        <p:nvSpPr>
+          <p:cNvPr id="14" name="Rounded Rectangle 13"/>
+          <p:cNvSpPr/>
+          <p:nvPr/>
+        </p:nvSpPr>
+        <p:spPr>
+          <a:xfrm>
+            <a:off x="731520" y="5870448"/>
+            <a:ext cx="10698480" cy="438912"/>
           </a:xfrm>
           <a:prstGeom prst="roundRect">
             <a:avLst>
@@ -8095,370 +8315,34 @@
       </p:sp>
       <p:sp>
         <p:nvSpPr>
-          <p:cNvPr id="7" name="TextBox 6"/>
-          <p:cNvSpPr txBox="1"/>
-          <p:nvPr/>
-        </p:nvSpPr>
-        <p:spPr>
-          <a:xfrm>
-            <a:off x="914400" y="1783080"/>
-            <a:ext cx="4572000" cy="320040"/>
-          </a:xfrm>
-          <a:prstGeom prst="rect">
-            <a:avLst/>
-          </a:prstGeom>
-          <a:noFill/>
-        </p:spPr>
-        <p:txBody>
-          <a:bodyPr wrap="square" lIns="36576" tIns="36576" rIns="36576" bIns="36576" anchor="t">
-            <a:spAutoFit/>
-          </a:bodyPr>
-          <a:lstStyle/>
-          <a:p>
-            <a:r>
-              <a:rPr sz="2000" b="1">
-                <a:solidFill>
-                  <a:srgbClr val="70E0AA"/>
-                </a:solidFill>
-                <a:latin typeface="Aptos"/>
-              </a:rPr>
-              <a:t>Delivered</a:t>
-            </a:r>
-          </a:p>
-        </p:txBody>
-      </p:sp>
-      <p:sp>
-        <p:nvSpPr>
-          <p:cNvPr id="8" name="TextBox 7"/>
-          <p:cNvSpPr txBox="1"/>
-          <p:nvPr/>
-        </p:nvSpPr>
-        <p:spPr>
-          <a:xfrm>
-            <a:off x="914400" y="2331720"/>
-            <a:ext cx="4526280" cy="2926080"/>
-          </a:xfrm>
-          <a:prstGeom prst="rect">
-            <a:avLst/>
-          </a:prstGeom>
-          <a:noFill/>
-        </p:spPr>
-        <p:txBody>
-          <a:bodyPr wrap="square" lIns="18288" tIns="18288" rIns="36576" bIns="18288">
-            <a:spAutoFit/>
-          </a:bodyPr>
-          <a:lstStyle/>
-          <a:p>
-            <a:pPr>
-              <a:spcAft>
-                <a:spcPts val="900"/>
-              </a:spcAft>
-              <a:defRPr sz="1400">
-                <a:solidFill>
-                  <a:srgbClr val="F3F7FC"/>
-                </a:solidFill>
-                <a:latin typeface="Aptos"/>
-              </a:defRPr>
-            </a:pPr>
-            <a:r>
-              <a:t>•  Working hostel-management UI and REST API.</a:t>
-            </a:r>
-          </a:p>
-          <a:p>
-            <a:pPr>
-              <a:spcAft>
-                <a:spcPts val="900"/>
-              </a:spcAft>
-              <a:defRPr sz="1400">
-                <a:solidFill>
-                  <a:srgbClr val="F3F7FC"/>
-                </a:solidFill>
-                <a:latin typeface="Aptos"/>
-              </a:defRPr>
-            </a:pPr>
-            <a:r>
-              <a:t>•  Automated backend tests and frontend build.</a:t>
-            </a:r>
-          </a:p>
-          <a:p>
-            <a:pPr>
-              <a:spcAft>
-                <a:spcPts val="900"/>
-              </a:spcAft>
-              <a:defRPr sz="1400">
-                <a:solidFill>
-                  <a:srgbClr val="F3F7FC"/>
-                </a:solidFill>
-                <a:latin typeface="Aptos"/>
-              </a:defRPr>
-            </a:pPr>
-            <a:r>
-              <a:t>•  Docker images and Trivy scanning in CI.</a:t>
-            </a:r>
-          </a:p>
-          <a:p>
-            <a:pPr>
-              <a:spcAft>
-                <a:spcPts val="900"/>
-              </a:spcAft>
-              <a:defRPr sz="1400">
-                <a:solidFill>
-                  <a:srgbClr val="F3F7FC"/>
-                </a:solidFill>
-                <a:latin typeface="Aptos"/>
-              </a:defRPr>
-            </a:pPr>
-            <a:r>
-              <a:t>•  Local Kubernetes deployment through Helm/kind or Minikube workflows.</a:t>
-            </a:r>
-          </a:p>
-          <a:p>
-            <a:pPr>
-              <a:spcAft>
-                <a:spcPts val="900"/>
-              </a:spcAft>
-              <a:defRPr sz="1400">
-                <a:solidFill>
-                  <a:srgbClr val="F3F7FC"/>
-                </a:solidFill>
-                <a:latin typeface="Aptos"/>
-              </a:defRPr>
-            </a:pPr>
-            <a:r>
-              <a:t>•  Prometheus/Grafana configuration and Argo CD GitOps files.</a:t>
-            </a:r>
-          </a:p>
-          <a:p>
-            <a:pPr>
-              <a:spcAft>
-                <a:spcPts val="900"/>
-              </a:spcAft>
-              <a:defRPr sz="1400">
-                <a:solidFill>
-                  <a:srgbClr val="F3F7FC"/>
-                </a:solidFill>
-                <a:latin typeface="Aptos"/>
-              </a:defRPr>
-            </a:pPr>
-            <a:r>
-              <a:t>•  Terraform definitions for VPC and EKS.</a:t>
-            </a:r>
-          </a:p>
-        </p:txBody>
-      </p:sp>
-      <p:sp>
-        <p:nvSpPr>
-          <p:cNvPr id="9" name="Rounded Rectangle 8"/>
-          <p:cNvSpPr/>
-          <p:nvPr/>
-        </p:nvSpPr>
-        <p:spPr>
-          <a:xfrm>
-            <a:off x="6263640" y="1508760"/>
-            <a:ext cx="5212080" cy="4297680"/>
-          </a:xfrm>
-          <a:prstGeom prst="roundRect">
-            <a:avLst>
-              <a:gd name="adj" fmla="val 12000"/>
-            </a:avLst>
-          </a:prstGeom>
-          <a:solidFill>
-            <a:srgbClr val="172237"/>
-          </a:solidFill>
-          <a:ln>
-            <a:noFill/>
-          </a:ln>
-        </p:spPr>
-        <p:style>
-          <a:lnRef idx="1">
-            <a:schemeClr val="accent1"/>
-          </a:lnRef>
-          <a:fillRef idx="3">
-            <a:schemeClr val="accent1"/>
-          </a:fillRef>
-          <a:effectRef idx="2">
-            <a:schemeClr val="accent1"/>
-          </a:effectRef>
-          <a:fontRef idx="minor">
-            <a:schemeClr val="lt1"/>
-          </a:fontRef>
-        </p:style>
-        <p:txBody>
-          <a:bodyPr rtlCol="0" anchor="ctr"/>
-          <a:lstStyle/>
-          <a:p>
-            <a:pPr algn="ctr"/>
-            <a:endParaRPr/>
-          </a:p>
-        </p:txBody>
-      </p:sp>
-      <p:sp>
-        <p:nvSpPr>
-          <p:cNvPr id="10" name="TextBox 9"/>
-          <p:cNvSpPr txBox="1"/>
-          <p:nvPr/>
-        </p:nvSpPr>
-        <p:spPr>
-          <a:xfrm>
-            <a:off x="6492240" y="1783080"/>
-            <a:ext cx="4572000" cy="320040"/>
-          </a:xfrm>
-          <a:prstGeom prst="rect">
-            <a:avLst/>
-          </a:prstGeom>
-          <a:noFill/>
-        </p:spPr>
-        <p:txBody>
-          <a:bodyPr wrap="square" lIns="36576" tIns="36576" rIns="36576" bIns="36576" anchor="t">
-            <a:spAutoFit/>
-          </a:bodyPr>
-          <a:lstStyle/>
-          <a:p>
-            <a:r>
-              <a:rPr sz="2000" b="1">
+          <p:cNvPr id="15" name="TextBox 14"/>
+          <p:cNvSpPr txBox="1"/>
+          <p:nvPr/>
+        </p:nvSpPr>
+        <p:spPr>
+          <a:xfrm>
+            <a:off x="896112" y="5952744"/>
+            <a:ext cx="10332720" cy="228600"/>
+          </a:xfrm>
+          <a:prstGeom prst="rect">
+            <a:avLst/>
+          </a:prstGeom>
+          <a:noFill/>
+        </p:spPr>
+        <p:txBody>
+          <a:bodyPr wrap="square" lIns="36576" tIns="36576" rIns="36576" bIns="36576" anchor="t">
+            <a:spAutoFit/>
+          </a:bodyPr>
+          <a:lstStyle/>
+          <a:p>
+            <a:r>
+              <a:rPr sz="1000" b="1">
                 <a:solidFill>
                   <a:srgbClr val="FFBE69"/>
                 </a:solidFill>
                 <a:latin typeface="Aptos"/>
               </a:rPr>
-              <a:t>Honest boundary</a:t>
-            </a:r>
-          </a:p>
-        </p:txBody>
-      </p:sp>
-      <p:sp>
-        <p:nvSpPr>
-          <p:cNvPr id="11" name="TextBox 10"/>
-          <p:cNvSpPr txBox="1"/>
-          <p:nvPr/>
-        </p:nvSpPr>
-        <p:spPr>
-          <a:xfrm>
-            <a:off x="6492240" y="2331720"/>
-            <a:ext cx="4526280" cy="2926080"/>
-          </a:xfrm>
-          <a:prstGeom prst="rect">
-            <a:avLst/>
-          </a:prstGeom>
-          <a:noFill/>
-        </p:spPr>
-        <p:txBody>
-          <a:bodyPr wrap="square" lIns="18288" tIns="18288" rIns="36576" bIns="18288">
-            <a:spAutoFit/>
-          </a:bodyPr>
-          <a:lstStyle/>
-          <a:p>
-            <a:pPr>
-              <a:spcAft>
-                <a:spcPts val="900"/>
-              </a:spcAft>
-              <a:defRPr sz="1400">
-                <a:solidFill>
-                  <a:srgbClr val="F3F7FC"/>
-                </a:solidFill>
-                <a:latin typeface="Aptos"/>
-              </a:defRPr>
-            </a:pPr>
-            <a:r>
-              <a:t>•  The CI workflow deploys to kind for smoke tests.</a:t>
-            </a:r>
-          </a:p>
-          <a:p>
-            <a:pPr>
-              <a:spcAft>
-                <a:spcPts val="900"/>
-              </a:spcAft>
-              <a:defRPr sz="1400">
-                <a:solidFill>
-                  <a:srgbClr val="F3F7FC"/>
-                </a:solidFill>
-                <a:latin typeface="Aptos"/>
-              </a:defRPr>
-            </a:pPr>
-            <a:r>
-              <a:t>•  Kubernetes screenshots show local cluster runs.</a:t>
-            </a:r>
-          </a:p>
-          <a:p>
-            <a:pPr>
-              <a:spcAft>
-                <a:spcPts val="900"/>
-              </a:spcAft>
-              <a:defRPr sz="1400">
-                <a:solidFill>
-                  <a:srgbClr val="F3F7FC"/>
-                </a:solidFill>
-                <a:latin typeface="Aptos"/>
-              </a:defRPr>
-            </a:pPr>
-            <a:r>
-              <a:t>•  Terraform screenshots show validation and Moto-backed testing.</a:t>
-            </a:r>
-          </a:p>
-          <a:p>
-            <a:pPr>
-              <a:spcAft>
-                <a:spcPts val="900"/>
-              </a:spcAft>
-              <a:defRPr sz="1400">
-                <a:solidFill>
-                  <a:srgbClr val="F3F7FC"/>
-                </a:solidFill>
-                <a:latin typeface="Aptos"/>
-              </a:defRPr>
-            </a:pPr>
-            <a:r>
-              <a:t>•  No live AWS account/EKS deployment is evidenced by these screenshots.</a:t>
-            </a:r>
-          </a:p>
-          <a:p>
-            <a:pPr>
-              <a:spcAft>
-                <a:spcPts val="900"/>
-              </a:spcAft>
-              <a:defRPr sz="1400">
-                <a:solidFill>
-                  <a:srgbClr val="F3F7FC"/>
-                </a:solidFill>
-                <a:latin typeface="Aptos"/>
-              </a:defRPr>
-            </a:pPr>
-            <a:r>
-              <a:t>•  This separation avoids claiming a cloud deployment that was not demonstrated.</a:t>
-            </a:r>
-          </a:p>
-        </p:txBody>
-      </p:sp>
-      <p:sp>
-        <p:nvSpPr>
-          <p:cNvPr id="12" name="TextBox 11"/>
-          <p:cNvSpPr txBox="1"/>
-          <p:nvPr/>
-        </p:nvSpPr>
-        <p:spPr>
-          <a:xfrm>
-            <a:off x="777240" y="6080760"/>
-            <a:ext cx="10698480" cy="228600"/>
-          </a:xfrm>
-          <a:prstGeom prst="rect">
-            <a:avLst/>
-          </a:prstGeom>
-          <a:noFill/>
-        </p:spPr>
-        <p:txBody>
-          <a:bodyPr wrap="square" lIns="36576" tIns="36576" rIns="36576" bIns="36576" anchor="t">
-            <a:spAutoFit/>
-          </a:bodyPr>
-          <a:lstStyle/>
-          <a:p>
-            <a:r>
-              <a:rPr sz="1100" b="0">
-                <a:solidFill>
-                  <a:srgbClr val="ADBBCF"/>
-                </a:solidFill>
-                <a:latin typeface="Aptos"/>
-              </a:rPr>
-              <a:t>Repository: github.com/tarun250/hostel_management  •  README includes setup, screenshots and operational commands.</a:t>
+              <a:t>Important scope note: README states Terraform was exercised against Moto mock services; this is not proof of a live AWS EKS deployment.</a:t>
             </a:r>
           </a:p>
         </p:txBody>
@@ -8498,14 +8382,82 @@
       </p:grpSpPr>
       <p:sp>
         <p:nvSpPr>
-          <p:cNvPr id="2" name="Rectangle 1"/>
+          <p:cNvPr id="2" name="TextBox 1"/>
+          <p:cNvSpPr txBox="1"/>
+          <p:nvPr/>
+        </p:nvSpPr>
+        <p:spPr>
+          <a:xfrm>
+            <a:off x="566928" y="292608"/>
+            <a:ext cx="10881360" cy="274320"/>
+          </a:xfrm>
+          <a:prstGeom prst="rect">
+            <a:avLst/>
+          </a:prstGeom>
+          <a:noFill/>
+        </p:spPr>
+        <p:txBody>
+          <a:bodyPr wrap="square" lIns="36576" tIns="36576" rIns="36576" bIns="36576" anchor="t">
+            <a:spAutoFit/>
+          </a:bodyPr>
+          <a:lstStyle/>
+          <a:p>
+            <a:r>
+              <a:rPr sz="1000" b="1">
+                <a:solidFill>
+                  <a:srgbClr val="45D3E6"/>
+                </a:solidFill>
+                <a:latin typeface="Aptos"/>
+              </a:rPr>
+              <a:t>15 / SUMMARY</a:t>
+            </a:r>
+          </a:p>
+        </p:txBody>
+      </p:sp>
+      <p:sp>
+        <p:nvSpPr>
+          <p:cNvPr id="3" name="TextBox 2"/>
+          <p:cNvSpPr txBox="1"/>
+          <p:nvPr/>
+        </p:nvSpPr>
+        <p:spPr>
+          <a:xfrm>
+            <a:off x="566928" y="621792"/>
+            <a:ext cx="10972800" cy="502920"/>
+          </a:xfrm>
+          <a:prstGeom prst="rect">
+            <a:avLst/>
+          </a:prstGeom>
+          <a:noFill/>
+        </p:spPr>
+        <p:txBody>
+          <a:bodyPr wrap="square" lIns="36576" tIns="36576" rIns="36576" bIns="36576" anchor="t">
+            <a:spAutoFit/>
+          </a:bodyPr>
+          <a:lstStyle/>
+          <a:p>
+            <a:r>
+              <a:rPr sz="2700" b="1">
+                <a:solidFill>
+                  <a:srgbClr val="F3F7FC"/>
+                </a:solidFill>
+                <a:latin typeface="Aptos"/>
+              </a:rPr>
+              <a:t>What was demonstrated</a:t>
+            </a:r>
+          </a:p>
+        </p:txBody>
+      </p:sp>
+      <p:sp>
+        <p:nvSpPr>
+          <p:cNvPr id="4" name="Rectangle 3"/>
           <p:cNvSpPr/>
           <p:nvPr/>
         </p:nvSpPr>
         <p:spPr>
           <a:xfrm>
-            <a:off x="0" y="0"/>
-            <a:ext cx="146304" cy="6858000"/>
+            <a:off x="566928" y="1207008"/>
+            <a:ext cx="914400" cy="41148"/>
           </a:xfrm>
           <a:prstGeom prst="rect">
             <a:avLst/>
@@ -8542,98 +8494,390 @@
       </p:sp>
       <p:sp>
         <p:nvSpPr>
-          <p:cNvPr id="3" name="TextBox 2"/>
-          <p:cNvSpPr txBox="1"/>
-          <p:nvPr/>
-        </p:nvSpPr>
-        <p:spPr>
-          <a:xfrm>
-            <a:off x="822960" y="914400"/>
-            <a:ext cx="10515600" cy="685800"/>
-          </a:xfrm>
-          <a:prstGeom prst="rect">
-            <a:avLst/>
-          </a:prstGeom>
-          <a:noFill/>
-        </p:spPr>
-        <p:txBody>
-          <a:bodyPr wrap="square" lIns="36576" tIns="36576" rIns="36576" bIns="36576" anchor="t">
-            <a:spAutoFit/>
-          </a:bodyPr>
-          <a:lstStyle/>
-          <a:p>
-            <a:r>
-              <a:rPr sz="3800" b="1">
+          <p:cNvPr id="5" name="TextBox 4"/>
+          <p:cNvSpPr txBox="1"/>
+          <p:nvPr/>
+        </p:nvSpPr>
+        <p:spPr>
+          <a:xfrm>
+            <a:off x="11109960" y="6510528"/>
+            <a:ext cx="502920" cy="182880"/>
+          </a:xfrm>
+          <a:prstGeom prst="rect">
+            <a:avLst/>
+          </a:prstGeom>
+          <a:noFill/>
+        </p:spPr>
+        <p:txBody>
+          <a:bodyPr wrap="square" lIns="36576" tIns="36576" rIns="36576" bIns="36576" anchor="t">
+            <a:spAutoFit/>
+          </a:bodyPr>
+          <a:lstStyle/>
+          <a:p>
+            <a:pPr algn="r"/>
+            <a:r>
+              <a:rPr sz="900" b="1">
+                <a:solidFill>
+                  <a:srgbClr val="ADBBCF"/>
+                </a:solidFill>
+                <a:latin typeface="Aptos"/>
+              </a:rPr>
+              <a:t>17</a:t>
+            </a:r>
+          </a:p>
+        </p:txBody>
+      </p:sp>
+      <p:sp>
+        <p:nvSpPr>
+          <p:cNvPr id="6" name="Rounded Rectangle 5"/>
+          <p:cNvSpPr/>
+          <p:nvPr/>
+        </p:nvSpPr>
+        <p:spPr>
+          <a:xfrm>
+            <a:off x="685800" y="1508760"/>
+            <a:ext cx="5257800" cy="4297680"/>
+          </a:xfrm>
+          <a:prstGeom prst="roundRect">
+            <a:avLst>
+              <a:gd name="adj" fmla="val 12000"/>
+            </a:avLst>
+          </a:prstGeom>
+          <a:solidFill>
+            <a:srgbClr val="172237"/>
+          </a:solidFill>
+          <a:ln>
+            <a:noFill/>
+          </a:ln>
+        </p:spPr>
+        <p:style>
+          <a:lnRef idx="1">
+            <a:schemeClr val="accent1"/>
+          </a:lnRef>
+          <a:fillRef idx="3">
+            <a:schemeClr val="accent1"/>
+          </a:fillRef>
+          <a:effectRef idx="2">
+            <a:schemeClr val="accent1"/>
+          </a:effectRef>
+          <a:fontRef idx="minor">
+            <a:schemeClr val="lt1"/>
+          </a:fontRef>
+        </p:style>
+        <p:txBody>
+          <a:bodyPr rtlCol="0" anchor="ctr"/>
+          <a:lstStyle/>
+          <a:p>
+            <a:pPr algn="ctr"/>
+            <a:endParaRPr/>
+          </a:p>
+        </p:txBody>
+      </p:sp>
+      <p:sp>
+        <p:nvSpPr>
+          <p:cNvPr id="7" name="TextBox 6"/>
+          <p:cNvSpPr txBox="1"/>
+          <p:nvPr/>
+        </p:nvSpPr>
+        <p:spPr>
+          <a:xfrm>
+            <a:off x="914400" y="1783080"/>
+            <a:ext cx="4572000" cy="320040"/>
+          </a:xfrm>
+          <a:prstGeom prst="rect">
+            <a:avLst/>
+          </a:prstGeom>
+          <a:noFill/>
+        </p:spPr>
+        <p:txBody>
+          <a:bodyPr wrap="square" lIns="36576" tIns="36576" rIns="36576" bIns="36576" anchor="t">
+            <a:spAutoFit/>
+          </a:bodyPr>
+          <a:lstStyle/>
+          <a:p>
+            <a:r>
+              <a:rPr sz="2000" b="1">
+                <a:solidFill>
+                  <a:srgbClr val="70E0AA"/>
+                </a:solidFill>
+                <a:latin typeface="Aptos"/>
+              </a:rPr>
+              <a:t>Delivered</a:t>
+            </a:r>
+          </a:p>
+        </p:txBody>
+      </p:sp>
+      <p:sp>
+        <p:nvSpPr>
+          <p:cNvPr id="8" name="TextBox 7"/>
+          <p:cNvSpPr txBox="1"/>
+          <p:nvPr/>
+        </p:nvSpPr>
+        <p:spPr>
+          <a:xfrm>
+            <a:off x="914400" y="2331720"/>
+            <a:ext cx="4526280" cy="2926080"/>
+          </a:xfrm>
+          <a:prstGeom prst="rect">
+            <a:avLst/>
+          </a:prstGeom>
+          <a:noFill/>
+        </p:spPr>
+        <p:txBody>
+          <a:bodyPr wrap="square" lIns="18288" tIns="18288" rIns="36576" bIns="18288">
+            <a:spAutoFit/>
+          </a:bodyPr>
+          <a:lstStyle/>
+          <a:p>
+            <a:pPr>
+              <a:spcAft>
+                <a:spcPts val="1400"/>
+              </a:spcAft>
+              <a:defRPr sz="1400">
                 <a:solidFill>
                   <a:srgbClr val="F3F7FC"/>
                 </a:solidFill>
                 <a:latin typeface="Aptos"/>
-              </a:rPr>
-              <a:t>Thank you</a:t>
-            </a:r>
-          </a:p>
-        </p:txBody>
-      </p:sp>
-      <p:sp>
-        <p:nvSpPr>
-          <p:cNvPr id="4" name="TextBox 3"/>
-          <p:cNvSpPr txBox="1"/>
-          <p:nvPr/>
-        </p:nvSpPr>
-        <p:spPr>
-          <a:xfrm>
-            <a:off x="868680" y="1828800"/>
-            <a:ext cx="9875520" cy="502920"/>
-          </a:xfrm>
-          <a:prstGeom prst="rect">
-            <a:avLst/>
-          </a:prstGeom>
-          <a:noFill/>
-        </p:spPr>
-        <p:txBody>
-          <a:bodyPr wrap="square" lIns="36576" tIns="36576" rIns="36576" bIns="36576" anchor="t">
-            <a:spAutoFit/>
-          </a:bodyPr>
-          <a:lstStyle/>
-          <a:p>
-            <a:r>
-              <a:rPr sz="2000" b="0">
+              </a:defRPr>
+            </a:pPr>
+            <a:r>
+              <a:rPr sz="2000"/>
+              <a:t>•  Working UI + REST API, 22 tests</a:t>
+            </a:r>
+          </a:p>
+          <a:p>
+            <a:pPr>
+              <a:spcAft>
+                <a:spcPts val="1400"/>
+              </a:spcAft>
+              <a:defRPr sz="1400">
+                <a:solidFill>
+                  <a:srgbClr val="F3F7FC"/>
+                </a:solidFill>
+                <a:latin typeface="Aptos"/>
+              </a:defRPr>
+            </a:pPr>
+            <a:r>
+              <a:rPr sz="2000"/>
+              <a:t>•  CI: test → build → Trivy → GHCR</a:t>
+            </a:r>
+          </a:p>
+          <a:p>
+            <a:pPr>
+              <a:spcAft>
+                <a:spcPts val="1400"/>
+              </a:spcAft>
+              <a:defRPr sz="1400">
+                <a:solidFill>
+                  <a:srgbClr val="F3F7FC"/>
+                </a:solidFill>
+                <a:latin typeface="Aptos"/>
+              </a:defRPr>
+            </a:pPr>
+            <a:r>
+              <a:rPr sz="2000"/>
+              <a:t>•  Helm on Kubernetes, Argo CD GitOps</a:t>
+            </a:r>
+          </a:p>
+          <a:p>
+            <a:pPr>
+              <a:spcAft>
+                <a:spcPts val="1400"/>
+              </a:spcAft>
+              <a:defRPr sz="1400">
+                <a:solidFill>
+                  <a:srgbClr val="F3F7FC"/>
+                </a:solidFill>
+                <a:latin typeface="Aptos"/>
+              </a:defRPr>
+            </a:pPr>
+            <a:r>
+              <a:rPr sz="2000"/>
+              <a:t>•  Prometheus + Grafana, Terraform VPC + EKS</a:t>
+            </a:r>
+          </a:p>
+        </p:txBody>
+      </p:sp>
+      <p:sp>
+        <p:nvSpPr>
+          <p:cNvPr id="9" name="Rounded Rectangle 8"/>
+          <p:cNvSpPr/>
+          <p:nvPr/>
+        </p:nvSpPr>
+        <p:spPr>
+          <a:xfrm>
+            <a:off x="6263640" y="1508760"/>
+            <a:ext cx="5212080" cy="4297680"/>
+          </a:xfrm>
+          <a:prstGeom prst="roundRect">
+            <a:avLst>
+              <a:gd name="adj" fmla="val 12000"/>
+            </a:avLst>
+          </a:prstGeom>
+          <a:solidFill>
+            <a:srgbClr val="172237"/>
+          </a:solidFill>
+          <a:ln>
+            <a:noFill/>
+          </a:ln>
+        </p:spPr>
+        <p:style>
+          <a:lnRef idx="1">
+            <a:schemeClr val="accent1"/>
+          </a:lnRef>
+          <a:fillRef idx="3">
+            <a:schemeClr val="accent1"/>
+          </a:fillRef>
+          <a:effectRef idx="2">
+            <a:schemeClr val="accent1"/>
+          </a:effectRef>
+          <a:fontRef idx="minor">
+            <a:schemeClr val="lt1"/>
+          </a:fontRef>
+        </p:style>
+        <p:txBody>
+          <a:bodyPr rtlCol="0" anchor="ctr"/>
+          <a:lstStyle/>
+          <a:p>
+            <a:pPr algn="ctr"/>
+            <a:endParaRPr/>
+          </a:p>
+        </p:txBody>
+      </p:sp>
+      <p:sp>
+        <p:nvSpPr>
+          <p:cNvPr id="10" name="TextBox 9"/>
+          <p:cNvSpPr txBox="1"/>
+          <p:nvPr/>
+        </p:nvSpPr>
+        <p:spPr>
+          <a:xfrm>
+            <a:off x="6492240" y="1783080"/>
+            <a:ext cx="4572000" cy="320040"/>
+          </a:xfrm>
+          <a:prstGeom prst="rect">
+            <a:avLst/>
+          </a:prstGeom>
+          <a:noFill/>
+        </p:spPr>
+        <p:txBody>
+          <a:bodyPr wrap="square" lIns="36576" tIns="36576" rIns="36576" bIns="36576" anchor="t">
+            <a:spAutoFit/>
+          </a:bodyPr>
+          <a:lstStyle/>
+          <a:p>
+            <a:r>
+              <a:rPr sz="2000" b="1">
+                <a:solidFill>
+                  <a:srgbClr val="FFBE69"/>
+                </a:solidFill>
+                <a:latin typeface="Aptos"/>
+              </a:rPr>
+              <a:t>Honest boundary</a:t>
+            </a:r>
+          </a:p>
+        </p:txBody>
+      </p:sp>
+      <p:sp>
+        <p:nvSpPr>
+          <p:cNvPr id="11" name="TextBox 10"/>
+          <p:cNvSpPr txBox="1"/>
+          <p:nvPr/>
+        </p:nvSpPr>
+        <p:spPr>
+          <a:xfrm>
+            <a:off x="6492240" y="2331720"/>
+            <a:ext cx="4526280" cy="2926080"/>
+          </a:xfrm>
+          <a:prstGeom prst="rect">
+            <a:avLst/>
+          </a:prstGeom>
+          <a:noFill/>
+        </p:spPr>
+        <p:txBody>
+          <a:bodyPr wrap="square" lIns="18288" tIns="18288" rIns="36576" bIns="18288">
+            <a:spAutoFit/>
+          </a:bodyPr>
+          <a:lstStyle/>
+          <a:p>
+            <a:pPr>
+              <a:spcAft>
+                <a:spcPts val="1400"/>
+              </a:spcAft>
+              <a:defRPr sz="1400">
+                <a:solidFill>
+                  <a:srgbClr val="F3F7FC"/>
+                </a:solidFill>
+                <a:latin typeface="Aptos"/>
+              </a:defRPr>
+            </a:pPr>
+            <a:r>
+              <a:rPr sz="2000"/>
+              <a:t>•  Kubernetes runs on minikube and kind</a:t>
+            </a:r>
+          </a:p>
+          <a:p>
+            <a:pPr>
+              <a:spcAft>
+                <a:spcPts val="1400"/>
+              </a:spcAft>
+              <a:defRPr sz="1400">
+                <a:solidFill>
+                  <a:srgbClr val="F3F7FC"/>
+                </a:solidFill>
+                <a:latin typeface="Aptos"/>
+              </a:defRPr>
+            </a:pPr>
+            <a:r>
+              <a:rPr sz="2000"/>
+              <a:t>•  Terraform tested against mock AWS (Moto)</a:t>
+            </a:r>
+          </a:p>
+          <a:p>
+            <a:pPr>
+              <a:spcAft>
+                <a:spcPts val="1400"/>
+              </a:spcAft>
+              <a:defRPr sz="1400">
+                <a:solidFill>
+                  <a:srgbClr val="F3F7FC"/>
+                </a:solidFill>
+                <a:latin typeface="Aptos"/>
+              </a:defRPr>
+            </a:pPr>
+            <a:r>
+              <a:rPr sz="2000"/>
+              <a:t>•  No real AWS account was used</a:t>
+            </a:r>
+          </a:p>
+        </p:txBody>
+      </p:sp>
+      <p:sp>
+        <p:nvSpPr>
+          <p:cNvPr id="12" name="TextBox 11"/>
+          <p:cNvSpPr txBox="1"/>
+          <p:nvPr/>
+        </p:nvSpPr>
+        <p:spPr>
+          <a:xfrm>
+            <a:off x="777240" y="6080760"/>
+            <a:ext cx="10698480" cy="228600"/>
+          </a:xfrm>
+          <a:prstGeom prst="rect">
+            <a:avLst/>
+          </a:prstGeom>
+          <a:noFill/>
+        </p:spPr>
+        <p:txBody>
+          <a:bodyPr wrap="square" lIns="36576" tIns="36576" rIns="36576" bIns="36576" anchor="t">
+            <a:spAutoFit/>
+          </a:bodyPr>
+          <a:lstStyle/>
+          <a:p>
+            <a:r>
+              <a:rPr sz="1100" b="0">
                 <a:solidFill>
                   <a:srgbClr val="ADBBCF"/>
-                </a:solidFill>
-                <a:latin typeface="Aptos"/>
-              </a:rPr>
-              <a:t>HostelHub — a full-stack application with an automated DevOps delivery path.</a:t>
-            </a:r>
-          </a:p>
-        </p:txBody>
-      </p:sp>
-      <p:sp>
-        <p:nvSpPr>
-          <p:cNvPr id="7" name="TextBox 6"/>
-          <p:cNvSpPr txBox="1"/>
-          <p:nvPr/>
-        </p:nvSpPr>
-        <p:spPr>
-          <a:xfrm>
-            <a:off x="868680" y="5989320"/>
-            <a:ext cx="10241280" cy="320040"/>
-          </a:xfrm>
-          <a:prstGeom prst="rect">
-            <a:avLst/>
-          </a:prstGeom>
-          <a:noFill/>
-        </p:spPr>
-        <p:txBody>
-          <a:bodyPr wrap="square" lIns="36576" tIns="36576" rIns="36576" bIns="36576" anchor="t">
-            <a:spAutoFit/>
-          </a:bodyPr>
-          <a:lstStyle/>
-          <a:p>
-            <a:r>
-              <a:rPr sz="1300" b="0">
-                <a:solidFill>
-                  <a:srgbClr val="F3F7FC"/>
                 </a:solidFill>
                 <a:latin typeface="Aptos"/>
               </a:rPr>
@@ -8651,7 +8895,7 @@
 </file>
 
 <file path=ppt/slides/slide19.xml><?xml version="1.0" encoding="utf-8"?>
-<p:sld xmlns:a="http://schemas.openxmlformats.org/drawingml/2006/main" xmlns:p="http://schemas.openxmlformats.org/presentationml/2006/main" xmlns:r="http://schemas.openxmlformats.org/officeDocument/2006/relationships">
+<p:sld xmlns:a="http://schemas.openxmlformats.org/drawingml/2006/main" xmlns:r="http://schemas.openxmlformats.org/officeDocument/2006/relationships" xmlns:p="http://schemas.openxmlformats.org/presentationml/2006/main">
   <p:cSld>
     <p:bg>
       <p:bgPr>
@@ -8667,85 +8911,24 @@
         <p:cNvGrpSpPr/>
         <p:nvPr/>
       </p:nvGrpSpPr>
-      <p:grpSpPr/>
-      <p:sp>
-        <p:nvSpPr>
-          <p:cNvPr id="2" name="TextBox 1"/>
-          <p:cNvSpPr txBox="1"/>
-          <p:nvPr/>
-        </p:nvSpPr>
-        <p:spPr>
-          <a:xfrm>
-            <a:off x="566928" y="292608"/>
-            <a:ext cx="10881360" cy="274320"/>
-          </a:xfrm>
-          <a:prstGeom prst="rect">
-            <a:avLst/>
-          </a:prstGeom>
-          <a:noFill/>
-        </p:spPr>
-        <p:txBody>
-          <a:bodyPr wrap="square" lIns="36576" tIns="36576" rIns="36576" bIns="36576" anchor="t">
-            <a:spAutoFit/>
-          </a:bodyPr>
-          <a:lstStyle/>
-          <a:p>
-            <a:r>
-              <a:rPr sz="1000" b="1">
-                <a:solidFill>
-                  <a:srgbClr val="45D3E6"/>
-                </a:solidFill>
-                <a:latin typeface="Aptos"/>
-              </a:rPr>
-              <a:t>04 / STACK RATIONALE</a:t>
-            </a:r>
-          </a:p>
-        </p:txBody>
-      </p:sp>
-      <p:sp>
-        <p:nvSpPr>
-          <p:cNvPr id="3" name="TextBox 2"/>
-          <p:cNvSpPr txBox="1"/>
-          <p:nvPr/>
-        </p:nvSpPr>
-        <p:spPr>
-          <a:xfrm>
-            <a:off x="566928" y="621792"/>
-            <a:ext cx="10972800" cy="502920"/>
-          </a:xfrm>
-          <a:prstGeom prst="rect">
-            <a:avLst/>
-          </a:prstGeom>
-          <a:noFill/>
-        </p:spPr>
-        <p:txBody>
-          <a:bodyPr wrap="square" lIns="36576" tIns="36576" rIns="36576" bIns="36576" anchor="t">
-            <a:spAutoFit/>
-          </a:bodyPr>
-          <a:lstStyle/>
-          <a:p>
-            <a:r>
-              <a:rPr sz="2700" b="1">
-                <a:solidFill>
-                  <a:srgbClr val="F3F7FC"/>
-                </a:solidFill>
-                <a:latin typeface="Aptos"/>
-              </a:rPr>
-              <a:t>Alternatives considered</a:t>
-            </a:r>
-          </a:p>
-        </p:txBody>
-      </p:sp>
-      <p:sp>
-        <p:nvSpPr>
-          <p:cNvPr id="4" name="Rectangle 3"/>
+      <p:grpSpPr>
+        <a:xfrm>
+          <a:off x="0" y="0"/>
+          <a:ext cx="0" cy="0"/>
+          <a:chOff x="0" y="0"/>
+          <a:chExt cx="0" cy="0"/>
+        </a:xfrm>
+      </p:grpSpPr>
+      <p:sp>
+        <p:nvSpPr>
+          <p:cNvPr id="2" name="Rectangle 1"/>
           <p:cNvSpPr/>
           <p:nvPr/>
         </p:nvSpPr>
         <p:spPr>
           <a:xfrm>
-            <a:off x="566928" y="1207008"/>
-            <a:ext cx="914400" cy="41148"/>
+            <a:off x="0" y="0"/>
+            <a:ext cx="146304" cy="6858000"/>
           </a:xfrm>
           <a:prstGeom prst="rect">
             <a:avLst/>
@@ -8782,82 +8965,69 @@
       </p:sp>
       <p:sp>
         <p:nvSpPr>
-          <p:cNvPr id="5" name="TextBox 4"/>
-          <p:cNvSpPr txBox="1"/>
-          <p:nvPr/>
-        </p:nvSpPr>
-        <p:spPr>
-          <a:xfrm>
-            <a:off x="11109960" y="6510528"/>
-            <a:ext cx="502920" cy="182880"/>
-          </a:xfrm>
-          <a:prstGeom prst="rect">
-            <a:avLst/>
-          </a:prstGeom>
-          <a:noFill/>
-        </p:spPr>
-        <p:txBody>
-          <a:bodyPr wrap="square" lIns="36576" tIns="36576" rIns="36576" bIns="36576" anchor="t">
-            <a:spAutoFit/>
-          </a:bodyPr>
-          <a:lstStyle/>
-          <a:p>
-            <a:pPr algn="r"/>
-            <a:r>
-              <a:rPr sz="900" b="1">
+          <p:cNvPr id="3" name="TextBox 2"/>
+          <p:cNvSpPr txBox="1"/>
+          <p:nvPr/>
+        </p:nvSpPr>
+        <p:spPr>
+          <a:xfrm>
+            <a:off x="822960" y="914400"/>
+            <a:ext cx="10515600" cy="685800"/>
+          </a:xfrm>
+          <a:prstGeom prst="rect">
+            <a:avLst/>
+          </a:prstGeom>
+          <a:noFill/>
+        </p:spPr>
+        <p:txBody>
+          <a:bodyPr wrap="square" lIns="36576" tIns="36576" rIns="36576" bIns="36576" anchor="t">
+            <a:spAutoFit/>
+          </a:bodyPr>
+          <a:lstStyle/>
+          <a:p>
+            <a:r>
+              <a:rPr sz="3800" b="1">
+                <a:solidFill>
+                  <a:srgbClr val="F3F7FC"/>
+                </a:solidFill>
+                <a:latin typeface="Aptos"/>
+              </a:rPr>
+              <a:t>Thank you</a:t>
+            </a:r>
+          </a:p>
+        </p:txBody>
+      </p:sp>
+      <p:sp>
+        <p:nvSpPr>
+          <p:cNvPr id="4" name="TextBox 3"/>
+          <p:cNvSpPr txBox="1"/>
+          <p:nvPr/>
+        </p:nvSpPr>
+        <p:spPr>
+          <a:xfrm>
+            <a:off x="868680" y="1828800"/>
+            <a:ext cx="9875520" cy="502920"/>
+          </a:xfrm>
+          <a:prstGeom prst="rect">
+            <a:avLst/>
+          </a:prstGeom>
+          <a:noFill/>
+        </p:spPr>
+        <p:txBody>
+          <a:bodyPr wrap="square" lIns="36576" tIns="36576" rIns="36576" bIns="36576" anchor="t">
+            <a:spAutoFit/>
+          </a:bodyPr>
+          <a:lstStyle/>
+          <a:p>
+            <a:r>
+              <a:rPr sz="2000" b="0">
                 <a:solidFill>
                   <a:srgbClr val="ADBBCF"/>
                 </a:solidFill>
                 <a:latin typeface="Aptos"/>
               </a:rPr>
-              <a:t>06</a:t>
-            </a:r>
-          </a:p>
-        </p:txBody>
-      </p:sp>
-      <p:sp>
-        <p:nvSpPr>
-          <p:cNvPr id="6" name="Rounded Rectangle 5"/>
-          <p:cNvSpPr/>
-          <p:nvPr/>
-        </p:nvSpPr>
-        <p:spPr>
-          <a:xfrm>
-            <a:off x="658368" y="1444752"/>
-            <a:ext cx="2514600" cy="475488"/>
-          </a:xfrm>
-          <a:prstGeom prst="roundRect">
-            <a:avLst>
-              <a:gd name="adj" fmla="val 12000"/>
-            </a:avLst>
-          </a:prstGeom>
-          <a:solidFill>
-            <a:srgbClr val="1D2B44"/>
-          </a:solidFill>
-          <a:ln>
-            <a:noFill/>
-          </a:ln>
-        </p:spPr>
-        <p:style>
-          <a:lnRef idx="1">
-            <a:schemeClr val="accent1"/>
-          </a:lnRef>
-          <a:fillRef idx="3">
-            <a:schemeClr val="accent1"/>
-          </a:fillRef>
-          <a:effectRef idx="2">
-            <a:schemeClr val="accent1"/>
-          </a:effectRef>
-          <a:fontRef idx="minor">
-            <a:schemeClr val="lt1"/>
-          </a:fontRef>
-        </p:style>
-        <p:txBody>
-          <a:bodyPr rtlCol="0" anchor="ctr"/>
-          <a:lstStyle/>
-          <a:p>
-            <a:pPr algn="ctr"/>
-            <a:endParaRPr/>
+              <a:t>HostelHub — a full-stack application with an automated DevOps delivery path.</a:t>
+            </a:r>
           </a:p>
         </p:txBody>
       </p:sp>
@@ -8869,42 +9039,8 @@
         </p:nvSpPr>
         <p:spPr>
           <a:xfrm>
-            <a:off x="804672" y="1527048"/>
-            <a:ext cx="2240280" cy="256032"/>
-          </a:xfrm>
-          <a:prstGeom prst="rect">
-            <a:avLst/>
-          </a:prstGeom>
-          <a:noFill/>
-        </p:spPr>
-        <p:txBody>
-          <a:bodyPr wrap="square" lIns="36576" tIns="36576" rIns="36576" bIns="36576" anchor="t">
-            <a:spAutoFit/>
-          </a:bodyPr>
-          <a:lstStyle/>
-          <a:p>
-            <a:r>
-              <a:rPr sz="1200" b="1">
-                <a:solidFill>
-                  <a:srgbClr val="45D3E6"/>
-                </a:solidFill>
-                <a:latin typeface="Aptos"/>
-              </a:rPr>
-              <a:t>FastAPI</a:t>
-            </a:r>
-          </a:p>
-        </p:txBody>
-      </p:sp>
-      <p:sp>
-        <p:nvSpPr>
-          <p:cNvPr id="8" name="TextBox 7"/>
-          <p:cNvSpPr txBox="1"/>
-          <p:nvPr/>
-        </p:nvSpPr>
-        <p:spPr>
-          <a:xfrm>
-            <a:off x="3429000" y="1508760"/>
-            <a:ext cx="7909560" cy="310896"/>
+            <a:off x="868680" y="5989320"/>
+            <a:ext cx="10241280" cy="320040"/>
           </a:xfrm>
           <a:prstGeom prst="rect">
             <a:avLst/>
@@ -8924,691 +9060,7 @@
                 </a:solidFill>
                 <a:latin typeface="Aptos"/>
               </a:rPr>
-              <a:t>over Flask / Django: typed validation and Swagger docs built in</a:t>
-            </a:r>
-          </a:p>
-        </p:txBody>
-      </p:sp>
-      <p:sp>
-        <p:nvSpPr>
-          <p:cNvPr id="9" name="Rounded Rectangle 8"/>
-          <p:cNvSpPr/>
-          <p:nvPr/>
-        </p:nvSpPr>
-        <p:spPr>
-          <a:xfrm>
-            <a:off x="658368" y="2075688"/>
-            <a:ext cx="2514600" cy="475488"/>
-          </a:xfrm>
-          <a:prstGeom prst="roundRect">
-            <a:avLst>
-              <a:gd name="adj" fmla="val 12000"/>
-            </a:avLst>
-          </a:prstGeom>
-          <a:solidFill>
-            <a:srgbClr val="1D2B44"/>
-          </a:solidFill>
-          <a:ln>
-            <a:noFill/>
-          </a:ln>
-        </p:spPr>
-        <p:style>
-          <a:lnRef idx="1">
-            <a:schemeClr val="accent1"/>
-          </a:lnRef>
-          <a:fillRef idx="3">
-            <a:schemeClr val="accent1"/>
-          </a:fillRef>
-          <a:effectRef idx="2">
-            <a:schemeClr val="accent1"/>
-          </a:effectRef>
-          <a:fontRef idx="minor">
-            <a:schemeClr val="lt1"/>
-          </a:fontRef>
-        </p:style>
-        <p:txBody>
-          <a:bodyPr rtlCol="0" anchor="ctr"/>
-          <a:lstStyle/>
-          <a:p>
-            <a:pPr algn="ctr"/>
-            <a:endParaRPr/>
-          </a:p>
-        </p:txBody>
-      </p:sp>
-      <p:sp>
-        <p:nvSpPr>
-          <p:cNvPr id="10" name="TextBox 9"/>
-          <p:cNvSpPr txBox="1"/>
-          <p:nvPr/>
-        </p:nvSpPr>
-        <p:spPr>
-          <a:xfrm>
-            <a:off x="804672" y="2157984"/>
-            <a:ext cx="2240280" cy="256032"/>
-          </a:xfrm>
-          <a:prstGeom prst="rect">
-            <a:avLst/>
-          </a:prstGeom>
-          <a:noFill/>
-        </p:spPr>
-        <p:txBody>
-          <a:bodyPr wrap="square" lIns="36576" tIns="36576" rIns="36576" bIns="36576" anchor="t">
-            <a:spAutoFit/>
-          </a:bodyPr>
-          <a:lstStyle/>
-          <a:p>
-            <a:r>
-              <a:rPr sz="1200" b="1">
-                <a:solidFill>
-                  <a:srgbClr val="45D3E6"/>
-                </a:solidFill>
-                <a:latin typeface="Aptos"/>
-              </a:rPr>
-              <a:t>React + Vite</a:t>
-            </a:r>
-          </a:p>
-        </p:txBody>
-      </p:sp>
-      <p:sp>
-        <p:nvSpPr>
-          <p:cNvPr id="11" name="TextBox 10"/>
-          <p:cNvSpPr txBox="1"/>
-          <p:nvPr/>
-        </p:nvSpPr>
-        <p:spPr>
-          <a:xfrm>
-            <a:off x="3429000" y="2139696"/>
-            <a:ext cx="7909560" cy="310896"/>
-          </a:xfrm>
-          <a:prstGeom prst="rect">
-            <a:avLst/>
-          </a:prstGeom>
-          <a:noFill/>
-        </p:spPr>
-        <p:txBody>
-          <a:bodyPr wrap="square" lIns="36576" tIns="36576" rIns="36576" bIns="36576" anchor="t">
-            <a:spAutoFit/>
-          </a:bodyPr>
-          <a:lstStyle/>
-          <a:p>
-            <a:r>
-              <a:rPr sz="1300" b="0">
-                <a:solidFill>
-                  <a:srgbClr val="F3F7FC"/>
-                </a:solidFill>
-                <a:latin typeface="Aptos"/>
-              </a:rPr>
-              <a:t>over Angular / plain HTML: lighter, fast dev server</a:t>
-            </a:r>
-          </a:p>
-        </p:txBody>
-      </p:sp>
-      <p:sp>
-        <p:nvSpPr>
-          <p:cNvPr id="12" name="Rounded Rectangle 11"/>
-          <p:cNvSpPr/>
-          <p:nvPr/>
-        </p:nvSpPr>
-        <p:spPr>
-          <a:xfrm>
-            <a:off x="658368" y="2706624"/>
-            <a:ext cx="2514600" cy="475488"/>
-          </a:xfrm>
-          <a:prstGeom prst="roundRect">
-            <a:avLst>
-              <a:gd name="adj" fmla="val 12000"/>
-            </a:avLst>
-          </a:prstGeom>
-          <a:solidFill>
-            <a:srgbClr val="1D2B44"/>
-          </a:solidFill>
-          <a:ln>
-            <a:noFill/>
-          </a:ln>
-        </p:spPr>
-        <p:style>
-          <a:lnRef idx="1">
-            <a:schemeClr val="accent1"/>
-          </a:lnRef>
-          <a:fillRef idx="3">
-            <a:schemeClr val="accent1"/>
-          </a:fillRef>
-          <a:effectRef idx="2">
-            <a:schemeClr val="accent1"/>
-          </a:effectRef>
-          <a:fontRef idx="minor">
-            <a:schemeClr val="lt1"/>
-          </a:fontRef>
-        </p:style>
-        <p:txBody>
-          <a:bodyPr rtlCol="0" anchor="ctr"/>
-          <a:lstStyle/>
-          <a:p>
-            <a:pPr algn="ctr"/>
-            <a:endParaRPr/>
-          </a:p>
-        </p:txBody>
-      </p:sp>
-      <p:sp>
-        <p:nvSpPr>
-          <p:cNvPr id="13" name="TextBox 12"/>
-          <p:cNvSpPr txBox="1"/>
-          <p:nvPr/>
-        </p:nvSpPr>
-        <p:spPr>
-          <a:xfrm>
-            <a:off x="804672" y="2788920"/>
-            <a:ext cx="2240280" cy="256032"/>
-          </a:xfrm>
-          <a:prstGeom prst="rect">
-            <a:avLst/>
-          </a:prstGeom>
-          <a:noFill/>
-        </p:spPr>
-        <p:txBody>
-          <a:bodyPr wrap="square" lIns="36576" tIns="36576" rIns="36576" bIns="36576" anchor="t">
-            <a:spAutoFit/>
-          </a:bodyPr>
-          <a:lstStyle/>
-          <a:p>
-            <a:r>
-              <a:rPr sz="1200" b="1">
-                <a:solidFill>
-                  <a:srgbClr val="45D3E6"/>
-                </a:solidFill>
-                <a:latin typeface="Aptos"/>
-              </a:rPr>
-              <a:t>PostgreSQL</a:t>
-            </a:r>
-          </a:p>
-        </p:txBody>
-      </p:sp>
-      <p:sp>
-        <p:nvSpPr>
-          <p:cNvPr id="14" name="TextBox 13"/>
-          <p:cNvSpPr txBox="1"/>
-          <p:nvPr/>
-        </p:nvSpPr>
-        <p:spPr>
-          <a:xfrm>
-            <a:off x="3429000" y="2770632"/>
-            <a:ext cx="7909560" cy="310896"/>
-          </a:xfrm>
-          <a:prstGeom prst="rect">
-            <a:avLst/>
-          </a:prstGeom>
-          <a:noFill/>
-        </p:spPr>
-        <p:txBody>
-          <a:bodyPr wrap="square" lIns="36576" tIns="36576" rIns="36576" bIns="36576" anchor="t">
-            <a:spAutoFit/>
-          </a:bodyPr>
-          <a:lstStyle/>
-          <a:p>
-            <a:r>
-              <a:rPr sz="1300" b="0">
-                <a:solidFill>
-                  <a:srgbClr val="F3F7FC"/>
-                </a:solidFill>
-                <a:latin typeface="Aptos"/>
-              </a:rPr>
-              <a:t>over MySQL / MongoDB: relational data with strict constraints</a:t>
-            </a:r>
-          </a:p>
-        </p:txBody>
-      </p:sp>
-      <p:sp>
-        <p:nvSpPr>
-          <p:cNvPr id="15" name="Rounded Rectangle 14"/>
-          <p:cNvSpPr/>
-          <p:nvPr/>
-        </p:nvSpPr>
-        <p:spPr>
-          <a:xfrm>
-            <a:off x="658368" y="3337560"/>
-            <a:ext cx="2514600" cy="475488"/>
-          </a:xfrm>
-          <a:prstGeom prst="roundRect">
-            <a:avLst>
-              <a:gd name="adj" fmla="val 12000"/>
-            </a:avLst>
-          </a:prstGeom>
-          <a:solidFill>
-            <a:srgbClr val="1D2B44"/>
-          </a:solidFill>
-          <a:ln>
-            <a:noFill/>
-          </a:ln>
-        </p:spPr>
-        <p:style>
-          <a:lnRef idx="1">
-            <a:schemeClr val="accent1"/>
-          </a:lnRef>
-          <a:fillRef idx="3">
-            <a:schemeClr val="accent1"/>
-          </a:fillRef>
-          <a:effectRef idx="2">
-            <a:schemeClr val="accent1"/>
-          </a:effectRef>
-          <a:fontRef idx="minor">
-            <a:schemeClr val="lt1"/>
-          </a:fontRef>
-        </p:style>
-        <p:txBody>
-          <a:bodyPr rtlCol="0" anchor="ctr"/>
-          <a:lstStyle/>
-          <a:p>
-            <a:pPr algn="ctr"/>
-            <a:endParaRPr/>
-          </a:p>
-        </p:txBody>
-      </p:sp>
-      <p:sp>
-        <p:nvSpPr>
-          <p:cNvPr id="16" name="TextBox 15"/>
-          <p:cNvSpPr txBox="1"/>
-          <p:nvPr/>
-        </p:nvSpPr>
-        <p:spPr>
-          <a:xfrm>
-            <a:off x="804672" y="3419856"/>
-            <a:ext cx="2240280" cy="256032"/>
-          </a:xfrm>
-          <a:prstGeom prst="rect">
-            <a:avLst/>
-          </a:prstGeom>
-          <a:noFill/>
-        </p:spPr>
-        <p:txBody>
-          <a:bodyPr wrap="square" lIns="36576" tIns="36576" rIns="36576" bIns="36576" anchor="t">
-            <a:spAutoFit/>
-          </a:bodyPr>
-          <a:lstStyle/>
-          <a:p>
-            <a:r>
-              <a:rPr sz="1200" b="1">
-                <a:solidFill>
-                  <a:srgbClr val="45D3E6"/>
-                </a:solidFill>
-                <a:latin typeface="Aptos"/>
-              </a:rPr>
-              <a:t>GitHub Actions</a:t>
-            </a:r>
-          </a:p>
-        </p:txBody>
-      </p:sp>
-      <p:sp>
-        <p:nvSpPr>
-          <p:cNvPr id="17" name="TextBox 16"/>
-          <p:cNvSpPr txBox="1"/>
-          <p:nvPr/>
-        </p:nvSpPr>
-        <p:spPr>
-          <a:xfrm>
-            <a:off x="3429000" y="3401568"/>
-            <a:ext cx="7909560" cy="310896"/>
-          </a:xfrm>
-          <a:prstGeom prst="rect">
-            <a:avLst/>
-          </a:prstGeom>
-          <a:noFill/>
-        </p:spPr>
-        <p:txBody>
-          <a:bodyPr wrap="square" lIns="36576" tIns="36576" rIns="36576" bIns="36576" anchor="t">
-            <a:spAutoFit/>
-          </a:bodyPr>
-          <a:lstStyle/>
-          <a:p>
-            <a:r>
-              <a:rPr sz="1300" b="0">
-                <a:solidFill>
-                  <a:srgbClr val="F3F7FC"/>
-                </a:solidFill>
-                <a:latin typeface="Aptos"/>
-              </a:rPr>
-              <a:t>over Jenkins: lives next to the code, no CI server to run</a:t>
-            </a:r>
-          </a:p>
-        </p:txBody>
-      </p:sp>
-      <p:sp>
-        <p:nvSpPr>
-          <p:cNvPr id="18" name="Rounded Rectangle 17"/>
-          <p:cNvSpPr/>
-          <p:nvPr/>
-        </p:nvSpPr>
-        <p:spPr>
-          <a:xfrm>
-            <a:off x="658368" y="3968496"/>
-            <a:ext cx="2514600" cy="475488"/>
-          </a:xfrm>
-          <a:prstGeom prst="roundRect">
-            <a:avLst>
-              <a:gd name="adj" fmla="val 12000"/>
-            </a:avLst>
-          </a:prstGeom>
-          <a:solidFill>
-            <a:srgbClr val="1D2B44"/>
-          </a:solidFill>
-          <a:ln>
-            <a:noFill/>
-          </a:ln>
-        </p:spPr>
-        <p:style>
-          <a:lnRef idx="1">
-            <a:schemeClr val="accent1"/>
-          </a:lnRef>
-          <a:fillRef idx="3">
-            <a:schemeClr val="accent1"/>
-          </a:fillRef>
-          <a:effectRef idx="2">
-            <a:schemeClr val="accent1"/>
-          </a:effectRef>
-          <a:fontRef idx="minor">
-            <a:schemeClr val="lt1"/>
-          </a:fontRef>
-        </p:style>
-        <p:txBody>
-          <a:bodyPr rtlCol="0" anchor="ctr"/>
-          <a:lstStyle/>
-          <a:p>
-            <a:pPr algn="ctr"/>
-            <a:endParaRPr/>
-          </a:p>
-        </p:txBody>
-      </p:sp>
-      <p:sp>
-        <p:nvSpPr>
-          <p:cNvPr id="19" name="TextBox 18"/>
-          <p:cNvSpPr txBox="1"/>
-          <p:nvPr/>
-        </p:nvSpPr>
-        <p:spPr>
-          <a:xfrm>
-            <a:off x="804672" y="4050791"/>
-            <a:ext cx="2240280" cy="256032"/>
-          </a:xfrm>
-          <a:prstGeom prst="rect">
-            <a:avLst/>
-          </a:prstGeom>
-          <a:noFill/>
-        </p:spPr>
-        <p:txBody>
-          <a:bodyPr wrap="square" lIns="36576" tIns="36576" rIns="36576" bIns="36576" anchor="t">
-            <a:spAutoFit/>
-          </a:bodyPr>
-          <a:lstStyle/>
-          <a:p>
-            <a:r>
-              <a:rPr sz="1200" b="1">
-                <a:solidFill>
-                  <a:srgbClr val="45D3E6"/>
-                </a:solidFill>
-                <a:latin typeface="Aptos"/>
-              </a:rPr>
-              <a:t>Kubernetes + Helm</a:t>
-            </a:r>
-          </a:p>
-        </p:txBody>
-      </p:sp>
-      <p:sp>
-        <p:nvSpPr>
-          <p:cNvPr id="20" name="TextBox 19"/>
-          <p:cNvSpPr txBox="1"/>
-          <p:nvPr/>
-        </p:nvSpPr>
-        <p:spPr>
-          <a:xfrm>
-            <a:off x="3429000" y="4032504"/>
-            <a:ext cx="7909560" cy="310896"/>
-          </a:xfrm>
-          <a:prstGeom prst="rect">
-            <a:avLst/>
-          </a:prstGeom>
-          <a:noFill/>
-        </p:spPr>
-        <p:txBody>
-          <a:bodyPr wrap="square" lIns="36576" tIns="36576" rIns="36576" bIns="36576" anchor="t">
-            <a:spAutoFit/>
-          </a:bodyPr>
-          <a:lstStyle/>
-          <a:p>
-            <a:r>
-              <a:rPr sz="1300" b="0">
-                <a:solidFill>
-                  <a:srgbClr val="F3F7FC"/>
-                </a:solidFill>
-                <a:latin typeface="Aptos"/>
-              </a:rPr>
-              <a:t>over Docker Swarm: industry standard, one chart for every env</a:t>
-            </a:r>
-          </a:p>
-        </p:txBody>
-      </p:sp>
-      <p:sp>
-        <p:nvSpPr>
-          <p:cNvPr id="21" name="Rounded Rectangle 20"/>
-          <p:cNvSpPr/>
-          <p:nvPr/>
-        </p:nvSpPr>
-        <p:spPr>
-          <a:xfrm>
-            <a:off x="658368" y="4599431"/>
-            <a:ext cx="2514600" cy="475488"/>
-          </a:xfrm>
-          <a:prstGeom prst="roundRect">
-            <a:avLst>
-              <a:gd name="adj" fmla="val 12000"/>
-            </a:avLst>
-          </a:prstGeom>
-          <a:solidFill>
-            <a:srgbClr val="1D2B44"/>
-          </a:solidFill>
-          <a:ln>
-            <a:noFill/>
-          </a:ln>
-        </p:spPr>
-        <p:style>
-          <a:lnRef idx="1">
-            <a:schemeClr val="accent1"/>
-          </a:lnRef>
-          <a:fillRef idx="3">
-            <a:schemeClr val="accent1"/>
-          </a:fillRef>
-          <a:effectRef idx="2">
-            <a:schemeClr val="accent1"/>
-          </a:effectRef>
-          <a:fontRef idx="minor">
-            <a:schemeClr val="lt1"/>
-          </a:fontRef>
-        </p:style>
-        <p:txBody>
-          <a:bodyPr rtlCol="0" anchor="ctr"/>
-          <a:lstStyle/>
-          <a:p>
-            <a:pPr algn="ctr"/>
-            <a:endParaRPr/>
-          </a:p>
-        </p:txBody>
-      </p:sp>
-      <p:sp>
-        <p:nvSpPr>
-          <p:cNvPr id="22" name="TextBox 21"/>
-          <p:cNvSpPr txBox="1"/>
-          <p:nvPr/>
-        </p:nvSpPr>
-        <p:spPr>
-          <a:xfrm>
-            <a:off x="804672" y="4681727"/>
-            <a:ext cx="2240280" cy="256032"/>
-          </a:xfrm>
-          <a:prstGeom prst="rect">
-            <a:avLst/>
-          </a:prstGeom>
-          <a:noFill/>
-        </p:spPr>
-        <p:txBody>
-          <a:bodyPr wrap="square" lIns="36576" tIns="36576" rIns="36576" bIns="36576" anchor="t">
-            <a:spAutoFit/>
-          </a:bodyPr>
-          <a:lstStyle/>
-          <a:p>
-            <a:r>
-              <a:rPr sz="1200" b="1">
-                <a:solidFill>
-                  <a:srgbClr val="45D3E6"/>
-                </a:solidFill>
-                <a:latin typeface="Aptos"/>
-              </a:rPr>
-              <a:t>Argo CD</a:t>
-            </a:r>
-          </a:p>
-        </p:txBody>
-      </p:sp>
-      <p:sp>
-        <p:nvSpPr>
-          <p:cNvPr id="23" name="TextBox 22"/>
-          <p:cNvSpPr txBox="1"/>
-          <p:nvPr/>
-        </p:nvSpPr>
-        <p:spPr>
-          <a:xfrm>
-            <a:off x="3429000" y="4663440"/>
-            <a:ext cx="7909560" cy="310896"/>
-          </a:xfrm>
-          <a:prstGeom prst="rect">
-            <a:avLst/>
-          </a:prstGeom>
-          <a:noFill/>
-        </p:spPr>
-        <p:txBody>
-          <a:bodyPr wrap="square" lIns="36576" tIns="36576" rIns="36576" bIns="36576" anchor="t">
-            <a:spAutoFit/>
-          </a:bodyPr>
-          <a:lstStyle/>
-          <a:p>
-            <a:r>
-              <a:rPr sz="1300" b="0">
-                <a:solidFill>
-                  <a:srgbClr val="F3F7FC"/>
-                </a:solidFill>
-                <a:latin typeface="Aptos"/>
-              </a:rPr>
-              <a:t>over Flux / push deploys: UI shows sync state and drift</a:t>
-            </a:r>
-          </a:p>
-        </p:txBody>
-      </p:sp>
-      <p:sp>
-        <p:nvSpPr>
-          <p:cNvPr id="24" name="Rounded Rectangle 23"/>
-          <p:cNvSpPr/>
-          <p:nvPr/>
-        </p:nvSpPr>
-        <p:spPr>
-          <a:xfrm>
-            <a:off x="658368" y="5230368"/>
-            <a:ext cx="2514600" cy="475488"/>
-          </a:xfrm>
-          <a:prstGeom prst="roundRect">
-            <a:avLst>
-              <a:gd name="adj" fmla="val 12000"/>
-            </a:avLst>
-          </a:prstGeom>
-          <a:solidFill>
-            <a:srgbClr val="1D2B44"/>
-          </a:solidFill>
-          <a:ln>
-            <a:noFill/>
-          </a:ln>
-        </p:spPr>
-        <p:style>
-          <a:lnRef idx="1">
-            <a:schemeClr val="accent1"/>
-          </a:lnRef>
-          <a:fillRef idx="3">
-            <a:schemeClr val="accent1"/>
-          </a:fillRef>
-          <a:effectRef idx="2">
-            <a:schemeClr val="accent1"/>
-          </a:effectRef>
-          <a:fontRef idx="minor">
-            <a:schemeClr val="lt1"/>
-          </a:fontRef>
-        </p:style>
-        <p:txBody>
-          <a:bodyPr rtlCol="0" anchor="ctr"/>
-          <a:lstStyle/>
-          <a:p>
-            <a:pPr algn="ctr"/>
-            <a:endParaRPr/>
-          </a:p>
-        </p:txBody>
-      </p:sp>
-      <p:sp>
-        <p:nvSpPr>
-          <p:cNvPr id="25" name="TextBox 24"/>
-          <p:cNvSpPr txBox="1"/>
-          <p:nvPr/>
-        </p:nvSpPr>
-        <p:spPr>
-          <a:xfrm>
-            <a:off x="804672" y="5312664"/>
-            <a:ext cx="2240280" cy="256032"/>
-          </a:xfrm>
-          <a:prstGeom prst="rect">
-            <a:avLst/>
-          </a:prstGeom>
-          <a:noFill/>
-        </p:spPr>
-        <p:txBody>
-          <a:bodyPr wrap="square" lIns="36576" tIns="36576" rIns="36576" bIns="36576" anchor="t">
-            <a:spAutoFit/>
-          </a:bodyPr>
-          <a:lstStyle/>
-          <a:p>
-            <a:r>
-              <a:rPr sz="1200" b="1">
-                <a:solidFill>
-                  <a:srgbClr val="45D3E6"/>
-                </a:solidFill>
-                <a:latin typeface="Aptos"/>
-              </a:rPr>
-              <a:t>Terraform</a:t>
-            </a:r>
-          </a:p>
-        </p:txBody>
-      </p:sp>
-      <p:sp>
-        <p:nvSpPr>
-          <p:cNvPr id="26" name="TextBox 25"/>
-          <p:cNvSpPr txBox="1"/>
-          <p:nvPr/>
-        </p:nvSpPr>
-        <p:spPr>
-          <a:xfrm>
-            <a:off x="3429000" y="5294376"/>
-            <a:ext cx="7909560" cy="310896"/>
-          </a:xfrm>
-          <a:prstGeom prst="rect">
-            <a:avLst/>
-          </a:prstGeom>
-          <a:noFill/>
-        </p:spPr>
-        <p:txBody>
-          <a:bodyPr wrap="square" lIns="36576" tIns="36576" rIns="36576" bIns="36576" anchor="t">
-            <a:spAutoFit/>
-          </a:bodyPr>
-          <a:lstStyle/>
-          <a:p>
-            <a:r>
-              <a:rPr sz="1300" b="0">
-                <a:solidFill>
-                  <a:srgbClr val="F3F7FC"/>
-                </a:solidFill>
-                <a:latin typeface="Aptos"/>
-              </a:rPr>
-              <a:t>over CloudFormation: cloud-agnostic, reusable VPC/EKS modules</a:t>
+              <a:t>github.com/tarun250/hostel_management</a:t>
             </a:r>
           </a:p>
         </p:txBody>
@@ -10146,7 +9598,7 @@
           <a:p>
             <a:pPr>
               <a:spcAft>
-                <a:spcPts val="1300"/>
+                <a:spcPts val="1400"/>
               </a:spcAft>
               <a:defRPr sz="1600">
                 <a:solidFill>
@@ -10156,13 +9608,14 @@
               </a:defRPr>
             </a:pPr>
             <a:r>
-              <a:t>•  Hostel operations involve several disconnected records.</a:t>
+              <a:rPr sz="2000"/>
+              <a:t>•  Records scattered across registers</a:t>
             </a:r>
           </a:p>
           <a:p>
             <a:pPr>
               <a:spcAft>
-                <a:spcPts val="1300"/>
+                <a:spcPts val="1400"/>
               </a:spcAft>
               <a:defRPr sz="1600">
                 <a:solidFill>
@@ -10172,13 +9625,14 @@
               </a:defRPr>
             </a:pPr>
             <a:r>
-              <a:t>•  Room occupancy and available beds can be hard to track.</a:t>
+              <a:rPr sz="2000"/>
+              <a:t>•  Free beds are hard to track</a:t>
             </a:r>
           </a:p>
           <a:p>
             <a:pPr>
               <a:spcAft>
-                <a:spcPts val="1300"/>
+                <a:spcPts val="1400"/>
               </a:spcAft>
               <a:defRPr sz="1600">
                 <a:solidFill>
@@ -10188,23 +9642,8 @@
               </a:defRPr>
             </a:pPr>
             <a:r>
-              <a:t>•  Maintenance, complaints, visitors and fees need follow-up.</a:t>
-            </a:r>
-          </a:p>
-          <a:p>
-            <a:pPr>
-              <a:spcAft>
-                <a:spcPts val="1300"/>
-              </a:spcAft>
-              <a:defRPr sz="1600">
-                <a:solidFill>
-                  <a:srgbClr val="F3F7FC"/>
-                </a:solidFill>
-                <a:latin typeface="Aptos"/>
-              </a:defRPr>
-            </a:pPr>
-            <a:r>
-              <a:t>•  Manual updates make it harder to see the current status.</a:t>
+              <a:rPr sz="2000"/>
+              <a:t>•  Complaints, visitors and fees slip through</a:t>
             </a:r>
           </a:p>
         </p:txBody>
@@ -10313,7 +9752,7 @@
           <a:p>
             <a:pPr>
               <a:spcAft>
-                <a:spcPts val="1300"/>
+                <a:spcPts val="1400"/>
               </a:spcAft>
               <a:defRPr sz="1600">
                 <a:solidFill>
@@ -10323,13 +9762,14 @@
               </a:defRPr>
             </a:pPr>
             <a:r>
-              <a:t>•  One web dashboard for common hostel workflows.</a:t>
+              <a:rPr sz="2000"/>
+              <a:t>•  One dashboard for the warden</a:t>
             </a:r>
           </a:p>
           <a:p>
             <a:pPr>
               <a:spcAft>
-                <a:spcPts val="1300"/>
+                <a:spcPts val="1400"/>
               </a:spcAft>
               <a:defRPr sz="1600">
                 <a:solidFill>
@@ -10339,13 +9779,14 @@
               </a:defRPr>
             </a:pPr>
             <a:r>
-              <a:t>•  Capacity-aware room allocation and student records.</a:t>
+              <a:rPr sz="2000"/>
+              <a:t>•  Room allocation that respects capacity</a:t>
             </a:r>
           </a:p>
           <a:p>
             <a:pPr>
               <a:spcAft>
-                <a:spcPts val="1300"/>
+                <a:spcPts val="1400"/>
               </a:spcAft>
               <a:defRPr sz="1600">
                 <a:solidFill>
@@ -10355,23 +9796,8 @@
               </a:defRPr>
             </a:pPr>
             <a:r>
-              <a:t>•  Track maintenance, complaints, visitors and fee status.</a:t>
-            </a:r>
-          </a:p>
-          <a:p>
-            <a:pPr>
-              <a:spcAft>
-                <a:spcPts val="1300"/>
-              </a:spcAft>
-              <a:defRPr sz="1600">
-                <a:solidFill>
-                  <a:srgbClr val="F3F7FC"/>
-                </a:solidFill>
-                <a:latin typeface="Aptos"/>
-              </a:defRPr>
-            </a:pPr>
-            <a:r>
-              <a:t>•  A containerized application with repeatable deployment.</a:t>
+              <a:rPr sz="2000"/>
+              <a:t>•  Maintenance, complaints, visitors and fees in one place</a:t>
             </a:r>
           </a:p>
         </p:txBody>
@@ -13160,7 +12586,7 @@
 </file>
 
 <file path=ppt/slides/slide7.xml><?xml version="1.0" encoding="utf-8"?>
-<p:sld xmlns:a="http://schemas.openxmlformats.org/drawingml/2006/main" xmlns:r="http://schemas.openxmlformats.org/officeDocument/2006/relationships" xmlns:p="http://schemas.openxmlformats.org/presentationml/2006/main">
+<p:sld xmlns:a="http://schemas.openxmlformats.org/drawingml/2006/main" xmlns:p="http://schemas.openxmlformats.org/presentationml/2006/main" xmlns:r="http://schemas.openxmlformats.org/officeDocument/2006/relationships">
   <p:cSld>
     <p:bg>
       <p:bgPr>
@@ -13176,14 +12602,7 @@
         <p:cNvGrpSpPr/>
         <p:nvPr/>
       </p:nvGrpSpPr>
-      <p:grpSpPr>
-        <a:xfrm>
-          <a:off x="0" y="0"/>
-          <a:ext cx="0" cy="0"/>
-          <a:chOff x="0" y="0"/>
-          <a:chExt cx="0" cy="0"/>
-        </a:xfrm>
-      </p:grpSpPr>
+      <p:grpSpPr/>
       <p:sp>
         <p:nvSpPr>
           <p:cNvPr id="2" name="TextBox 1"/>
@@ -13213,7 +12632,7 @@
                 </a:solidFill>
                 <a:latin typeface="Aptos"/>
               </a:rPr>
-              <a:t>05 / USER INTERFACE</a:t>
+              <a:t>04 / STACK RATIONALE</a:t>
             </a:r>
           </a:p>
         </p:txBody>
@@ -13247,7 +12666,7 @@
                 </a:solidFill>
                 <a:latin typeface="Aptos"/>
               </a:rPr>
-              <a:t>The product in action</a:t>
+              <a:t>Alternatives considered</a:t>
             </a:r>
           </a:p>
         </p:txBody>
@@ -13326,7 +12745,7 @@
                 </a:solidFill>
                 <a:latin typeface="Aptos"/>
               </a:rPr>
-              <a:t>07</a:t>
+              <a:t>06</a:t>
             </a:r>
           </a:p>
         </p:txBody>
@@ -13339,8 +12758,8 @@
         </p:nvSpPr>
         <p:spPr>
           <a:xfrm>
-            <a:off x="608075" y="1619631"/>
-            <a:ext cx="6556248" cy="4121657"/>
+            <a:off x="658368" y="1444752"/>
+            <a:ext cx="2514600" cy="475488"/>
           </a:xfrm>
           <a:prstGeom prst="roundRect">
             <a:avLst>
@@ -13351,9 +12770,7 @@
             <a:srgbClr val="1D2B44"/>
           </a:solidFill>
           <a:ln>
-            <a:solidFill>
-              <a:srgbClr val="405371"/>
-            </a:solidFill>
+            <a:noFill/>
           </a:ln>
         </p:spPr>
         <p:style>
@@ -13379,40 +12796,84 @@
           </a:p>
         </p:txBody>
       </p:sp>
-      <p:pic>
-        <p:nvPicPr>
-          <p:cNvPr id="7" name="Picture 6" descr="10-ui-dashboard.png"/>
-          <p:cNvPicPr>
-            <a:picLocks noChangeAspect="1"/>
-          </p:cNvPicPr>
-          <p:nvPr/>
-        </p:nvPicPr>
-        <p:blipFill>
-          <a:blip r:embed="rId2"/>
-          <a:stretch>
-            <a:fillRect/>
-          </a:stretch>
-        </p:blipFill>
-        <p:spPr>
-          <a:xfrm>
-            <a:off x="640080" y="1651635"/>
-            <a:ext cx="6492240" cy="4057649"/>
-          </a:xfrm>
-          <a:prstGeom prst="rect">
-            <a:avLst/>
-          </a:prstGeom>
-        </p:spPr>
-      </p:pic>
-      <p:sp>
-        <p:nvSpPr>
-          <p:cNvPr id="8" name="Rounded Rectangle 7"/>
+      <p:sp>
+        <p:nvSpPr>
+          <p:cNvPr id="7" name="TextBox 6"/>
+          <p:cNvSpPr txBox="1"/>
+          <p:nvPr/>
+        </p:nvSpPr>
+        <p:spPr>
+          <a:xfrm>
+            <a:off x="804672" y="1527048"/>
+            <a:ext cx="2240280" cy="256032"/>
+          </a:xfrm>
+          <a:prstGeom prst="rect">
+            <a:avLst/>
+          </a:prstGeom>
+          <a:noFill/>
+        </p:spPr>
+        <p:txBody>
+          <a:bodyPr wrap="square" lIns="36576" tIns="36576" rIns="36576" bIns="36576" anchor="t">
+            <a:spAutoFit/>
+          </a:bodyPr>
+          <a:lstStyle/>
+          <a:p>
+            <a:r>
+              <a:rPr sz="1200" b="1">
+                <a:solidFill>
+                  <a:srgbClr val="45D3E6"/>
+                </a:solidFill>
+                <a:latin typeface="Aptos"/>
+              </a:rPr>
+              <a:t>FastAPI</a:t>
+            </a:r>
+          </a:p>
+        </p:txBody>
+      </p:sp>
+      <p:sp>
+        <p:nvSpPr>
+          <p:cNvPr id="8" name="TextBox 7"/>
+          <p:cNvSpPr txBox="1"/>
+          <p:nvPr/>
+        </p:nvSpPr>
+        <p:spPr>
+          <a:xfrm>
+            <a:off x="3429000" y="1508760"/>
+            <a:ext cx="7909560" cy="310896"/>
+          </a:xfrm>
+          <a:prstGeom prst="rect">
+            <a:avLst/>
+          </a:prstGeom>
+          <a:noFill/>
+        </p:spPr>
+        <p:txBody>
+          <a:bodyPr wrap="square" lIns="36576" tIns="36576" rIns="36576" bIns="36576" anchor="t">
+            <a:spAutoFit/>
+          </a:bodyPr>
+          <a:lstStyle/>
+          <a:p>
+            <a:r>
+              <a:rPr sz="1300" b="0">
+                <a:solidFill>
+                  <a:srgbClr val="F3F7FC"/>
+                </a:solidFill>
+                <a:latin typeface="Aptos"/>
+              </a:rPr>
+              <a:t>over Flask / Django: typed validation and Swagger docs built in</a:t>
+            </a:r>
+          </a:p>
+        </p:txBody>
+      </p:sp>
+      <p:sp>
+        <p:nvSpPr>
+          <p:cNvPr id="9" name="Rounded Rectangle 8"/>
           <p:cNvSpPr/>
           <p:nvPr/>
         </p:nvSpPr>
         <p:spPr>
           <a:xfrm>
-            <a:off x="7511796" y="1633347"/>
-            <a:ext cx="1938527" cy="4094226"/>
+            <a:off x="658368" y="2075688"/>
+            <a:ext cx="2514600" cy="475488"/>
           </a:xfrm>
           <a:prstGeom prst="roundRect">
             <a:avLst>
@@ -13423,9 +12884,7 @@
             <a:srgbClr val="1D2B44"/>
           </a:solidFill>
           <a:ln>
-            <a:solidFill>
-              <a:srgbClr val="405371"/>
-            </a:solidFill>
+            <a:noFill/>
           </a:ln>
         </p:spPr>
         <p:style>
@@ -13451,40 +12910,84 @@
           </a:p>
         </p:txBody>
       </p:sp>
-      <p:pic>
-        <p:nvPicPr>
-          <p:cNvPr id="9" name="Picture 8" descr="17-ui-mobile.png"/>
-          <p:cNvPicPr>
-            <a:picLocks noChangeAspect="1"/>
-          </p:cNvPicPr>
-          <p:nvPr/>
-        </p:nvPicPr>
-        <p:blipFill>
-          <a:blip r:embed="rId3"/>
-          <a:stretch>
-            <a:fillRect/>
-          </a:stretch>
-        </p:blipFill>
-        <p:spPr>
-          <a:xfrm>
-            <a:off x="7543800" y="1665351"/>
-            <a:ext cx="1874519" cy="4030218"/>
-          </a:xfrm>
-          <a:prstGeom prst="rect">
-            <a:avLst/>
-          </a:prstGeom>
-        </p:spPr>
-      </p:pic>
-      <p:sp>
-        <p:nvSpPr>
-          <p:cNvPr id="10" name="Rounded Rectangle 9"/>
+      <p:sp>
+        <p:nvSpPr>
+          <p:cNvPr id="10" name="TextBox 9"/>
+          <p:cNvSpPr txBox="1"/>
+          <p:nvPr/>
+        </p:nvSpPr>
+        <p:spPr>
+          <a:xfrm>
+            <a:off x="804672" y="2157984"/>
+            <a:ext cx="2240280" cy="256032"/>
+          </a:xfrm>
+          <a:prstGeom prst="rect">
+            <a:avLst/>
+          </a:prstGeom>
+          <a:noFill/>
+        </p:spPr>
+        <p:txBody>
+          <a:bodyPr wrap="square" lIns="36576" tIns="36576" rIns="36576" bIns="36576" anchor="t">
+            <a:spAutoFit/>
+          </a:bodyPr>
+          <a:lstStyle/>
+          <a:p>
+            <a:r>
+              <a:rPr sz="1200" b="1">
+                <a:solidFill>
+                  <a:srgbClr val="45D3E6"/>
+                </a:solidFill>
+                <a:latin typeface="Aptos"/>
+              </a:rPr>
+              <a:t>React + Vite</a:t>
+            </a:r>
+          </a:p>
+        </p:txBody>
+      </p:sp>
+      <p:sp>
+        <p:nvSpPr>
+          <p:cNvPr id="11" name="TextBox 10"/>
+          <p:cNvSpPr txBox="1"/>
+          <p:nvPr/>
+        </p:nvSpPr>
+        <p:spPr>
+          <a:xfrm>
+            <a:off x="3429000" y="2139696"/>
+            <a:ext cx="7909560" cy="310896"/>
+          </a:xfrm>
+          <a:prstGeom prst="rect">
+            <a:avLst/>
+          </a:prstGeom>
+          <a:noFill/>
+        </p:spPr>
+        <p:txBody>
+          <a:bodyPr wrap="square" lIns="36576" tIns="36576" rIns="36576" bIns="36576" anchor="t">
+            <a:spAutoFit/>
+          </a:bodyPr>
+          <a:lstStyle/>
+          <a:p>
+            <a:r>
+              <a:rPr sz="1300" b="0">
+                <a:solidFill>
+                  <a:srgbClr val="F3F7FC"/>
+                </a:solidFill>
+                <a:latin typeface="Aptos"/>
+              </a:rPr>
+              <a:t>over Angular / plain HTML: lighter, fast dev server</a:t>
+            </a:r>
+          </a:p>
+        </p:txBody>
+      </p:sp>
+      <p:sp>
+        <p:nvSpPr>
+          <p:cNvPr id="12" name="Rounded Rectangle 11"/>
           <p:cNvSpPr/>
           <p:nvPr/>
         </p:nvSpPr>
         <p:spPr>
           <a:xfrm>
-            <a:off x="9614916" y="3048381"/>
-            <a:ext cx="1984248" cy="1264158"/>
+            <a:off x="658368" y="2706624"/>
+            <a:ext cx="2514600" cy="475488"/>
           </a:xfrm>
           <a:prstGeom prst="roundRect">
             <a:avLst>
@@ -13495,9 +12998,7 @@
             <a:srgbClr val="1D2B44"/>
           </a:solidFill>
           <a:ln>
-            <a:solidFill>
-              <a:srgbClr val="405371"/>
-            </a:solidFill>
+            <a:noFill/>
           </a:ln>
         </p:spPr>
         <p:style>
@@ -13523,60 +13024,526 @@
           </a:p>
         </p:txBody>
       </p:sp>
-      <p:pic>
-        <p:nvPicPr>
-          <p:cNvPr id="11" name="Picture 10" descr="11-ui-rooms.png"/>
-          <p:cNvPicPr>
-            <a:picLocks noChangeAspect="1"/>
-          </p:cNvPicPr>
-          <p:nvPr/>
-        </p:nvPicPr>
-        <p:blipFill>
-          <a:blip r:embed="rId4"/>
-          <a:stretch>
-            <a:fillRect/>
-          </a:stretch>
-        </p:blipFill>
-        <p:spPr>
-          <a:xfrm>
-            <a:off x="9646920" y="3080385"/>
-            <a:ext cx="1920240" cy="1200150"/>
-          </a:xfrm>
-          <a:prstGeom prst="rect">
-            <a:avLst/>
-          </a:prstGeom>
-        </p:spPr>
-      </p:pic>
-      <p:sp>
-        <p:nvSpPr>
-          <p:cNvPr id="12" name="TextBox 11"/>
-          <p:cNvSpPr txBox="1"/>
-          <p:nvPr/>
-        </p:nvSpPr>
-        <p:spPr>
-          <a:xfrm>
-            <a:off x="685800" y="6080760"/>
-            <a:ext cx="6400800" cy="274320"/>
-          </a:xfrm>
-          <a:prstGeom prst="rect">
-            <a:avLst/>
-          </a:prstGeom>
-          <a:noFill/>
-        </p:spPr>
-        <p:txBody>
-          <a:bodyPr wrap="square" lIns="36576" tIns="36576" rIns="36576" bIns="36576" anchor="t">
-            <a:spAutoFit/>
-          </a:bodyPr>
-          <a:lstStyle/>
-          <a:p>
-            <a:r>
-              <a:rPr sz="1100" b="0">
-                <a:solidFill>
-                  <a:srgbClr val="ADBBCF"/>
-                </a:solidFill>
-                <a:latin typeface="Aptos"/>
-              </a:rPr>
-              <a:t>Dashboard • mobile layout • room availability</a:t>
+      <p:sp>
+        <p:nvSpPr>
+          <p:cNvPr id="13" name="TextBox 12"/>
+          <p:cNvSpPr txBox="1"/>
+          <p:nvPr/>
+        </p:nvSpPr>
+        <p:spPr>
+          <a:xfrm>
+            <a:off x="804672" y="2788920"/>
+            <a:ext cx="2240280" cy="256032"/>
+          </a:xfrm>
+          <a:prstGeom prst="rect">
+            <a:avLst/>
+          </a:prstGeom>
+          <a:noFill/>
+        </p:spPr>
+        <p:txBody>
+          <a:bodyPr wrap="square" lIns="36576" tIns="36576" rIns="36576" bIns="36576" anchor="t">
+            <a:spAutoFit/>
+          </a:bodyPr>
+          <a:lstStyle/>
+          <a:p>
+            <a:r>
+              <a:rPr sz="1200" b="1">
+                <a:solidFill>
+                  <a:srgbClr val="45D3E6"/>
+                </a:solidFill>
+                <a:latin typeface="Aptos"/>
+              </a:rPr>
+              <a:t>PostgreSQL</a:t>
+            </a:r>
+          </a:p>
+        </p:txBody>
+      </p:sp>
+      <p:sp>
+        <p:nvSpPr>
+          <p:cNvPr id="14" name="TextBox 13"/>
+          <p:cNvSpPr txBox="1"/>
+          <p:nvPr/>
+        </p:nvSpPr>
+        <p:spPr>
+          <a:xfrm>
+            <a:off x="3429000" y="2770632"/>
+            <a:ext cx="7909560" cy="310896"/>
+          </a:xfrm>
+          <a:prstGeom prst="rect">
+            <a:avLst/>
+          </a:prstGeom>
+          <a:noFill/>
+        </p:spPr>
+        <p:txBody>
+          <a:bodyPr wrap="square" lIns="36576" tIns="36576" rIns="36576" bIns="36576" anchor="t">
+            <a:spAutoFit/>
+          </a:bodyPr>
+          <a:lstStyle/>
+          <a:p>
+            <a:r>
+              <a:rPr sz="1300" b="0">
+                <a:solidFill>
+                  <a:srgbClr val="F3F7FC"/>
+                </a:solidFill>
+                <a:latin typeface="Aptos"/>
+              </a:rPr>
+              <a:t>over MySQL / MongoDB: relational data with strict constraints</a:t>
+            </a:r>
+          </a:p>
+        </p:txBody>
+      </p:sp>
+      <p:sp>
+        <p:nvSpPr>
+          <p:cNvPr id="15" name="Rounded Rectangle 14"/>
+          <p:cNvSpPr/>
+          <p:nvPr/>
+        </p:nvSpPr>
+        <p:spPr>
+          <a:xfrm>
+            <a:off x="658368" y="3337560"/>
+            <a:ext cx="2514600" cy="475488"/>
+          </a:xfrm>
+          <a:prstGeom prst="roundRect">
+            <a:avLst>
+              <a:gd name="adj" fmla="val 12000"/>
+            </a:avLst>
+          </a:prstGeom>
+          <a:solidFill>
+            <a:srgbClr val="1D2B44"/>
+          </a:solidFill>
+          <a:ln>
+            <a:noFill/>
+          </a:ln>
+        </p:spPr>
+        <p:style>
+          <a:lnRef idx="1">
+            <a:schemeClr val="accent1"/>
+          </a:lnRef>
+          <a:fillRef idx="3">
+            <a:schemeClr val="accent1"/>
+          </a:fillRef>
+          <a:effectRef idx="2">
+            <a:schemeClr val="accent1"/>
+          </a:effectRef>
+          <a:fontRef idx="minor">
+            <a:schemeClr val="lt1"/>
+          </a:fontRef>
+        </p:style>
+        <p:txBody>
+          <a:bodyPr rtlCol="0" anchor="ctr"/>
+          <a:lstStyle/>
+          <a:p>
+            <a:pPr algn="ctr"/>
+            <a:endParaRPr/>
+          </a:p>
+        </p:txBody>
+      </p:sp>
+      <p:sp>
+        <p:nvSpPr>
+          <p:cNvPr id="16" name="TextBox 15"/>
+          <p:cNvSpPr txBox="1"/>
+          <p:nvPr/>
+        </p:nvSpPr>
+        <p:spPr>
+          <a:xfrm>
+            <a:off x="804672" y="3419856"/>
+            <a:ext cx="2240280" cy="256032"/>
+          </a:xfrm>
+          <a:prstGeom prst="rect">
+            <a:avLst/>
+          </a:prstGeom>
+          <a:noFill/>
+        </p:spPr>
+        <p:txBody>
+          <a:bodyPr wrap="square" lIns="36576" tIns="36576" rIns="36576" bIns="36576" anchor="t">
+            <a:spAutoFit/>
+          </a:bodyPr>
+          <a:lstStyle/>
+          <a:p>
+            <a:r>
+              <a:rPr sz="1200" b="1">
+                <a:solidFill>
+                  <a:srgbClr val="45D3E6"/>
+                </a:solidFill>
+                <a:latin typeface="Aptos"/>
+              </a:rPr>
+              <a:t>GitHub Actions</a:t>
+            </a:r>
+          </a:p>
+        </p:txBody>
+      </p:sp>
+      <p:sp>
+        <p:nvSpPr>
+          <p:cNvPr id="17" name="TextBox 16"/>
+          <p:cNvSpPr txBox="1"/>
+          <p:nvPr/>
+        </p:nvSpPr>
+        <p:spPr>
+          <a:xfrm>
+            <a:off x="3429000" y="3401568"/>
+            <a:ext cx="7909560" cy="310896"/>
+          </a:xfrm>
+          <a:prstGeom prst="rect">
+            <a:avLst/>
+          </a:prstGeom>
+          <a:noFill/>
+        </p:spPr>
+        <p:txBody>
+          <a:bodyPr wrap="square" lIns="36576" tIns="36576" rIns="36576" bIns="36576" anchor="t">
+            <a:spAutoFit/>
+          </a:bodyPr>
+          <a:lstStyle/>
+          <a:p>
+            <a:r>
+              <a:rPr sz="1300" b="0">
+                <a:solidFill>
+                  <a:srgbClr val="F3F7FC"/>
+                </a:solidFill>
+                <a:latin typeface="Aptos"/>
+              </a:rPr>
+              <a:t>over Jenkins: lives next to the code, no CI server to run</a:t>
+            </a:r>
+          </a:p>
+        </p:txBody>
+      </p:sp>
+      <p:sp>
+        <p:nvSpPr>
+          <p:cNvPr id="18" name="Rounded Rectangle 17"/>
+          <p:cNvSpPr/>
+          <p:nvPr/>
+        </p:nvSpPr>
+        <p:spPr>
+          <a:xfrm>
+            <a:off x="658368" y="3968496"/>
+            <a:ext cx="2514600" cy="475488"/>
+          </a:xfrm>
+          <a:prstGeom prst="roundRect">
+            <a:avLst>
+              <a:gd name="adj" fmla="val 12000"/>
+            </a:avLst>
+          </a:prstGeom>
+          <a:solidFill>
+            <a:srgbClr val="1D2B44"/>
+          </a:solidFill>
+          <a:ln>
+            <a:noFill/>
+          </a:ln>
+        </p:spPr>
+        <p:style>
+          <a:lnRef idx="1">
+            <a:schemeClr val="accent1"/>
+          </a:lnRef>
+          <a:fillRef idx="3">
+            <a:schemeClr val="accent1"/>
+          </a:fillRef>
+          <a:effectRef idx="2">
+            <a:schemeClr val="accent1"/>
+          </a:effectRef>
+          <a:fontRef idx="minor">
+            <a:schemeClr val="lt1"/>
+          </a:fontRef>
+        </p:style>
+        <p:txBody>
+          <a:bodyPr rtlCol="0" anchor="ctr"/>
+          <a:lstStyle/>
+          <a:p>
+            <a:pPr algn="ctr"/>
+            <a:endParaRPr/>
+          </a:p>
+        </p:txBody>
+      </p:sp>
+      <p:sp>
+        <p:nvSpPr>
+          <p:cNvPr id="19" name="TextBox 18"/>
+          <p:cNvSpPr txBox="1"/>
+          <p:nvPr/>
+        </p:nvSpPr>
+        <p:spPr>
+          <a:xfrm>
+            <a:off x="804672" y="4050791"/>
+            <a:ext cx="2240280" cy="256032"/>
+          </a:xfrm>
+          <a:prstGeom prst="rect">
+            <a:avLst/>
+          </a:prstGeom>
+          <a:noFill/>
+        </p:spPr>
+        <p:txBody>
+          <a:bodyPr wrap="square" lIns="36576" tIns="36576" rIns="36576" bIns="36576" anchor="t">
+            <a:spAutoFit/>
+          </a:bodyPr>
+          <a:lstStyle/>
+          <a:p>
+            <a:r>
+              <a:rPr sz="1200" b="1">
+                <a:solidFill>
+                  <a:srgbClr val="45D3E6"/>
+                </a:solidFill>
+                <a:latin typeface="Aptos"/>
+              </a:rPr>
+              <a:t>Kubernetes + Helm</a:t>
+            </a:r>
+          </a:p>
+        </p:txBody>
+      </p:sp>
+      <p:sp>
+        <p:nvSpPr>
+          <p:cNvPr id="20" name="TextBox 19"/>
+          <p:cNvSpPr txBox="1"/>
+          <p:nvPr/>
+        </p:nvSpPr>
+        <p:spPr>
+          <a:xfrm>
+            <a:off x="3429000" y="4032504"/>
+            <a:ext cx="7909560" cy="310896"/>
+          </a:xfrm>
+          <a:prstGeom prst="rect">
+            <a:avLst/>
+          </a:prstGeom>
+          <a:noFill/>
+        </p:spPr>
+        <p:txBody>
+          <a:bodyPr wrap="square" lIns="36576" tIns="36576" rIns="36576" bIns="36576" anchor="t">
+            <a:spAutoFit/>
+          </a:bodyPr>
+          <a:lstStyle/>
+          <a:p>
+            <a:r>
+              <a:rPr sz="1300" b="0">
+                <a:solidFill>
+                  <a:srgbClr val="F3F7FC"/>
+                </a:solidFill>
+                <a:latin typeface="Aptos"/>
+              </a:rPr>
+              <a:t>over Docker Swarm: industry standard, one chart for every env</a:t>
+            </a:r>
+          </a:p>
+        </p:txBody>
+      </p:sp>
+      <p:sp>
+        <p:nvSpPr>
+          <p:cNvPr id="21" name="Rounded Rectangle 20"/>
+          <p:cNvSpPr/>
+          <p:nvPr/>
+        </p:nvSpPr>
+        <p:spPr>
+          <a:xfrm>
+            <a:off x="658368" y="4599431"/>
+            <a:ext cx="2514600" cy="475488"/>
+          </a:xfrm>
+          <a:prstGeom prst="roundRect">
+            <a:avLst>
+              <a:gd name="adj" fmla="val 12000"/>
+            </a:avLst>
+          </a:prstGeom>
+          <a:solidFill>
+            <a:srgbClr val="1D2B44"/>
+          </a:solidFill>
+          <a:ln>
+            <a:noFill/>
+          </a:ln>
+        </p:spPr>
+        <p:style>
+          <a:lnRef idx="1">
+            <a:schemeClr val="accent1"/>
+          </a:lnRef>
+          <a:fillRef idx="3">
+            <a:schemeClr val="accent1"/>
+          </a:fillRef>
+          <a:effectRef idx="2">
+            <a:schemeClr val="accent1"/>
+          </a:effectRef>
+          <a:fontRef idx="minor">
+            <a:schemeClr val="lt1"/>
+          </a:fontRef>
+        </p:style>
+        <p:txBody>
+          <a:bodyPr rtlCol="0" anchor="ctr"/>
+          <a:lstStyle/>
+          <a:p>
+            <a:pPr algn="ctr"/>
+            <a:endParaRPr/>
+          </a:p>
+        </p:txBody>
+      </p:sp>
+      <p:sp>
+        <p:nvSpPr>
+          <p:cNvPr id="22" name="TextBox 21"/>
+          <p:cNvSpPr txBox="1"/>
+          <p:nvPr/>
+        </p:nvSpPr>
+        <p:spPr>
+          <a:xfrm>
+            <a:off x="804672" y="4681727"/>
+            <a:ext cx="2240280" cy="256032"/>
+          </a:xfrm>
+          <a:prstGeom prst="rect">
+            <a:avLst/>
+          </a:prstGeom>
+          <a:noFill/>
+        </p:spPr>
+        <p:txBody>
+          <a:bodyPr wrap="square" lIns="36576" tIns="36576" rIns="36576" bIns="36576" anchor="t">
+            <a:spAutoFit/>
+          </a:bodyPr>
+          <a:lstStyle/>
+          <a:p>
+            <a:r>
+              <a:rPr sz="1200" b="1">
+                <a:solidFill>
+                  <a:srgbClr val="45D3E6"/>
+                </a:solidFill>
+                <a:latin typeface="Aptos"/>
+              </a:rPr>
+              <a:t>Argo CD</a:t>
+            </a:r>
+          </a:p>
+        </p:txBody>
+      </p:sp>
+      <p:sp>
+        <p:nvSpPr>
+          <p:cNvPr id="23" name="TextBox 22"/>
+          <p:cNvSpPr txBox="1"/>
+          <p:nvPr/>
+        </p:nvSpPr>
+        <p:spPr>
+          <a:xfrm>
+            <a:off x="3429000" y="4663440"/>
+            <a:ext cx="7909560" cy="310896"/>
+          </a:xfrm>
+          <a:prstGeom prst="rect">
+            <a:avLst/>
+          </a:prstGeom>
+          <a:noFill/>
+        </p:spPr>
+        <p:txBody>
+          <a:bodyPr wrap="square" lIns="36576" tIns="36576" rIns="36576" bIns="36576" anchor="t">
+            <a:spAutoFit/>
+          </a:bodyPr>
+          <a:lstStyle/>
+          <a:p>
+            <a:r>
+              <a:rPr sz="1300" b="0">
+                <a:solidFill>
+                  <a:srgbClr val="F3F7FC"/>
+                </a:solidFill>
+                <a:latin typeface="Aptos"/>
+              </a:rPr>
+              <a:t>over Flux / push deploys: UI shows sync state and drift</a:t>
+            </a:r>
+          </a:p>
+        </p:txBody>
+      </p:sp>
+      <p:sp>
+        <p:nvSpPr>
+          <p:cNvPr id="24" name="Rounded Rectangle 23"/>
+          <p:cNvSpPr/>
+          <p:nvPr/>
+        </p:nvSpPr>
+        <p:spPr>
+          <a:xfrm>
+            <a:off x="658368" y="5230368"/>
+            <a:ext cx="2514600" cy="475488"/>
+          </a:xfrm>
+          <a:prstGeom prst="roundRect">
+            <a:avLst>
+              <a:gd name="adj" fmla="val 12000"/>
+            </a:avLst>
+          </a:prstGeom>
+          <a:solidFill>
+            <a:srgbClr val="1D2B44"/>
+          </a:solidFill>
+          <a:ln>
+            <a:noFill/>
+          </a:ln>
+        </p:spPr>
+        <p:style>
+          <a:lnRef idx="1">
+            <a:schemeClr val="accent1"/>
+          </a:lnRef>
+          <a:fillRef idx="3">
+            <a:schemeClr val="accent1"/>
+          </a:fillRef>
+          <a:effectRef idx="2">
+            <a:schemeClr val="accent1"/>
+          </a:effectRef>
+          <a:fontRef idx="minor">
+            <a:schemeClr val="lt1"/>
+          </a:fontRef>
+        </p:style>
+        <p:txBody>
+          <a:bodyPr rtlCol="0" anchor="ctr"/>
+          <a:lstStyle/>
+          <a:p>
+            <a:pPr algn="ctr"/>
+            <a:endParaRPr/>
+          </a:p>
+        </p:txBody>
+      </p:sp>
+      <p:sp>
+        <p:nvSpPr>
+          <p:cNvPr id="25" name="TextBox 24"/>
+          <p:cNvSpPr txBox="1"/>
+          <p:nvPr/>
+        </p:nvSpPr>
+        <p:spPr>
+          <a:xfrm>
+            <a:off x="804672" y="5312664"/>
+            <a:ext cx="2240280" cy="256032"/>
+          </a:xfrm>
+          <a:prstGeom prst="rect">
+            <a:avLst/>
+          </a:prstGeom>
+          <a:noFill/>
+        </p:spPr>
+        <p:txBody>
+          <a:bodyPr wrap="square" lIns="36576" tIns="36576" rIns="36576" bIns="36576" anchor="t">
+            <a:spAutoFit/>
+          </a:bodyPr>
+          <a:lstStyle/>
+          <a:p>
+            <a:r>
+              <a:rPr sz="1200" b="1">
+                <a:solidFill>
+                  <a:srgbClr val="45D3E6"/>
+                </a:solidFill>
+                <a:latin typeface="Aptos"/>
+              </a:rPr>
+              <a:t>Terraform</a:t>
+            </a:r>
+          </a:p>
+        </p:txBody>
+      </p:sp>
+      <p:sp>
+        <p:nvSpPr>
+          <p:cNvPr id="26" name="TextBox 25"/>
+          <p:cNvSpPr txBox="1"/>
+          <p:nvPr/>
+        </p:nvSpPr>
+        <p:spPr>
+          <a:xfrm>
+            <a:off x="3429000" y="5294376"/>
+            <a:ext cx="7909560" cy="310896"/>
+          </a:xfrm>
+          <a:prstGeom prst="rect">
+            <a:avLst/>
+          </a:prstGeom>
+          <a:noFill/>
+        </p:spPr>
+        <p:txBody>
+          <a:bodyPr wrap="square" lIns="36576" tIns="36576" rIns="36576" bIns="36576" anchor="t">
+            <a:spAutoFit/>
+          </a:bodyPr>
+          <a:lstStyle/>
+          <a:p>
+            <a:r>
+              <a:rPr sz="1300" b="0">
+                <a:solidFill>
+                  <a:srgbClr val="F3F7FC"/>
+                </a:solidFill>
+                <a:latin typeface="Aptos"/>
+              </a:rPr>
+              <a:t>over CloudFormation: cloud-agnostic, reusable VPC/EKS modules</a:t>
             </a:r>
           </a:p>
         </p:txBody>
@@ -13643,7 +13610,7 @@
                 </a:solidFill>
                 <a:latin typeface="Aptos"/>
               </a:rPr>
-              <a:t>06 / REAL APPLICATION SCREENS</a:t>
+              <a:t>05 / USER INTERFACE</a:t>
             </a:r>
           </a:p>
         </p:txBody>
@@ -13677,7 +13644,7 @@
                 </a:solidFill>
                 <a:latin typeface="Aptos"/>
               </a:rPr>
-              <a:t>Core workflows</a:t>
+              <a:t>The product in action</a:t>
             </a:r>
           </a:p>
         </p:txBody>
@@ -13756,7 +13723,7 @@
                 </a:solidFill>
                 <a:latin typeface="Aptos"/>
               </a:rPr>
-              <a:t>08</a:t>
+              <a:t>07</a:t>
             </a:r>
           </a:p>
         </p:txBody>
@@ -13769,8 +13736,8 @@
         </p:nvSpPr>
         <p:spPr>
           <a:xfrm>
-            <a:off x="1769364" y="1476756"/>
-            <a:ext cx="3136392" cy="1984248"/>
+            <a:off x="608075" y="1619631"/>
+            <a:ext cx="6556248" cy="4121657"/>
           </a:xfrm>
           <a:prstGeom prst="roundRect">
             <a:avLst>
@@ -13811,7 +13778,7 @@
       </p:sp>
       <p:pic>
         <p:nvPicPr>
-          <p:cNvPr id="7" name="Picture 6" descr="12-ui-students.png"/>
+          <p:cNvPr id="7" name="Picture 6" descr="10-ui-dashboard.png"/>
           <p:cNvPicPr>
             <a:picLocks noChangeAspect="1"/>
           </p:cNvPicPr>
@@ -13825,8 +13792,8 @@
         </p:blipFill>
         <p:spPr>
           <a:xfrm>
-            <a:off x="1801368" y="1508760"/>
-            <a:ext cx="3072384" cy="1920240"/>
+            <a:off x="640080" y="1651635"/>
+            <a:ext cx="6492240" cy="4057649"/>
           </a:xfrm>
           <a:prstGeom prst="rect">
             <a:avLst/>
@@ -13841,8 +13808,8 @@
         </p:nvSpPr>
         <p:spPr>
           <a:xfrm>
-            <a:off x="7347204" y="1476756"/>
-            <a:ext cx="3136392" cy="1984248"/>
+            <a:off x="7511796" y="1633347"/>
+            <a:ext cx="1938527" cy="4094226"/>
           </a:xfrm>
           <a:prstGeom prst="roundRect">
             <a:avLst>
@@ -13883,7 +13850,7 @@
       </p:sp>
       <p:pic>
         <p:nvPicPr>
-          <p:cNvPr id="9" name="Picture 8" descr="13-ui-maintenance.png"/>
+          <p:cNvPr id="9" name="Picture 8" descr="17-ui-mobile.png"/>
           <p:cNvPicPr>
             <a:picLocks noChangeAspect="1"/>
           </p:cNvPicPr>
@@ -13897,8 +13864,8 @@
         </p:blipFill>
         <p:spPr>
           <a:xfrm>
-            <a:off x="7379208" y="1508760"/>
-            <a:ext cx="3072384" cy="1920240"/>
+            <a:off x="7543800" y="1665351"/>
+            <a:ext cx="1874519" cy="4030218"/>
           </a:xfrm>
           <a:prstGeom prst="rect">
             <a:avLst/>
@@ -13913,8 +13880,8 @@
         </p:nvSpPr>
         <p:spPr>
           <a:xfrm>
-            <a:off x="1769364" y="3671315"/>
-            <a:ext cx="3136392" cy="1984248"/>
+            <a:off x="9614916" y="3048381"/>
+            <a:ext cx="1984248" cy="1264158"/>
           </a:xfrm>
           <a:prstGeom prst="roundRect">
             <a:avLst>
@@ -13955,7 +13922,7 @@
       </p:sp>
       <p:pic>
         <p:nvPicPr>
-          <p:cNvPr id="11" name="Picture 10" descr="14-ui-complaints.png"/>
+          <p:cNvPr id="11" name="Picture 10" descr="11-ui-rooms.png"/>
           <p:cNvPicPr>
             <a:picLocks noChangeAspect="1"/>
           </p:cNvPicPr>
@@ -13969,8 +13936,8 @@
         </p:blipFill>
         <p:spPr>
           <a:xfrm>
-            <a:off x="1801368" y="3703320"/>
-            <a:ext cx="3072384" cy="1920240"/>
+            <a:off x="9646920" y="3080385"/>
+            <a:ext cx="1920240" cy="1200150"/>
           </a:xfrm>
           <a:prstGeom prst="rect">
             <a:avLst/>
@@ -13979,86 +13946,14 @@
       </p:pic>
       <p:sp>
         <p:nvSpPr>
-          <p:cNvPr id="12" name="Rounded Rectangle 11"/>
-          <p:cNvSpPr/>
-          <p:nvPr/>
-        </p:nvSpPr>
-        <p:spPr>
-          <a:xfrm>
-            <a:off x="7347204" y="3671315"/>
-            <a:ext cx="3136392" cy="1984248"/>
-          </a:xfrm>
-          <a:prstGeom prst="roundRect">
-            <a:avLst>
-              <a:gd name="adj" fmla="val 12000"/>
-            </a:avLst>
-          </a:prstGeom>
-          <a:solidFill>
-            <a:srgbClr val="1D2B44"/>
-          </a:solidFill>
-          <a:ln>
-            <a:solidFill>
-              <a:srgbClr val="405371"/>
-            </a:solidFill>
-          </a:ln>
-        </p:spPr>
-        <p:style>
-          <a:lnRef idx="1">
-            <a:schemeClr val="accent1"/>
-          </a:lnRef>
-          <a:fillRef idx="3">
-            <a:schemeClr val="accent1"/>
-          </a:fillRef>
-          <a:effectRef idx="2">
-            <a:schemeClr val="accent1"/>
-          </a:effectRef>
-          <a:fontRef idx="minor">
-            <a:schemeClr val="lt1"/>
-          </a:fontRef>
-        </p:style>
-        <p:txBody>
-          <a:bodyPr rtlCol="0" anchor="ctr"/>
-          <a:lstStyle/>
-          <a:p>
-            <a:pPr algn="ctr"/>
-            <a:endParaRPr/>
-          </a:p>
-        </p:txBody>
-      </p:sp>
-      <p:pic>
-        <p:nvPicPr>
-          <p:cNvPr id="13" name="Picture 12" descr="16-ui-fees.png"/>
-          <p:cNvPicPr>
-            <a:picLocks noChangeAspect="1"/>
-          </p:cNvPicPr>
-          <p:nvPr/>
-        </p:nvPicPr>
-        <p:blipFill>
-          <a:blip r:embed="rId5"/>
-          <a:stretch>
-            <a:fillRect/>
-          </a:stretch>
-        </p:blipFill>
-        <p:spPr>
-          <a:xfrm>
-            <a:off x="7379208" y="3703320"/>
-            <a:ext cx="3072384" cy="1920240"/>
-          </a:xfrm>
-          <a:prstGeom prst="rect">
-            <a:avLst/>
-          </a:prstGeom>
-        </p:spPr>
-      </p:pic>
-      <p:sp>
-        <p:nvSpPr>
-          <p:cNvPr id="14" name="TextBox 13"/>
-          <p:cNvSpPr txBox="1"/>
-          <p:nvPr/>
-        </p:nvSpPr>
-        <p:spPr>
-          <a:xfrm>
-            <a:off x="731520" y="5925312"/>
-            <a:ext cx="10515600" cy="274320"/>
+          <p:cNvPr id="12" name="TextBox 11"/>
+          <p:cNvSpPr txBox="1"/>
+          <p:nvPr/>
+        </p:nvSpPr>
+        <p:spPr>
+          <a:xfrm>
+            <a:off x="685800" y="6080760"/>
+            <a:ext cx="6400800" cy="274320"/>
           </a:xfrm>
           <a:prstGeom prst="rect">
             <a:avLst/>
@@ -14078,7 +13973,7 @@
                 </a:solidFill>
                 <a:latin typeface="Aptos"/>
               </a:rPr>
-              <a:t>Student records • maintenance requests • complaints • fee tracking</a:t>
+              <a:t>Dashboard • mobile layout • room availability</a:t>
             </a:r>
           </a:p>
         </p:txBody>
@@ -14145,7 +14040,7 @@
                 </a:solidFill>
                 <a:latin typeface="Aptos"/>
               </a:rPr>
-              <a:t>07 / CORRECTNESS</a:t>
+              <a:t>06 / REAL APPLICATION SCREENS</a:t>
             </a:r>
           </a:p>
         </p:txBody>
@@ -14179,7 +14074,7 @@
                 </a:solidFill>
                 <a:latin typeface="Aptos"/>
               </a:rPr>
-              <a:t>Backend API and automated tests</a:t>
+              <a:t>Core workflows</a:t>
             </a:r>
           </a:p>
         </p:txBody>
@@ -14258,7 +14153,7 @@
                 </a:solidFill>
                 <a:latin typeface="Aptos"/>
               </a:rPr>
-              <a:t>09</a:t>
+              <a:t>08</a:t>
             </a:r>
           </a:p>
         </p:txBody>
@@ -14271,8 +14166,8 @@
         </p:nvSpPr>
         <p:spPr>
           <a:xfrm>
-            <a:off x="1484237" y="1449324"/>
-            <a:ext cx="3834661" cy="2944368"/>
+            <a:off x="1769364" y="1476756"/>
+            <a:ext cx="3136392" cy="1984248"/>
           </a:xfrm>
           <a:prstGeom prst="roundRect">
             <a:avLst>
@@ -14313,7 +14208,7 @@
       </p:sp>
       <p:pic>
         <p:nvPicPr>
-          <p:cNvPr id="7" name="Picture 6" descr="08-swagger-docs.png"/>
+          <p:cNvPr id="7" name="Picture 6" descr="12-ui-students.png"/>
           <p:cNvPicPr>
             <a:picLocks noChangeAspect="1"/>
           </p:cNvPicPr>
@@ -14327,8 +14222,8 @@
         </p:blipFill>
         <p:spPr>
           <a:xfrm>
-            <a:off x="1516241" y="1481328"/>
-            <a:ext cx="3770653" cy="2880360"/>
+            <a:off x="1801368" y="1508760"/>
+            <a:ext cx="3072384" cy="1920240"/>
           </a:xfrm>
           <a:prstGeom prst="rect">
             <a:avLst/>
@@ -14343,8 +14238,8 @@
         </p:nvSpPr>
         <p:spPr>
           <a:xfrm>
-            <a:off x="6875639" y="1449324"/>
-            <a:ext cx="4170961" cy="2944368"/>
+            <a:off x="7347204" y="1476756"/>
+            <a:ext cx="3136392" cy="1984248"/>
           </a:xfrm>
           <a:prstGeom prst="roundRect">
             <a:avLst>
@@ -14385,7 +14280,7 @@
       </p:sp>
       <p:pic>
         <p:nvPicPr>
-          <p:cNvPr id="9" name="Picture 8" descr="01-pytest.png"/>
+          <p:cNvPr id="9" name="Picture 8" descr="13-ui-maintenance.png"/>
           <p:cNvPicPr>
             <a:picLocks noChangeAspect="1"/>
           </p:cNvPicPr>
@@ -14399,8 +14294,8 @@
         </p:blipFill>
         <p:spPr>
           <a:xfrm>
-            <a:off x="6907643" y="1481328"/>
-            <a:ext cx="4106953" cy="2880360"/>
+            <a:off x="7379208" y="1508760"/>
+            <a:ext cx="3072384" cy="1920240"/>
           </a:xfrm>
           <a:prstGeom prst="rect">
             <a:avLst/>
@@ -14415,8 +14310,8 @@
         </p:nvSpPr>
         <p:spPr>
           <a:xfrm>
-            <a:off x="685800" y="4617720"/>
-            <a:ext cx="10789920" cy="1051560"/>
+            <a:off x="1769364" y="3671315"/>
+            <a:ext cx="3136392" cy="1984248"/>
           </a:xfrm>
           <a:prstGeom prst="roundRect">
             <a:avLst>
@@ -14424,10 +14319,12 @@
             </a:avLst>
           </a:prstGeom>
           <a:solidFill>
-            <a:srgbClr val="172237"/>
+            <a:srgbClr val="1D2B44"/>
           </a:solidFill>
           <a:ln>
-            <a:noFill/>
+            <a:solidFill>
+              <a:srgbClr val="405371"/>
+            </a:solidFill>
           </a:ln>
         </p:spPr>
         <p:style>
@@ -14453,108 +14350,102 @@
           </a:p>
         </p:txBody>
       </p:sp>
-      <p:sp>
-        <p:nvSpPr>
-          <p:cNvPr id="11" name="TextBox 10"/>
-          <p:cNvSpPr txBox="1"/>
-          <p:nvPr/>
-        </p:nvSpPr>
-        <p:spPr>
-          <a:xfrm>
-            <a:off x="914400" y="4828032"/>
-            <a:ext cx="1828800" cy="274320"/>
-          </a:xfrm>
-          <a:prstGeom prst="rect">
-            <a:avLst/>
-          </a:prstGeom>
-          <a:noFill/>
-        </p:spPr>
-        <p:txBody>
-          <a:bodyPr wrap="square" lIns="36576" tIns="36576" rIns="36576" bIns="36576" anchor="t">
-            <a:spAutoFit/>
-          </a:bodyPr>
-          <a:lstStyle/>
-          <a:p>
-            <a:r>
-              <a:rPr sz="1400" b="1">
-                <a:solidFill>
-                  <a:srgbClr val="45D3E6"/>
-                </a:solidFill>
-                <a:latin typeface="Aptos"/>
-              </a:rPr>
-              <a:t>API checks</a:t>
-            </a:r>
-          </a:p>
-        </p:txBody>
-      </p:sp>
-      <p:sp>
-        <p:nvSpPr>
-          <p:cNvPr id="12" name="TextBox 11"/>
-          <p:cNvSpPr txBox="1"/>
-          <p:nvPr/>
-        </p:nvSpPr>
-        <p:spPr>
-          <a:xfrm>
-            <a:off x="2743200" y="4773168"/>
-            <a:ext cx="2834640" cy="594360"/>
-          </a:xfrm>
-          <a:prstGeom prst="rect">
-            <a:avLst/>
-          </a:prstGeom>
-          <a:noFill/>
-        </p:spPr>
-        <p:txBody>
-          <a:bodyPr wrap="square" lIns="36576" tIns="36576" rIns="36576" bIns="36576" anchor="t">
-            <a:spAutoFit/>
-          </a:bodyPr>
-          <a:lstStyle/>
-          <a:p>
-            <a:r>
-              <a:rPr sz="1200" b="0">
-                <a:solidFill>
-                  <a:srgbClr val="F3F7FC"/>
-                </a:solidFill>
-                <a:latin typeface="Aptos"/>
-              </a:rPr>
-              <a:t>Health and readiness endpoints; interactive Swagger documentation.</a:t>
-            </a:r>
-          </a:p>
-        </p:txBody>
-      </p:sp>
-      <p:sp>
-        <p:nvSpPr>
-          <p:cNvPr id="13" name="TextBox 12"/>
-          <p:cNvSpPr txBox="1"/>
-          <p:nvPr/>
-        </p:nvSpPr>
-        <p:spPr>
-          <a:xfrm>
-            <a:off x="5989320" y="4828032"/>
-            <a:ext cx="1645920" cy="274320"/>
-          </a:xfrm>
-          <a:prstGeom prst="rect">
-            <a:avLst/>
-          </a:prstGeom>
-          <a:noFill/>
-        </p:spPr>
-        <p:txBody>
-          <a:bodyPr wrap="square" lIns="36576" tIns="36576" rIns="36576" bIns="36576" anchor="t">
-            <a:spAutoFit/>
-          </a:bodyPr>
-          <a:lstStyle/>
-          <a:p>
-            <a:r>
-              <a:rPr sz="1400" b="1">
-                <a:solidFill>
-                  <a:srgbClr val="70E0AA"/>
-                </a:solidFill>
-                <a:latin typeface="Aptos"/>
-              </a:rPr>
-              <a:t>Test suite</a:t>
-            </a:r>
-          </a:p>
-        </p:txBody>
-      </p:sp>
+      <p:pic>
+        <p:nvPicPr>
+          <p:cNvPr id="11" name="Picture 10" descr="14-ui-complaints.png"/>
+          <p:cNvPicPr>
+            <a:picLocks noChangeAspect="1"/>
+          </p:cNvPicPr>
+          <p:nvPr/>
+        </p:nvPicPr>
+        <p:blipFill>
+          <a:blip r:embed="rId4"/>
+          <a:stretch>
+            <a:fillRect/>
+          </a:stretch>
+        </p:blipFill>
+        <p:spPr>
+          <a:xfrm>
+            <a:off x="1801368" y="3703320"/>
+            <a:ext cx="3072384" cy="1920240"/>
+          </a:xfrm>
+          <a:prstGeom prst="rect">
+            <a:avLst/>
+          </a:prstGeom>
+        </p:spPr>
+      </p:pic>
+      <p:sp>
+        <p:nvSpPr>
+          <p:cNvPr id="12" name="Rounded Rectangle 11"/>
+          <p:cNvSpPr/>
+          <p:nvPr/>
+        </p:nvSpPr>
+        <p:spPr>
+          <a:xfrm>
+            <a:off x="7347204" y="3671315"/>
+            <a:ext cx="3136392" cy="1984248"/>
+          </a:xfrm>
+          <a:prstGeom prst="roundRect">
+            <a:avLst>
+              <a:gd name="adj" fmla="val 12000"/>
+            </a:avLst>
+          </a:prstGeom>
+          <a:solidFill>
+            <a:srgbClr val="1D2B44"/>
+          </a:solidFill>
+          <a:ln>
+            <a:solidFill>
+              <a:srgbClr val="405371"/>
+            </a:solidFill>
+          </a:ln>
+        </p:spPr>
+        <p:style>
+          <a:lnRef idx="1">
+            <a:schemeClr val="accent1"/>
+          </a:lnRef>
+          <a:fillRef idx="3">
+            <a:schemeClr val="accent1"/>
+          </a:fillRef>
+          <a:effectRef idx="2">
+            <a:schemeClr val="accent1"/>
+          </a:effectRef>
+          <a:fontRef idx="minor">
+            <a:schemeClr val="lt1"/>
+          </a:fontRef>
+        </p:style>
+        <p:txBody>
+          <a:bodyPr rtlCol="0" anchor="ctr"/>
+          <a:lstStyle/>
+          <a:p>
+            <a:pPr algn="ctr"/>
+            <a:endParaRPr/>
+          </a:p>
+        </p:txBody>
+      </p:sp>
+      <p:pic>
+        <p:nvPicPr>
+          <p:cNvPr id="13" name="Picture 12" descr="16-ui-fees.png"/>
+          <p:cNvPicPr>
+            <a:picLocks noChangeAspect="1"/>
+          </p:cNvPicPr>
+          <p:nvPr/>
+        </p:nvPicPr>
+        <p:blipFill>
+          <a:blip r:embed="rId5"/>
+          <a:stretch>
+            <a:fillRect/>
+          </a:stretch>
+        </p:blipFill>
+        <p:spPr>
+          <a:xfrm>
+            <a:off x="7379208" y="3703320"/>
+            <a:ext cx="3072384" cy="1920240"/>
+          </a:xfrm>
+          <a:prstGeom prst="rect">
+            <a:avLst/>
+          </a:prstGeom>
+        </p:spPr>
+      </p:pic>
       <p:sp>
         <p:nvSpPr>
           <p:cNvPr id="14" name="TextBox 13"/>
@@ -14563,28 +14454,28 @@
         </p:nvSpPr>
         <p:spPr>
           <a:xfrm>
-            <a:off x="7498079" y="4773168"/>
-            <a:ext cx="3657600" cy="594360"/>
-          </a:xfrm>
-          <a:prstGeom prst="rect">
-            <a:avLst/>
-          </a:prstGeom>
-          <a:noFill/>
-        </p:spPr>
-        <p:txBody>
-          <a:bodyPr wrap="square" lIns="36576" tIns="36576" rIns="36576" bIns="36576" anchor="t">
-            <a:spAutoFit/>
-          </a:bodyPr>
-          <a:lstStyle/>
-          <a:p>
-            <a:r>
-              <a:rPr sz="1200" b="0">
-                <a:solidFill>
-                  <a:srgbClr val="F3F7FC"/>
-                </a:solidFill>
-                <a:latin typeface="Aptos"/>
-              </a:rPr>
-              <a:t>README reports 22 pytest tests using in-memory SQLite, not the real database.</a:t>
+            <a:off x="731520" y="5925312"/>
+            <a:ext cx="10515600" cy="274320"/>
+          </a:xfrm>
+          <a:prstGeom prst="rect">
+            <a:avLst/>
+          </a:prstGeom>
+          <a:noFill/>
+        </p:spPr>
+        <p:txBody>
+          <a:bodyPr wrap="square" lIns="36576" tIns="36576" rIns="36576" bIns="36576" anchor="t">
+            <a:spAutoFit/>
+          </a:bodyPr>
+          <a:lstStyle/>
+          <a:p>
+            <a:r>
+              <a:rPr sz="1100" b="0">
+                <a:solidFill>
+                  <a:srgbClr val="ADBBCF"/>
+                </a:solidFill>
+                <a:latin typeface="Aptos"/>
+              </a:rPr>
+              <a:t>Student records • maintenance requests • complaints • fee tracking</a:t>
             </a:r>
           </a:p>
         </p:txBody>
